--- a/topic07-TDD-and-JUnit/unit-07a-lectures/talk-4-planning-tests/d-prog-fund-2-junit-planning-tests.pptx
+++ b/topic07-TDD-and-JUnit/unit-07a-lectures/talk-4-planning-tests/d-prog-fund-2-junit-planning-tests.pptx
@@ -232,7 +232,7 @@
           <a:p>
             <a:fld id="{56BC3C30-7F3D-4B20-9974-47C57B22CA6E}" type="datetimeFigureOut">
               <a:rPr lang="en-IE" smtClean="0"/>
-              <a:t>03/03/2026</a:t>
+              <a:t>07/03/2026</a:t>
             </a:fld>
             <a:endParaRPr lang="en-IE"/>
           </a:p>
@@ -680,7 +680,7 @@
             <a:fld id="{1D8BD707-D9CF-40AE-B4C6-C98DA3205C09}" type="datetimeFigureOut">
               <a:rPr lang="en-US" smtClean="0"/>
               <a:pPr/>
-              <a:t>3/3/2026</a:t>
+              <a:t>3/7/26</a:t>
             </a:fld>
             <a:endParaRPr lang="en-US"/>
           </a:p>
@@ -845,7 +845,7 @@
             <a:fld id="{1D8BD707-D9CF-40AE-B4C6-C98DA3205C09}" type="datetimeFigureOut">
               <a:rPr lang="en-US" smtClean="0"/>
               <a:pPr/>
-              <a:t>3/3/2026</a:t>
+              <a:t>3/7/26</a:t>
             </a:fld>
             <a:endParaRPr lang="en-US"/>
           </a:p>
@@ -1020,7 +1020,7 @@
             <a:fld id="{1D8BD707-D9CF-40AE-B4C6-C98DA3205C09}" type="datetimeFigureOut">
               <a:rPr lang="en-US" smtClean="0"/>
               <a:pPr/>
-              <a:t>3/3/2026</a:t>
+              <a:t>3/7/26</a:t>
             </a:fld>
             <a:endParaRPr lang="en-US"/>
           </a:p>
@@ -1196,7 +1196,7 @@
           </a:ln>
           <a:extLst>
             <a:ext uri="{C572A759-6A51-4108-AA02-DFA0A04FC94B}">
-              <ma14:wrappingTextBoxFlag xmlns:ma14="http://schemas.microsoft.com/office/mac/drawingml/2011/main" xmlns="" val="1"/>
+              <ma14:wrappingTextBoxFlag xmlns="" xmlns:ma14="http://schemas.microsoft.com/office/mac/drawingml/2011/main" val="1"/>
             </a:ext>
           </a:extLst>
         </p:spPr>
@@ -1283,7 +1283,7 @@
             <a:effectLst/>
             <a:extLst>
               <a:ext uri="{C572A759-6A51-4108-AA02-DFA0A04FC94B}">
-                <ma14:wrappingTextBoxFlag xmlns:ma14="http://schemas.microsoft.com/office/mac/drawingml/2011/main" xmlns="" val="1"/>
+                <ma14:wrappingTextBoxFlag xmlns="" xmlns:ma14="http://schemas.microsoft.com/office/mac/drawingml/2011/main" val="1"/>
               </a:ext>
             </a:extLst>
           </p:spPr>
@@ -1356,7 +1356,7 @@
             <a:effectLst/>
             <a:extLst>
               <a:ext uri="{C572A759-6A51-4108-AA02-DFA0A04FC94B}">
-                <ma14:wrappingTextBoxFlag xmlns:ma14="http://schemas.microsoft.com/office/mac/drawingml/2011/main" xmlns="" val="1"/>
+                <ma14:wrappingTextBoxFlag xmlns="" xmlns:ma14="http://schemas.microsoft.com/office/mac/drawingml/2011/main" val="1"/>
               </a:ext>
             </a:extLst>
           </p:spPr>
@@ -1407,7 +1407,7 @@
             <a:effectLst/>
             <a:extLst>
               <a:ext uri="{C572A759-6A51-4108-AA02-DFA0A04FC94B}">
-                <ma14:wrappingTextBoxFlag xmlns:ma14="http://schemas.microsoft.com/office/mac/drawingml/2011/main" xmlns="" val="1"/>
+                <ma14:wrappingTextBoxFlag xmlns="" xmlns:ma14="http://schemas.microsoft.com/office/mac/drawingml/2011/main" val="1"/>
               </a:ext>
             </a:extLst>
           </p:spPr>
@@ -1800,7 +1800,7 @@
             <a:fld id="{1D8BD707-D9CF-40AE-B4C6-C98DA3205C09}" type="datetimeFigureOut">
               <a:rPr lang="en-US" smtClean="0"/>
               <a:pPr/>
-              <a:t>3/3/2026</a:t>
+              <a:t>3/7/26</a:t>
             </a:fld>
             <a:endParaRPr lang="en-US"/>
           </a:p>
@@ -2080,7 +2080,7 @@
             <a:fld id="{1D8BD707-D9CF-40AE-B4C6-C98DA3205C09}" type="datetimeFigureOut">
               <a:rPr lang="en-US" smtClean="0"/>
               <a:pPr/>
-              <a:t>3/3/2026</a:t>
+              <a:t>3/7/26</a:t>
             </a:fld>
             <a:endParaRPr lang="en-US"/>
           </a:p>
@@ -2373,7 +2373,7 @@
             <a:fld id="{1D8BD707-D9CF-40AE-B4C6-C98DA3205C09}" type="datetimeFigureOut">
               <a:rPr lang="en-US" smtClean="0"/>
               <a:pPr/>
-              <a:t>3/3/2026</a:t>
+              <a:t>3/7/26</a:t>
             </a:fld>
             <a:endParaRPr lang="en-US"/>
           </a:p>
@@ -2831,7 +2831,7 @@
             <a:fld id="{1D8BD707-D9CF-40AE-B4C6-C98DA3205C09}" type="datetimeFigureOut">
               <a:rPr lang="en-US" smtClean="0"/>
               <a:pPr/>
-              <a:t>3/3/2026</a:t>
+              <a:t>3/7/26</a:t>
             </a:fld>
             <a:endParaRPr lang="en-US"/>
           </a:p>
@@ -2991,7 +2991,7 @@
             <a:fld id="{1D8BD707-D9CF-40AE-B4C6-C98DA3205C09}" type="datetimeFigureOut">
               <a:rPr lang="en-US" smtClean="0"/>
               <a:pPr/>
-              <a:t>3/3/2026</a:t>
+              <a:t>3/7/26</a:t>
             </a:fld>
             <a:endParaRPr lang="en-US"/>
           </a:p>
@@ -3118,7 +3118,7 @@
             <a:fld id="{1D8BD707-D9CF-40AE-B4C6-C98DA3205C09}" type="datetimeFigureOut">
               <a:rPr lang="en-US" smtClean="0"/>
               <a:pPr/>
-              <a:t>3/3/2026</a:t>
+              <a:t>3/7/26</a:t>
             </a:fld>
             <a:endParaRPr lang="en-US"/>
           </a:p>
@@ -3390,7 +3390,7 @@
             <a:fld id="{1D8BD707-D9CF-40AE-B4C6-C98DA3205C09}" type="datetimeFigureOut">
               <a:rPr lang="en-US" smtClean="0"/>
               <a:pPr/>
-              <a:t>3/3/2026</a:t>
+              <a:t>3/7/26</a:t>
             </a:fld>
             <a:endParaRPr lang="en-US"/>
           </a:p>
@@ -3639,7 +3639,7 @@
             <a:fld id="{1D8BD707-D9CF-40AE-B4C6-C98DA3205C09}" type="datetimeFigureOut">
               <a:rPr lang="en-US" smtClean="0"/>
               <a:pPr/>
-              <a:t>3/3/2026</a:t>
+              <a:t>3/7/26</a:t>
             </a:fld>
             <a:endParaRPr lang="en-US"/>
           </a:p>
@@ -3847,7 +3847,7 @@
             <a:fld id="{1D8BD707-D9CF-40AE-B4C6-C98DA3205C09}" type="datetimeFigureOut">
               <a:rPr lang="en-US" smtClean="0"/>
               <a:pPr/>
-              <a:t>3/3/2026</a:t>
+              <a:t>3/7/26</a:t>
             </a:fld>
             <a:endParaRPr lang="en-US"/>
           </a:p>
@@ -5667,6 +5667,369 @@
   <p:clrMapOvr>
     <a:masterClrMapping/>
   </p:clrMapOvr>
+  <p:timing>
+    <p:tnLst>
+      <p:par>
+        <p:cTn id="1" dur="indefinite" restart="never" nodeType="tmRoot">
+          <p:childTnLst>
+            <p:seq concurrent="1" nextAc="seek">
+              <p:cTn id="2" dur="indefinite" nodeType="mainSeq">
+                <p:childTnLst>
+                  <p:par>
+                    <p:cTn id="3" fill="hold">
+                      <p:stCondLst>
+                        <p:cond delay="indefinite"/>
+                      </p:stCondLst>
+                      <p:childTnLst>
+                        <p:par>
+                          <p:cTn id="4" fill="hold">
+                            <p:stCondLst>
+                              <p:cond delay="0"/>
+                            </p:stCondLst>
+                            <p:childTnLst>
+                              <p:par>
+                                <p:cTn id="5" presetID="2" presetClass="entr" presetSubtype="4" fill="hold" grpId="0" nodeType="clickEffect">
+                                  <p:stCondLst>
+                                    <p:cond delay="0"/>
+                                  </p:stCondLst>
+                                  <p:childTnLst>
+                                    <p:set>
+                                      <p:cBhvr>
+                                        <p:cTn id="6" dur="1" fill="hold">
+                                          <p:stCondLst>
+                                            <p:cond delay="0"/>
+                                          </p:stCondLst>
+                                        </p:cTn>
+                                        <p:tgtEl>
+                                          <p:spTgt spid="3"/>
+                                        </p:tgtEl>
+                                        <p:attrNameLst>
+                                          <p:attrName>style.visibility</p:attrName>
+                                        </p:attrNameLst>
+                                      </p:cBhvr>
+                                      <p:to>
+                                        <p:strVal val="visible"/>
+                                      </p:to>
+                                    </p:set>
+                                    <p:anim calcmode="lin" valueType="num">
+                                      <p:cBhvr additive="base">
+                                        <p:cTn id="7" dur="500" fill="hold"/>
+                                        <p:tgtEl>
+                                          <p:spTgt spid="3"/>
+                                        </p:tgtEl>
+                                        <p:attrNameLst>
+                                          <p:attrName>ppt_x</p:attrName>
+                                        </p:attrNameLst>
+                                      </p:cBhvr>
+                                      <p:tavLst>
+                                        <p:tav tm="0">
+                                          <p:val>
+                                            <p:strVal val="#ppt_x"/>
+                                          </p:val>
+                                        </p:tav>
+                                        <p:tav tm="100000">
+                                          <p:val>
+                                            <p:strVal val="#ppt_x"/>
+                                          </p:val>
+                                        </p:tav>
+                                      </p:tavLst>
+                                    </p:anim>
+                                    <p:anim calcmode="lin" valueType="num">
+                                      <p:cBhvr additive="base">
+                                        <p:cTn id="8" dur="500" fill="hold"/>
+                                        <p:tgtEl>
+                                          <p:spTgt spid="3"/>
+                                        </p:tgtEl>
+                                        <p:attrNameLst>
+                                          <p:attrName>ppt_y</p:attrName>
+                                        </p:attrNameLst>
+                                      </p:cBhvr>
+                                      <p:tavLst>
+                                        <p:tav tm="0">
+                                          <p:val>
+                                            <p:strVal val="1+#ppt_h/2"/>
+                                          </p:val>
+                                        </p:tav>
+                                        <p:tav tm="100000">
+                                          <p:val>
+                                            <p:strVal val="#ppt_y"/>
+                                          </p:val>
+                                        </p:tav>
+                                      </p:tavLst>
+                                    </p:anim>
+                                  </p:childTnLst>
+                                </p:cTn>
+                              </p:par>
+                              <p:par>
+                                <p:cTn id="9" presetID="2" presetClass="entr" presetSubtype="4" fill="hold" nodeType="withEffect">
+                                  <p:stCondLst>
+                                    <p:cond delay="0"/>
+                                  </p:stCondLst>
+                                  <p:childTnLst>
+                                    <p:set>
+                                      <p:cBhvr>
+                                        <p:cTn id="10" dur="1" fill="hold">
+                                          <p:stCondLst>
+                                            <p:cond delay="0"/>
+                                          </p:stCondLst>
+                                        </p:cTn>
+                                        <p:tgtEl>
+                                          <p:spTgt spid="11"/>
+                                        </p:tgtEl>
+                                        <p:attrNameLst>
+                                          <p:attrName>style.visibility</p:attrName>
+                                        </p:attrNameLst>
+                                      </p:cBhvr>
+                                      <p:to>
+                                        <p:strVal val="visible"/>
+                                      </p:to>
+                                    </p:set>
+                                    <p:anim calcmode="lin" valueType="num">
+                                      <p:cBhvr additive="base">
+                                        <p:cTn id="11" dur="500" fill="hold"/>
+                                        <p:tgtEl>
+                                          <p:spTgt spid="11"/>
+                                        </p:tgtEl>
+                                        <p:attrNameLst>
+                                          <p:attrName>ppt_x</p:attrName>
+                                        </p:attrNameLst>
+                                      </p:cBhvr>
+                                      <p:tavLst>
+                                        <p:tav tm="0">
+                                          <p:val>
+                                            <p:strVal val="#ppt_x"/>
+                                          </p:val>
+                                        </p:tav>
+                                        <p:tav tm="100000">
+                                          <p:val>
+                                            <p:strVal val="#ppt_x"/>
+                                          </p:val>
+                                        </p:tav>
+                                      </p:tavLst>
+                                    </p:anim>
+                                    <p:anim calcmode="lin" valueType="num">
+                                      <p:cBhvr additive="base">
+                                        <p:cTn id="12" dur="500" fill="hold"/>
+                                        <p:tgtEl>
+                                          <p:spTgt spid="11"/>
+                                        </p:tgtEl>
+                                        <p:attrNameLst>
+                                          <p:attrName>ppt_y</p:attrName>
+                                        </p:attrNameLst>
+                                      </p:cBhvr>
+                                      <p:tavLst>
+                                        <p:tav tm="0">
+                                          <p:val>
+                                            <p:strVal val="1+#ppt_h/2"/>
+                                          </p:val>
+                                        </p:tav>
+                                        <p:tav tm="100000">
+                                          <p:val>
+                                            <p:strVal val="#ppt_y"/>
+                                          </p:val>
+                                        </p:tav>
+                                      </p:tavLst>
+                                    </p:anim>
+                                  </p:childTnLst>
+                                </p:cTn>
+                              </p:par>
+                            </p:childTnLst>
+                          </p:cTn>
+                        </p:par>
+                      </p:childTnLst>
+                    </p:cTn>
+                  </p:par>
+                  <p:par>
+                    <p:cTn id="13" fill="hold">
+                      <p:stCondLst>
+                        <p:cond delay="indefinite"/>
+                      </p:stCondLst>
+                      <p:childTnLst>
+                        <p:par>
+                          <p:cTn id="14" fill="hold">
+                            <p:stCondLst>
+                              <p:cond delay="0"/>
+                            </p:stCondLst>
+                            <p:childTnLst>
+                              <p:par>
+                                <p:cTn id="15" presetID="2" presetClass="entr" presetSubtype="4" fill="hold" grpId="0" nodeType="clickEffect">
+                                  <p:stCondLst>
+                                    <p:cond delay="0"/>
+                                  </p:stCondLst>
+                                  <p:childTnLst>
+                                    <p:set>
+                                      <p:cBhvr>
+                                        <p:cTn id="16" dur="1" fill="hold">
+                                          <p:stCondLst>
+                                            <p:cond delay="0"/>
+                                          </p:stCondLst>
+                                        </p:cTn>
+                                        <p:tgtEl>
+                                          <p:spTgt spid="9"/>
+                                        </p:tgtEl>
+                                        <p:attrNameLst>
+                                          <p:attrName>style.visibility</p:attrName>
+                                        </p:attrNameLst>
+                                      </p:cBhvr>
+                                      <p:to>
+                                        <p:strVal val="visible"/>
+                                      </p:to>
+                                    </p:set>
+                                    <p:anim calcmode="lin" valueType="num">
+                                      <p:cBhvr additive="base">
+                                        <p:cTn id="17" dur="500" fill="hold"/>
+                                        <p:tgtEl>
+                                          <p:spTgt spid="9"/>
+                                        </p:tgtEl>
+                                        <p:attrNameLst>
+                                          <p:attrName>ppt_x</p:attrName>
+                                        </p:attrNameLst>
+                                      </p:cBhvr>
+                                      <p:tavLst>
+                                        <p:tav tm="0">
+                                          <p:val>
+                                            <p:strVal val="#ppt_x"/>
+                                          </p:val>
+                                        </p:tav>
+                                        <p:tav tm="100000">
+                                          <p:val>
+                                            <p:strVal val="#ppt_x"/>
+                                          </p:val>
+                                        </p:tav>
+                                      </p:tavLst>
+                                    </p:anim>
+                                    <p:anim calcmode="lin" valueType="num">
+                                      <p:cBhvr additive="base">
+                                        <p:cTn id="18" dur="500" fill="hold"/>
+                                        <p:tgtEl>
+                                          <p:spTgt spid="9"/>
+                                        </p:tgtEl>
+                                        <p:attrNameLst>
+                                          <p:attrName>ppt_y</p:attrName>
+                                        </p:attrNameLst>
+                                      </p:cBhvr>
+                                      <p:tavLst>
+                                        <p:tav tm="0">
+                                          <p:val>
+                                            <p:strVal val="1+#ppt_h/2"/>
+                                          </p:val>
+                                        </p:tav>
+                                        <p:tav tm="100000">
+                                          <p:val>
+                                            <p:strVal val="#ppt_y"/>
+                                          </p:val>
+                                        </p:tav>
+                                      </p:tavLst>
+                                    </p:anim>
+                                  </p:childTnLst>
+                                </p:cTn>
+                              </p:par>
+                              <p:par>
+                                <p:cTn id="19" presetID="2" presetClass="entr" presetSubtype="4" fill="hold" grpId="0" nodeType="withEffect">
+                                  <p:stCondLst>
+                                    <p:cond delay="0"/>
+                                  </p:stCondLst>
+                                  <p:childTnLst>
+                                    <p:set>
+                                      <p:cBhvr>
+                                        <p:cTn id="20" dur="1" fill="hold">
+                                          <p:stCondLst>
+                                            <p:cond delay="0"/>
+                                          </p:stCondLst>
+                                        </p:cTn>
+                                        <p:tgtEl>
+                                          <p:spTgt spid="15"/>
+                                        </p:tgtEl>
+                                        <p:attrNameLst>
+                                          <p:attrName>style.visibility</p:attrName>
+                                        </p:attrNameLst>
+                                      </p:cBhvr>
+                                      <p:to>
+                                        <p:strVal val="visible"/>
+                                      </p:to>
+                                    </p:set>
+                                    <p:anim calcmode="lin" valueType="num">
+                                      <p:cBhvr additive="base">
+                                        <p:cTn id="21" dur="500" fill="hold"/>
+                                        <p:tgtEl>
+                                          <p:spTgt spid="15"/>
+                                        </p:tgtEl>
+                                        <p:attrNameLst>
+                                          <p:attrName>ppt_x</p:attrName>
+                                        </p:attrNameLst>
+                                      </p:cBhvr>
+                                      <p:tavLst>
+                                        <p:tav tm="0">
+                                          <p:val>
+                                            <p:strVal val="#ppt_x"/>
+                                          </p:val>
+                                        </p:tav>
+                                        <p:tav tm="100000">
+                                          <p:val>
+                                            <p:strVal val="#ppt_x"/>
+                                          </p:val>
+                                        </p:tav>
+                                      </p:tavLst>
+                                    </p:anim>
+                                    <p:anim calcmode="lin" valueType="num">
+                                      <p:cBhvr additive="base">
+                                        <p:cTn id="22" dur="500" fill="hold"/>
+                                        <p:tgtEl>
+                                          <p:spTgt spid="15"/>
+                                        </p:tgtEl>
+                                        <p:attrNameLst>
+                                          <p:attrName>ppt_y</p:attrName>
+                                        </p:attrNameLst>
+                                      </p:cBhvr>
+                                      <p:tavLst>
+                                        <p:tav tm="0">
+                                          <p:val>
+                                            <p:strVal val="1+#ppt_h/2"/>
+                                          </p:val>
+                                        </p:tav>
+                                        <p:tav tm="100000">
+                                          <p:val>
+                                            <p:strVal val="#ppt_y"/>
+                                          </p:val>
+                                        </p:tav>
+                                      </p:tavLst>
+                                    </p:anim>
+                                  </p:childTnLst>
+                                </p:cTn>
+                              </p:par>
+                            </p:childTnLst>
+                          </p:cTn>
+                        </p:par>
+                      </p:childTnLst>
+                    </p:cTn>
+                  </p:par>
+                </p:childTnLst>
+              </p:cTn>
+              <p:prevCondLst>
+                <p:cond evt="onPrev" delay="0">
+                  <p:tgtEl>
+                    <p:sldTgt/>
+                  </p:tgtEl>
+                </p:cond>
+              </p:prevCondLst>
+              <p:nextCondLst>
+                <p:cond evt="onNext" delay="0">
+                  <p:tgtEl>
+                    <p:sldTgt/>
+                  </p:tgtEl>
+                </p:cond>
+              </p:nextCondLst>
+            </p:seq>
+          </p:childTnLst>
+        </p:cTn>
+      </p:par>
+    </p:tnLst>
+    <p:bldLst>
+      <p:bldP spid="3" grpId="0" animBg="1"/>
+      <p:bldP spid="9" grpId="0" animBg="1"/>
+      <p:bldP spid="15" grpId="0" animBg="1"/>
+    </p:bldLst>
+  </p:timing>
 </p:sld>
 </file>
 
@@ -5908,6 +6271,295 @@
   <p:clrMapOvr>
     <a:masterClrMapping/>
   </p:clrMapOvr>
+  <p:timing>
+    <p:tnLst>
+      <p:par>
+        <p:cTn id="1" dur="indefinite" restart="never" nodeType="tmRoot">
+          <p:childTnLst>
+            <p:seq concurrent="1" nextAc="seek">
+              <p:cTn id="2" dur="indefinite" nodeType="mainSeq">
+                <p:childTnLst>
+                  <p:par>
+                    <p:cTn id="3" fill="hold">
+                      <p:stCondLst>
+                        <p:cond delay="indefinite"/>
+                      </p:stCondLst>
+                      <p:childTnLst>
+                        <p:par>
+                          <p:cTn id="4" fill="hold">
+                            <p:stCondLst>
+                              <p:cond delay="0"/>
+                            </p:stCondLst>
+                            <p:childTnLst>
+                              <p:par>
+                                <p:cTn id="5" presetID="2" presetClass="entr" presetSubtype="4" fill="hold" nodeType="clickEffect">
+                                  <p:stCondLst>
+                                    <p:cond delay="0"/>
+                                  </p:stCondLst>
+                                  <p:childTnLst>
+                                    <p:set>
+                                      <p:cBhvr>
+                                        <p:cTn id="6" dur="1" fill="hold">
+                                          <p:stCondLst>
+                                            <p:cond delay="0"/>
+                                          </p:stCondLst>
+                                        </p:cTn>
+                                        <p:tgtEl>
+                                          <p:spTgt spid="5"/>
+                                        </p:tgtEl>
+                                        <p:attrNameLst>
+                                          <p:attrName>style.visibility</p:attrName>
+                                        </p:attrNameLst>
+                                      </p:cBhvr>
+                                      <p:to>
+                                        <p:strVal val="visible"/>
+                                      </p:to>
+                                    </p:set>
+                                    <p:anim calcmode="lin" valueType="num">
+                                      <p:cBhvr additive="base">
+                                        <p:cTn id="7" dur="500" fill="hold"/>
+                                        <p:tgtEl>
+                                          <p:spTgt spid="5"/>
+                                        </p:tgtEl>
+                                        <p:attrNameLst>
+                                          <p:attrName>ppt_x</p:attrName>
+                                        </p:attrNameLst>
+                                      </p:cBhvr>
+                                      <p:tavLst>
+                                        <p:tav tm="0">
+                                          <p:val>
+                                            <p:strVal val="#ppt_x"/>
+                                          </p:val>
+                                        </p:tav>
+                                        <p:tav tm="100000">
+                                          <p:val>
+                                            <p:strVal val="#ppt_x"/>
+                                          </p:val>
+                                        </p:tav>
+                                      </p:tavLst>
+                                    </p:anim>
+                                    <p:anim calcmode="lin" valueType="num">
+                                      <p:cBhvr additive="base">
+                                        <p:cTn id="8" dur="500" fill="hold"/>
+                                        <p:tgtEl>
+                                          <p:spTgt spid="5"/>
+                                        </p:tgtEl>
+                                        <p:attrNameLst>
+                                          <p:attrName>ppt_y</p:attrName>
+                                        </p:attrNameLst>
+                                      </p:cBhvr>
+                                      <p:tavLst>
+                                        <p:tav tm="0">
+                                          <p:val>
+                                            <p:strVal val="1+#ppt_h/2"/>
+                                          </p:val>
+                                        </p:tav>
+                                        <p:tav tm="100000">
+                                          <p:val>
+                                            <p:strVal val="#ppt_y"/>
+                                          </p:val>
+                                        </p:tav>
+                                      </p:tavLst>
+                                    </p:anim>
+                                  </p:childTnLst>
+                                </p:cTn>
+                              </p:par>
+                              <p:par>
+                                <p:cTn id="9" presetID="2" presetClass="entr" presetSubtype="4" fill="hold" grpId="0" nodeType="withEffect">
+                                  <p:stCondLst>
+                                    <p:cond delay="0"/>
+                                  </p:stCondLst>
+                                  <p:childTnLst>
+                                    <p:set>
+                                      <p:cBhvr>
+                                        <p:cTn id="10" dur="1" fill="hold">
+                                          <p:stCondLst>
+                                            <p:cond delay="0"/>
+                                          </p:stCondLst>
+                                        </p:cTn>
+                                        <p:tgtEl>
+                                          <p:spTgt spid="3"/>
+                                        </p:tgtEl>
+                                        <p:attrNameLst>
+                                          <p:attrName>style.visibility</p:attrName>
+                                        </p:attrNameLst>
+                                      </p:cBhvr>
+                                      <p:to>
+                                        <p:strVal val="visible"/>
+                                      </p:to>
+                                    </p:set>
+                                    <p:anim calcmode="lin" valueType="num">
+                                      <p:cBhvr additive="base">
+                                        <p:cTn id="11" dur="500" fill="hold"/>
+                                        <p:tgtEl>
+                                          <p:spTgt spid="3"/>
+                                        </p:tgtEl>
+                                        <p:attrNameLst>
+                                          <p:attrName>ppt_x</p:attrName>
+                                        </p:attrNameLst>
+                                      </p:cBhvr>
+                                      <p:tavLst>
+                                        <p:tav tm="0">
+                                          <p:val>
+                                            <p:strVal val="#ppt_x"/>
+                                          </p:val>
+                                        </p:tav>
+                                        <p:tav tm="100000">
+                                          <p:val>
+                                            <p:strVal val="#ppt_x"/>
+                                          </p:val>
+                                        </p:tav>
+                                      </p:tavLst>
+                                    </p:anim>
+                                    <p:anim calcmode="lin" valueType="num">
+                                      <p:cBhvr additive="base">
+                                        <p:cTn id="12" dur="500" fill="hold"/>
+                                        <p:tgtEl>
+                                          <p:spTgt spid="3"/>
+                                        </p:tgtEl>
+                                        <p:attrNameLst>
+                                          <p:attrName>ppt_y</p:attrName>
+                                        </p:attrNameLst>
+                                      </p:cBhvr>
+                                      <p:tavLst>
+                                        <p:tav tm="0">
+                                          <p:val>
+                                            <p:strVal val="1+#ppt_h/2"/>
+                                          </p:val>
+                                        </p:tav>
+                                        <p:tav tm="100000">
+                                          <p:val>
+                                            <p:strVal val="#ppt_y"/>
+                                          </p:val>
+                                        </p:tav>
+                                      </p:tavLst>
+                                    </p:anim>
+                                  </p:childTnLst>
+                                </p:cTn>
+                              </p:par>
+                            </p:childTnLst>
+                          </p:cTn>
+                        </p:par>
+                      </p:childTnLst>
+                    </p:cTn>
+                  </p:par>
+                  <p:par>
+                    <p:cTn id="13" fill="hold">
+                      <p:stCondLst>
+                        <p:cond delay="indefinite"/>
+                      </p:stCondLst>
+                      <p:childTnLst>
+                        <p:par>
+                          <p:cTn id="14" fill="hold">
+                            <p:stCondLst>
+                              <p:cond delay="0"/>
+                            </p:stCondLst>
+                            <p:childTnLst>
+                              <p:par>
+                                <p:cTn id="15" presetID="2" presetClass="entr" presetSubtype="4" fill="hold" grpId="0" nodeType="clickEffect">
+                                  <p:stCondLst>
+                                    <p:cond delay="0"/>
+                                  </p:stCondLst>
+                                  <p:childTnLst>
+                                    <p:set>
+                                      <p:cBhvr>
+                                        <p:cTn id="16" dur="1" fill="hold">
+                                          <p:stCondLst>
+                                            <p:cond delay="0"/>
+                                          </p:stCondLst>
+                                        </p:cTn>
+                                        <p:tgtEl>
+                                          <p:spTgt spid="8"/>
+                                        </p:tgtEl>
+                                        <p:attrNameLst>
+                                          <p:attrName>style.visibility</p:attrName>
+                                        </p:attrNameLst>
+                                      </p:cBhvr>
+                                      <p:to>
+                                        <p:strVal val="visible"/>
+                                      </p:to>
+                                    </p:set>
+                                    <p:anim calcmode="lin" valueType="num">
+                                      <p:cBhvr additive="base">
+                                        <p:cTn id="17" dur="500" fill="hold"/>
+                                        <p:tgtEl>
+                                          <p:spTgt spid="8"/>
+                                        </p:tgtEl>
+                                        <p:attrNameLst>
+                                          <p:attrName>ppt_x</p:attrName>
+                                        </p:attrNameLst>
+                                      </p:cBhvr>
+                                      <p:tavLst>
+                                        <p:tav tm="0">
+                                          <p:val>
+                                            <p:strVal val="#ppt_x"/>
+                                          </p:val>
+                                        </p:tav>
+                                        <p:tav tm="100000">
+                                          <p:val>
+                                            <p:strVal val="#ppt_x"/>
+                                          </p:val>
+                                        </p:tav>
+                                      </p:tavLst>
+                                    </p:anim>
+                                    <p:anim calcmode="lin" valueType="num">
+                                      <p:cBhvr additive="base">
+                                        <p:cTn id="18" dur="500" fill="hold"/>
+                                        <p:tgtEl>
+                                          <p:spTgt spid="8"/>
+                                        </p:tgtEl>
+                                        <p:attrNameLst>
+                                          <p:attrName>ppt_y</p:attrName>
+                                        </p:attrNameLst>
+                                      </p:cBhvr>
+                                      <p:tavLst>
+                                        <p:tav tm="0">
+                                          <p:val>
+                                            <p:strVal val="1+#ppt_h/2"/>
+                                          </p:val>
+                                        </p:tav>
+                                        <p:tav tm="100000">
+                                          <p:val>
+                                            <p:strVal val="#ppt_y"/>
+                                          </p:val>
+                                        </p:tav>
+                                      </p:tavLst>
+                                    </p:anim>
+                                  </p:childTnLst>
+                                </p:cTn>
+                              </p:par>
+                            </p:childTnLst>
+                          </p:cTn>
+                        </p:par>
+                      </p:childTnLst>
+                    </p:cTn>
+                  </p:par>
+                </p:childTnLst>
+              </p:cTn>
+              <p:prevCondLst>
+                <p:cond evt="onPrev" delay="0">
+                  <p:tgtEl>
+                    <p:sldTgt/>
+                  </p:tgtEl>
+                </p:cond>
+              </p:prevCondLst>
+              <p:nextCondLst>
+                <p:cond evt="onNext" delay="0">
+                  <p:tgtEl>
+                    <p:sldTgt/>
+                  </p:tgtEl>
+                </p:cond>
+              </p:nextCondLst>
+            </p:seq>
+          </p:childTnLst>
+        </p:cTn>
+      </p:par>
+    </p:tnLst>
+    <p:bldLst>
+      <p:bldP spid="3" grpId="0" animBg="1"/>
+      <p:bldP spid="8" grpId="0" animBg="1"/>
+    </p:bldLst>
+  </p:timing>
 </p:sld>
 </file>
 
@@ -6847,6 +7499,312 @@
   <p:clrMapOvr>
     <a:masterClrMapping/>
   </p:clrMapOvr>
+  <p:timing>
+    <p:tnLst>
+      <p:par>
+        <p:cTn id="1" dur="indefinite" restart="never" nodeType="tmRoot">
+          <p:childTnLst>
+            <p:seq concurrent="1" nextAc="seek">
+              <p:cTn id="2" dur="indefinite" nodeType="mainSeq">
+                <p:childTnLst>
+                  <p:par>
+                    <p:cTn id="3" fill="hold">
+                      <p:stCondLst>
+                        <p:cond delay="indefinite"/>
+                      </p:stCondLst>
+                      <p:childTnLst>
+                        <p:par>
+                          <p:cTn id="4" fill="hold">
+                            <p:stCondLst>
+                              <p:cond delay="0"/>
+                            </p:stCondLst>
+                            <p:childTnLst>
+                              <p:par>
+                                <p:cTn id="5" presetID="2" presetClass="entr" presetSubtype="4" fill="hold" grpId="0" nodeType="clickEffect">
+                                  <p:stCondLst>
+                                    <p:cond delay="0"/>
+                                  </p:stCondLst>
+                                  <p:childTnLst>
+                                    <p:set>
+                                      <p:cBhvr>
+                                        <p:cTn id="6" dur="1" fill="hold">
+                                          <p:stCondLst>
+                                            <p:cond delay="0"/>
+                                          </p:stCondLst>
+                                        </p:cTn>
+                                        <p:tgtEl>
+                                          <p:spTgt spid="136">
+                                            <p:bg/>
+                                          </p:spTgt>
+                                        </p:tgtEl>
+                                        <p:attrNameLst>
+                                          <p:attrName>style.visibility</p:attrName>
+                                        </p:attrNameLst>
+                                      </p:cBhvr>
+                                      <p:to>
+                                        <p:strVal val="visible"/>
+                                      </p:to>
+                                    </p:set>
+                                    <p:anim calcmode="lin" valueType="num">
+                                      <p:cBhvr additive="base">
+                                        <p:cTn id="7" dur="500" fill="hold"/>
+                                        <p:tgtEl>
+                                          <p:spTgt spid="136">
+                                            <p:bg/>
+                                          </p:spTgt>
+                                        </p:tgtEl>
+                                        <p:attrNameLst>
+                                          <p:attrName>ppt_x</p:attrName>
+                                        </p:attrNameLst>
+                                      </p:cBhvr>
+                                      <p:tavLst>
+                                        <p:tav tm="0">
+                                          <p:val>
+                                            <p:strVal val="#ppt_x"/>
+                                          </p:val>
+                                        </p:tav>
+                                        <p:tav tm="100000">
+                                          <p:val>
+                                            <p:strVal val="#ppt_x"/>
+                                          </p:val>
+                                        </p:tav>
+                                      </p:tavLst>
+                                    </p:anim>
+                                    <p:anim calcmode="lin" valueType="num">
+                                      <p:cBhvr additive="base">
+                                        <p:cTn id="8" dur="500" fill="hold"/>
+                                        <p:tgtEl>
+                                          <p:spTgt spid="136">
+                                            <p:bg/>
+                                          </p:spTgt>
+                                        </p:tgtEl>
+                                        <p:attrNameLst>
+                                          <p:attrName>ppt_y</p:attrName>
+                                        </p:attrNameLst>
+                                      </p:cBhvr>
+                                      <p:tavLst>
+                                        <p:tav tm="0">
+                                          <p:val>
+                                            <p:strVal val="1+#ppt_h/2"/>
+                                          </p:val>
+                                        </p:tav>
+                                        <p:tav tm="100000">
+                                          <p:val>
+                                            <p:strVal val="#ppt_y"/>
+                                          </p:val>
+                                        </p:tav>
+                                      </p:tavLst>
+                                    </p:anim>
+                                  </p:childTnLst>
+                                </p:cTn>
+                              </p:par>
+                              <p:par>
+                                <p:cTn id="9" presetID="2" presetClass="entr" presetSubtype="4" fill="hold" grpId="0" nodeType="withEffect">
+                                  <p:stCondLst>
+                                    <p:cond delay="0"/>
+                                  </p:stCondLst>
+                                  <p:childTnLst>
+                                    <p:set>
+                                      <p:cBhvr>
+                                        <p:cTn id="10" dur="1" fill="hold">
+                                          <p:stCondLst>
+                                            <p:cond delay="0"/>
+                                          </p:stCondLst>
+                                        </p:cTn>
+                                        <p:tgtEl>
+                                          <p:spTgt spid="136">
+                                            <p:txEl>
+                                              <p:pRg st="0" end="0"/>
+                                            </p:txEl>
+                                          </p:spTgt>
+                                        </p:tgtEl>
+                                        <p:attrNameLst>
+                                          <p:attrName>style.visibility</p:attrName>
+                                        </p:attrNameLst>
+                                      </p:cBhvr>
+                                      <p:to>
+                                        <p:strVal val="visible"/>
+                                      </p:to>
+                                    </p:set>
+                                    <p:anim calcmode="lin" valueType="num">
+                                      <p:cBhvr additive="base">
+                                        <p:cTn id="11" dur="500" fill="hold"/>
+                                        <p:tgtEl>
+                                          <p:spTgt spid="136">
+                                            <p:txEl>
+                                              <p:pRg st="0" end="0"/>
+                                            </p:txEl>
+                                          </p:spTgt>
+                                        </p:tgtEl>
+                                        <p:attrNameLst>
+                                          <p:attrName>ppt_x</p:attrName>
+                                        </p:attrNameLst>
+                                      </p:cBhvr>
+                                      <p:tavLst>
+                                        <p:tav tm="0">
+                                          <p:val>
+                                            <p:strVal val="#ppt_x"/>
+                                          </p:val>
+                                        </p:tav>
+                                        <p:tav tm="100000">
+                                          <p:val>
+                                            <p:strVal val="#ppt_x"/>
+                                          </p:val>
+                                        </p:tav>
+                                      </p:tavLst>
+                                    </p:anim>
+                                    <p:anim calcmode="lin" valueType="num">
+                                      <p:cBhvr additive="base">
+                                        <p:cTn id="12" dur="500" fill="hold"/>
+                                        <p:tgtEl>
+                                          <p:spTgt spid="136">
+                                            <p:txEl>
+                                              <p:pRg st="0" end="0"/>
+                                            </p:txEl>
+                                          </p:spTgt>
+                                        </p:tgtEl>
+                                        <p:attrNameLst>
+                                          <p:attrName>ppt_y</p:attrName>
+                                        </p:attrNameLst>
+                                      </p:cBhvr>
+                                      <p:tavLst>
+                                        <p:tav tm="0">
+                                          <p:val>
+                                            <p:strVal val="1+#ppt_h/2"/>
+                                          </p:val>
+                                        </p:tav>
+                                        <p:tav tm="100000">
+                                          <p:val>
+                                            <p:strVal val="#ppt_y"/>
+                                          </p:val>
+                                        </p:tav>
+                                      </p:tavLst>
+                                    </p:anim>
+                                  </p:childTnLst>
+                                </p:cTn>
+                              </p:par>
+                            </p:childTnLst>
+                          </p:cTn>
+                        </p:par>
+                      </p:childTnLst>
+                    </p:cTn>
+                  </p:par>
+                  <p:par>
+                    <p:cTn id="13" fill="hold">
+                      <p:stCondLst>
+                        <p:cond delay="indefinite"/>
+                      </p:stCondLst>
+                      <p:childTnLst>
+                        <p:par>
+                          <p:cTn id="14" fill="hold">
+                            <p:stCondLst>
+                              <p:cond delay="0"/>
+                            </p:stCondLst>
+                            <p:childTnLst>
+                              <p:par>
+                                <p:cTn id="15" presetID="2" presetClass="entr" presetSubtype="4" fill="hold" nodeType="clickEffect">
+                                  <p:stCondLst>
+                                    <p:cond delay="0"/>
+                                  </p:stCondLst>
+                                  <p:childTnLst>
+                                    <p:set>
+                                      <p:cBhvr>
+                                        <p:cTn id="16" dur="1" fill="hold">
+                                          <p:stCondLst>
+                                            <p:cond delay="0"/>
+                                          </p:stCondLst>
+                                        </p:cTn>
+                                        <p:tgtEl>
+                                          <p:spTgt spid="3"/>
+                                        </p:tgtEl>
+                                        <p:attrNameLst>
+                                          <p:attrName>style.visibility</p:attrName>
+                                        </p:attrNameLst>
+                                      </p:cBhvr>
+                                      <p:to>
+                                        <p:strVal val="visible"/>
+                                      </p:to>
+                                    </p:set>
+                                    <p:anim calcmode="lin" valueType="num">
+                                      <p:cBhvr additive="base">
+                                        <p:cTn id="17" dur="500" fill="hold"/>
+                                        <p:tgtEl>
+                                          <p:spTgt spid="3"/>
+                                        </p:tgtEl>
+                                        <p:attrNameLst>
+                                          <p:attrName>ppt_x</p:attrName>
+                                        </p:attrNameLst>
+                                      </p:cBhvr>
+                                      <p:tavLst>
+                                        <p:tav tm="0">
+                                          <p:val>
+                                            <p:strVal val="#ppt_x"/>
+                                          </p:val>
+                                        </p:tav>
+                                        <p:tav tm="100000">
+                                          <p:val>
+                                            <p:strVal val="#ppt_x"/>
+                                          </p:val>
+                                        </p:tav>
+                                      </p:tavLst>
+                                    </p:anim>
+                                    <p:anim calcmode="lin" valueType="num">
+                                      <p:cBhvr additive="base">
+                                        <p:cTn id="18" dur="500" fill="hold"/>
+                                        <p:tgtEl>
+                                          <p:spTgt spid="3"/>
+                                        </p:tgtEl>
+                                        <p:attrNameLst>
+                                          <p:attrName>ppt_y</p:attrName>
+                                        </p:attrNameLst>
+                                      </p:cBhvr>
+                                      <p:tavLst>
+                                        <p:tav tm="0">
+                                          <p:val>
+                                            <p:strVal val="1+#ppt_h/2"/>
+                                          </p:val>
+                                        </p:tav>
+                                        <p:tav tm="100000">
+                                          <p:val>
+                                            <p:strVal val="#ppt_y"/>
+                                          </p:val>
+                                        </p:tav>
+                                      </p:tavLst>
+                                    </p:anim>
+                                  </p:childTnLst>
+                                </p:cTn>
+                              </p:par>
+                            </p:childTnLst>
+                          </p:cTn>
+                        </p:par>
+                      </p:childTnLst>
+                    </p:cTn>
+                  </p:par>
+                </p:childTnLst>
+              </p:cTn>
+              <p:prevCondLst>
+                <p:cond evt="onPrev" delay="0">
+                  <p:tgtEl>
+                    <p:sldTgt/>
+                  </p:tgtEl>
+                </p:cond>
+              </p:prevCondLst>
+              <p:nextCondLst>
+                <p:cond evt="onNext" delay="0">
+                  <p:tgtEl>
+                    <p:sldTgt/>
+                  </p:tgtEl>
+                </p:cond>
+              </p:nextCondLst>
+            </p:seq>
+          </p:childTnLst>
+        </p:cTn>
+      </p:par>
+    </p:tnLst>
+    <p:bldLst>
+      <p:bldP spid="136" grpId="0" uiExpand="1" build="p" animBg="1"/>
+    </p:bldLst>
+  </p:timing>
 </p:sld>
 </file>
 
@@ -7001,7 +7959,7 @@
           </a:ln>
           <a:extLst>
             <a:ext uri="{C572A759-6A51-4108-AA02-DFA0A04FC94B}">
-              <ma14:wrappingTextBoxFlag xmlns:ma14="http://schemas.microsoft.com/office/mac/drawingml/2011/main" xmlns="" val="1"/>
+              <ma14:wrappingTextBoxFlag xmlns="" xmlns:ma14="http://schemas.microsoft.com/office/mac/drawingml/2011/main" val="1"/>
             </a:ext>
           </a:extLst>
         </p:spPr>
@@ -7417,6 +8375,439 @@
   <p:clrMapOvr>
     <a:masterClrMapping/>
   </p:clrMapOvr>
+  <p:timing>
+    <p:tnLst>
+      <p:par>
+        <p:cTn id="1" dur="indefinite" restart="never" nodeType="tmRoot">
+          <p:childTnLst>
+            <p:seq concurrent="1" nextAc="seek">
+              <p:cTn id="2" dur="indefinite" nodeType="mainSeq">
+                <p:childTnLst>
+                  <p:par>
+                    <p:cTn id="3" fill="hold">
+                      <p:stCondLst>
+                        <p:cond delay="indefinite"/>
+                      </p:stCondLst>
+                      <p:childTnLst>
+                        <p:par>
+                          <p:cTn id="4" fill="hold">
+                            <p:stCondLst>
+                              <p:cond delay="0"/>
+                            </p:stCondLst>
+                            <p:childTnLst>
+                              <p:par>
+                                <p:cTn id="5" presetID="2" presetClass="entr" presetSubtype="4" fill="hold" nodeType="clickEffect">
+                                  <p:stCondLst>
+                                    <p:cond delay="0"/>
+                                  </p:stCondLst>
+                                  <p:childTnLst>
+                                    <p:set>
+                                      <p:cBhvr>
+                                        <p:cTn id="6" dur="1" fill="hold">
+                                          <p:stCondLst>
+                                            <p:cond delay="0"/>
+                                          </p:stCondLst>
+                                        </p:cTn>
+                                        <p:tgtEl>
+                                          <p:spTgt spid="142">
+                                            <p:txEl>
+                                              <p:pRg st="1" end="1"/>
+                                            </p:txEl>
+                                          </p:spTgt>
+                                        </p:tgtEl>
+                                        <p:attrNameLst>
+                                          <p:attrName>style.visibility</p:attrName>
+                                        </p:attrNameLst>
+                                      </p:cBhvr>
+                                      <p:to>
+                                        <p:strVal val="visible"/>
+                                      </p:to>
+                                    </p:set>
+                                    <p:anim calcmode="lin" valueType="num">
+                                      <p:cBhvr additive="base">
+                                        <p:cTn id="7" dur="500" fill="hold"/>
+                                        <p:tgtEl>
+                                          <p:spTgt spid="142">
+                                            <p:txEl>
+                                              <p:pRg st="1" end="1"/>
+                                            </p:txEl>
+                                          </p:spTgt>
+                                        </p:tgtEl>
+                                        <p:attrNameLst>
+                                          <p:attrName>ppt_x</p:attrName>
+                                        </p:attrNameLst>
+                                      </p:cBhvr>
+                                      <p:tavLst>
+                                        <p:tav tm="0">
+                                          <p:val>
+                                            <p:strVal val="#ppt_x"/>
+                                          </p:val>
+                                        </p:tav>
+                                        <p:tav tm="100000">
+                                          <p:val>
+                                            <p:strVal val="#ppt_x"/>
+                                          </p:val>
+                                        </p:tav>
+                                      </p:tavLst>
+                                    </p:anim>
+                                    <p:anim calcmode="lin" valueType="num">
+                                      <p:cBhvr additive="base">
+                                        <p:cTn id="8" dur="500" fill="hold"/>
+                                        <p:tgtEl>
+                                          <p:spTgt spid="142">
+                                            <p:txEl>
+                                              <p:pRg st="1" end="1"/>
+                                            </p:txEl>
+                                          </p:spTgt>
+                                        </p:tgtEl>
+                                        <p:attrNameLst>
+                                          <p:attrName>ppt_y</p:attrName>
+                                        </p:attrNameLst>
+                                      </p:cBhvr>
+                                      <p:tavLst>
+                                        <p:tav tm="0">
+                                          <p:val>
+                                            <p:strVal val="1+#ppt_h/2"/>
+                                          </p:val>
+                                        </p:tav>
+                                        <p:tav tm="100000">
+                                          <p:val>
+                                            <p:strVal val="#ppt_y"/>
+                                          </p:val>
+                                        </p:tav>
+                                      </p:tavLst>
+                                    </p:anim>
+                                  </p:childTnLst>
+                                </p:cTn>
+                              </p:par>
+                            </p:childTnLst>
+                          </p:cTn>
+                        </p:par>
+                      </p:childTnLst>
+                    </p:cTn>
+                  </p:par>
+                  <p:par>
+                    <p:cTn id="9" fill="hold">
+                      <p:stCondLst>
+                        <p:cond delay="indefinite"/>
+                      </p:stCondLst>
+                      <p:childTnLst>
+                        <p:par>
+                          <p:cTn id="10" fill="hold">
+                            <p:stCondLst>
+                              <p:cond delay="0"/>
+                            </p:stCondLst>
+                            <p:childTnLst>
+                              <p:par>
+                                <p:cTn id="11" presetID="2" presetClass="entr" presetSubtype="4" fill="hold" nodeType="clickEffect">
+                                  <p:stCondLst>
+                                    <p:cond delay="0"/>
+                                  </p:stCondLst>
+                                  <p:childTnLst>
+                                    <p:set>
+                                      <p:cBhvr>
+                                        <p:cTn id="12" dur="1" fill="hold">
+                                          <p:stCondLst>
+                                            <p:cond delay="0"/>
+                                          </p:stCondLst>
+                                        </p:cTn>
+                                        <p:tgtEl>
+                                          <p:spTgt spid="142">
+                                            <p:txEl>
+                                              <p:pRg st="2" end="2"/>
+                                            </p:txEl>
+                                          </p:spTgt>
+                                        </p:tgtEl>
+                                        <p:attrNameLst>
+                                          <p:attrName>style.visibility</p:attrName>
+                                        </p:attrNameLst>
+                                      </p:cBhvr>
+                                      <p:to>
+                                        <p:strVal val="visible"/>
+                                      </p:to>
+                                    </p:set>
+                                    <p:anim calcmode="lin" valueType="num">
+                                      <p:cBhvr additive="base">
+                                        <p:cTn id="13" dur="500" fill="hold"/>
+                                        <p:tgtEl>
+                                          <p:spTgt spid="142">
+                                            <p:txEl>
+                                              <p:pRg st="2" end="2"/>
+                                            </p:txEl>
+                                          </p:spTgt>
+                                        </p:tgtEl>
+                                        <p:attrNameLst>
+                                          <p:attrName>ppt_x</p:attrName>
+                                        </p:attrNameLst>
+                                      </p:cBhvr>
+                                      <p:tavLst>
+                                        <p:tav tm="0">
+                                          <p:val>
+                                            <p:strVal val="#ppt_x"/>
+                                          </p:val>
+                                        </p:tav>
+                                        <p:tav tm="100000">
+                                          <p:val>
+                                            <p:strVal val="#ppt_x"/>
+                                          </p:val>
+                                        </p:tav>
+                                      </p:tavLst>
+                                    </p:anim>
+                                    <p:anim calcmode="lin" valueType="num">
+                                      <p:cBhvr additive="base">
+                                        <p:cTn id="14" dur="500" fill="hold"/>
+                                        <p:tgtEl>
+                                          <p:spTgt spid="142">
+                                            <p:txEl>
+                                              <p:pRg st="2" end="2"/>
+                                            </p:txEl>
+                                          </p:spTgt>
+                                        </p:tgtEl>
+                                        <p:attrNameLst>
+                                          <p:attrName>ppt_y</p:attrName>
+                                        </p:attrNameLst>
+                                      </p:cBhvr>
+                                      <p:tavLst>
+                                        <p:tav tm="0">
+                                          <p:val>
+                                            <p:strVal val="1+#ppt_h/2"/>
+                                          </p:val>
+                                        </p:tav>
+                                        <p:tav tm="100000">
+                                          <p:val>
+                                            <p:strVal val="#ppt_y"/>
+                                          </p:val>
+                                        </p:tav>
+                                      </p:tavLst>
+                                    </p:anim>
+                                  </p:childTnLst>
+                                </p:cTn>
+                              </p:par>
+                            </p:childTnLst>
+                          </p:cTn>
+                        </p:par>
+                      </p:childTnLst>
+                    </p:cTn>
+                  </p:par>
+                  <p:par>
+                    <p:cTn id="15" fill="hold">
+                      <p:stCondLst>
+                        <p:cond delay="indefinite"/>
+                      </p:stCondLst>
+                      <p:childTnLst>
+                        <p:par>
+                          <p:cTn id="16" fill="hold">
+                            <p:stCondLst>
+                              <p:cond delay="0"/>
+                            </p:stCondLst>
+                            <p:childTnLst>
+                              <p:par>
+                                <p:cTn id="17" presetID="2" presetClass="entr" presetSubtype="4" fill="hold" nodeType="clickEffect">
+                                  <p:stCondLst>
+                                    <p:cond delay="0"/>
+                                  </p:stCondLst>
+                                  <p:childTnLst>
+                                    <p:set>
+                                      <p:cBhvr>
+                                        <p:cTn id="18" dur="1" fill="hold">
+                                          <p:stCondLst>
+                                            <p:cond delay="0"/>
+                                          </p:stCondLst>
+                                        </p:cTn>
+                                        <p:tgtEl>
+                                          <p:spTgt spid="142">
+                                            <p:txEl>
+                                              <p:pRg st="3" end="3"/>
+                                            </p:txEl>
+                                          </p:spTgt>
+                                        </p:tgtEl>
+                                        <p:attrNameLst>
+                                          <p:attrName>style.visibility</p:attrName>
+                                        </p:attrNameLst>
+                                      </p:cBhvr>
+                                      <p:to>
+                                        <p:strVal val="visible"/>
+                                      </p:to>
+                                    </p:set>
+                                    <p:anim calcmode="lin" valueType="num">
+                                      <p:cBhvr additive="base">
+                                        <p:cTn id="19" dur="500" fill="hold"/>
+                                        <p:tgtEl>
+                                          <p:spTgt spid="142">
+                                            <p:txEl>
+                                              <p:pRg st="3" end="3"/>
+                                            </p:txEl>
+                                          </p:spTgt>
+                                        </p:tgtEl>
+                                        <p:attrNameLst>
+                                          <p:attrName>ppt_x</p:attrName>
+                                        </p:attrNameLst>
+                                      </p:cBhvr>
+                                      <p:tavLst>
+                                        <p:tav tm="0">
+                                          <p:val>
+                                            <p:strVal val="#ppt_x"/>
+                                          </p:val>
+                                        </p:tav>
+                                        <p:tav tm="100000">
+                                          <p:val>
+                                            <p:strVal val="#ppt_x"/>
+                                          </p:val>
+                                        </p:tav>
+                                      </p:tavLst>
+                                    </p:anim>
+                                    <p:anim calcmode="lin" valueType="num">
+                                      <p:cBhvr additive="base">
+                                        <p:cTn id="20" dur="500" fill="hold"/>
+                                        <p:tgtEl>
+                                          <p:spTgt spid="142">
+                                            <p:txEl>
+                                              <p:pRg st="3" end="3"/>
+                                            </p:txEl>
+                                          </p:spTgt>
+                                        </p:tgtEl>
+                                        <p:attrNameLst>
+                                          <p:attrName>ppt_y</p:attrName>
+                                        </p:attrNameLst>
+                                      </p:cBhvr>
+                                      <p:tavLst>
+                                        <p:tav tm="0">
+                                          <p:val>
+                                            <p:strVal val="1+#ppt_h/2"/>
+                                          </p:val>
+                                        </p:tav>
+                                        <p:tav tm="100000">
+                                          <p:val>
+                                            <p:strVal val="#ppt_y"/>
+                                          </p:val>
+                                        </p:tav>
+                                      </p:tavLst>
+                                    </p:anim>
+                                  </p:childTnLst>
+                                </p:cTn>
+                              </p:par>
+                            </p:childTnLst>
+                          </p:cTn>
+                        </p:par>
+                      </p:childTnLst>
+                    </p:cTn>
+                  </p:par>
+                  <p:par>
+                    <p:cTn id="21" fill="hold">
+                      <p:stCondLst>
+                        <p:cond delay="indefinite"/>
+                      </p:stCondLst>
+                      <p:childTnLst>
+                        <p:par>
+                          <p:cTn id="22" fill="hold">
+                            <p:stCondLst>
+                              <p:cond delay="0"/>
+                            </p:stCondLst>
+                            <p:childTnLst>
+                              <p:par>
+                                <p:cTn id="23" presetID="2" presetClass="entr" presetSubtype="4" fill="hold" grpId="0" nodeType="clickEffect">
+                                  <p:stCondLst>
+                                    <p:cond delay="0"/>
+                                  </p:stCondLst>
+                                  <p:childTnLst>
+                                    <p:set>
+                                      <p:cBhvr>
+                                        <p:cTn id="24" dur="1" fill="hold">
+                                          <p:stCondLst>
+                                            <p:cond delay="0"/>
+                                          </p:stCondLst>
+                                        </p:cTn>
+                                        <p:tgtEl>
+                                          <p:spTgt spid="144"/>
+                                        </p:tgtEl>
+                                        <p:attrNameLst>
+                                          <p:attrName>style.visibility</p:attrName>
+                                        </p:attrNameLst>
+                                      </p:cBhvr>
+                                      <p:to>
+                                        <p:strVal val="visible"/>
+                                      </p:to>
+                                    </p:set>
+                                    <p:anim calcmode="lin" valueType="num">
+                                      <p:cBhvr additive="base">
+                                        <p:cTn id="25" dur="500" fill="hold"/>
+                                        <p:tgtEl>
+                                          <p:spTgt spid="144"/>
+                                        </p:tgtEl>
+                                        <p:attrNameLst>
+                                          <p:attrName>ppt_x</p:attrName>
+                                        </p:attrNameLst>
+                                      </p:cBhvr>
+                                      <p:tavLst>
+                                        <p:tav tm="0">
+                                          <p:val>
+                                            <p:strVal val="#ppt_x"/>
+                                          </p:val>
+                                        </p:tav>
+                                        <p:tav tm="100000">
+                                          <p:val>
+                                            <p:strVal val="#ppt_x"/>
+                                          </p:val>
+                                        </p:tav>
+                                      </p:tavLst>
+                                    </p:anim>
+                                    <p:anim calcmode="lin" valueType="num">
+                                      <p:cBhvr additive="base">
+                                        <p:cTn id="26" dur="500" fill="hold"/>
+                                        <p:tgtEl>
+                                          <p:spTgt spid="144"/>
+                                        </p:tgtEl>
+                                        <p:attrNameLst>
+                                          <p:attrName>ppt_y</p:attrName>
+                                        </p:attrNameLst>
+                                      </p:cBhvr>
+                                      <p:tavLst>
+                                        <p:tav tm="0">
+                                          <p:val>
+                                            <p:strVal val="1+#ppt_h/2"/>
+                                          </p:val>
+                                        </p:tav>
+                                        <p:tav tm="100000">
+                                          <p:val>
+                                            <p:strVal val="#ppt_y"/>
+                                          </p:val>
+                                        </p:tav>
+                                      </p:tavLst>
+                                    </p:anim>
+                                  </p:childTnLst>
+                                </p:cTn>
+                              </p:par>
+                            </p:childTnLst>
+                          </p:cTn>
+                        </p:par>
+                      </p:childTnLst>
+                    </p:cTn>
+                  </p:par>
+                </p:childTnLst>
+              </p:cTn>
+              <p:prevCondLst>
+                <p:cond evt="onPrev" delay="0">
+                  <p:tgtEl>
+                    <p:sldTgt/>
+                  </p:tgtEl>
+                </p:cond>
+              </p:prevCondLst>
+              <p:nextCondLst>
+                <p:cond evt="onNext" delay="0">
+                  <p:tgtEl>
+                    <p:sldTgt/>
+                  </p:tgtEl>
+                </p:cond>
+              </p:nextCondLst>
+            </p:seq>
+          </p:childTnLst>
+        </p:cTn>
+      </p:par>
+    </p:tnLst>
+    <p:bldLst>
+      <p:bldP spid="144" grpId="0" animBg="1"/>
+    </p:bldLst>
+  </p:timing>
 </p:sld>
 </file>
 
@@ -7703,6 +9094,203 @@
   <p:clrMapOvr>
     <a:masterClrMapping/>
   </p:clrMapOvr>
+  <p:timing>
+    <p:tnLst>
+      <p:par>
+        <p:cTn id="1" dur="indefinite" restart="never" nodeType="tmRoot">
+          <p:childTnLst>
+            <p:seq concurrent="1" nextAc="seek">
+              <p:cTn id="2" dur="indefinite" nodeType="mainSeq">
+                <p:childTnLst>
+                  <p:par>
+                    <p:cTn id="3" fill="hold">
+                      <p:stCondLst>
+                        <p:cond delay="indefinite"/>
+                      </p:stCondLst>
+                      <p:childTnLst>
+                        <p:par>
+                          <p:cTn id="4" fill="hold">
+                            <p:stCondLst>
+                              <p:cond delay="0"/>
+                            </p:stCondLst>
+                            <p:childTnLst>
+                              <p:par>
+                                <p:cTn id="5" presetID="2" presetClass="entr" presetSubtype="4" fill="hold" nodeType="clickEffect">
+                                  <p:stCondLst>
+                                    <p:cond delay="0"/>
+                                  </p:stCondLst>
+                                  <p:childTnLst>
+                                    <p:set>
+                                      <p:cBhvr>
+                                        <p:cTn id="6" dur="1" fill="hold">
+                                          <p:stCondLst>
+                                            <p:cond delay="0"/>
+                                          </p:stCondLst>
+                                        </p:cTn>
+                                        <p:tgtEl>
+                                          <p:spTgt spid="2"/>
+                                        </p:tgtEl>
+                                        <p:attrNameLst>
+                                          <p:attrName>style.visibility</p:attrName>
+                                        </p:attrNameLst>
+                                      </p:cBhvr>
+                                      <p:to>
+                                        <p:strVal val="visible"/>
+                                      </p:to>
+                                    </p:set>
+                                    <p:anim calcmode="lin" valueType="num">
+                                      <p:cBhvr additive="base">
+                                        <p:cTn id="7" dur="500" fill="hold"/>
+                                        <p:tgtEl>
+                                          <p:spTgt spid="2"/>
+                                        </p:tgtEl>
+                                        <p:attrNameLst>
+                                          <p:attrName>ppt_x</p:attrName>
+                                        </p:attrNameLst>
+                                      </p:cBhvr>
+                                      <p:tavLst>
+                                        <p:tav tm="0">
+                                          <p:val>
+                                            <p:strVal val="#ppt_x"/>
+                                          </p:val>
+                                        </p:tav>
+                                        <p:tav tm="100000">
+                                          <p:val>
+                                            <p:strVal val="#ppt_x"/>
+                                          </p:val>
+                                        </p:tav>
+                                      </p:tavLst>
+                                    </p:anim>
+                                    <p:anim calcmode="lin" valueType="num">
+                                      <p:cBhvr additive="base">
+                                        <p:cTn id="8" dur="500" fill="hold"/>
+                                        <p:tgtEl>
+                                          <p:spTgt spid="2"/>
+                                        </p:tgtEl>
+                                        <p:attrNameLst>
+                                          <p:attrName>ppt_y</p:attrName>
+                                        </p:attrNameLst>
+                                      </p:cBhvr>
+                                      <p:tavLst>
+                                        <p:tav tm="0">
+                                          <p:val>
+                                            <p:strVal val="1+#ppt_h/2"/>
+                                          </p:val>
+                                        </p:tav>
+                                        <p:tav tm="100000">
+                                          <p:val>
+                                            <p:strVal val="#ppt_y"/>
+                                          </p:val>
+                                        </p:tav>
+                                      </p:tavLst>
+                                    </p:anim>
+                                  </p:childTnLst>
+                                </p:cTn>
+                              </p:par>
+                              <p:par>
+                                <p:cTn id="9" presetID="2" presetClass="entr" presetSubtype="4" fill="hold" grpId="0" nodeType="withEffect">
+                                  <p:stCondLst>
+                                    <p:cond delay="0"/>
+                                  </p:stCondLst>
+                                  <p:childTnLst>
+                                    <p:set>
+                                      <p:cBhvr>
+                                        <p:cTn id="10" dur="1" fill="hold">
+                                          <p:stCondLst>
+                                            <p:cond delay="0"/>
+                                          </p:stCondLst>
+                                        </p:cTn>
+                                        <p:tgtEl>
+                                          <p:spTgt spid="5"/>
+                                        </p:tgtEl>
+                                        <p:attrNameLst>
+                                          <p:attrName>style.visibility</p:attrName>
+                                        </p:attrNameLst>
+                                      </p:cBhvr>
+                                      <p:to>
+                                        <p:strVal val="visible"/>
+                                      </p:to>
+                                    </p:set>
+                                    <p:anim calcmode="lin" valueType="num">
+                                      <p:cBhvr additive="base">
+                                        <p:cTn id="11" dur="500" fill="hold"/>
+                                        <p:tgtEl>
+                                          <p:spTgt spid="5"/>
+                                        </p:tgtEl>
+                                        <p:attrNameLst>
+                                          <p:attrName>ppt_x</p:attrName>
+                                        </p:attrNameLst>
+                                      </p:cBhvr>
+                                      <p:tavLst>
+                                        <p:tav tm="0">
+                                          <p:val>
+                                            <p:strVal val="#ppt_x"/>
+                                          </p:val>
+                                        </p:tav>
+                                        <p:tav tm="100000">
+                                          <p:val>
+                                            <p:strVal val="#ppt_x"/>
+                                          </p:val>
+                                        </p:tav>
+                                      </p:tavLst>
+                                    </p:anim>
+                                    <p:anim calcmode="lin" valueType="num">
+                                      <p:cBhvr additive="base">
+                                        <p:cTn id="12" dur="500" fill="hold"/>
+                                        <p:tgtEl>
+                                          <p:spTgt spid="5"/>
+                                        </p:tgtEl>
+                                        <p:attrNameLst>
+                                          <p:attrName>ppt_y</p:attrName>
+                                        </p:attrNameLst>
+                                      </p:cBhvr>
+                                      <p:tavLst>
+                                        <p:tav tm="0">
+                                          <p:val>
+                                            <p:strVal val="1+#ppt_h/2"/>
+                                          </p:val>
+                                        </p:tav>
+                                        <p:tav tm="100000">
+                                          <p:val>
+                                            <p:strVal val="#ppt_y"/>
+                                          </p:val>
+                                        </p:tav>
+                                      </p:tavLst>
+                                    </p:anim>
+                                  </p:childTnLst>
+                                </p:cTn>
+                              </p:par>
+                            </p:childTnLst>
+                          </p:cTn>
+                        </p:par>
+                      </p:childTnLst>
+                    </p:cTn>
+                  </p:par>
+                </p:childTnLst>
+              </p:cTn>
+              <p:prevCondLst>
+                <p:cond evt="onPrev" delay="0">
+                  <p:tgtEl>
+                    <p:sldTgt/>
+                  </p:tgtEl>
+                </p:cond>
+              </p:prevCondLst>
+              <p:nextCondLst>
+                <p:cond evt="onNext" delay="0">
+                  <p:tgtEl>
+                    <p:sldTgt/>
+                  </p:tgtEl>
+                </p:cond>
+              </p:nextCondLst>
+            </p:seq>
+          </p:childTnLst>
+        </p:cTn>
+      </p:par>
+    </p:tnLst>
+    <p:bldLst>
+      <p:bldP spid="5" grpId="0" animBg="1"/>
+    </p:bldLst>
+  </p:timing>
 </p:sld>
 </file>
 
@@ -8602,7 +10190,7 @@
           </a:ln>
           <a:extLst>
             <a:ext uri="{C572A759-6A51-4108-AA02-DFA0A04FC94B}">
-              <ma14:wrappingTextBoxFlag xmlns:ma14="http://schemas.microsoft.com/office/mac/drawingml/2011/main" xmlns="" val="1"/>
+              <ma14:wrappingTextBoxFlag xmlns="" xmlns:ma14="http://schemas.microsoft.com/office/mac/drawingml/2011/main" val="1"/>
             </a:ext>
           </a:extLst>
         </p:spPr>
@@ -9211,6 +10799,127 @@
   <p:clrMapOvr>
     <a:masterClrMapping/>
   </p:clrMapOvr>
+  <p:timing>
+    <p:tnLst>
+      <p:par>
+        <p:cTn id="1" dur="indefinite" restart="never" nodeType="tmRoot">
+          <p:childTnLst>
+            <p:seq concurrent="1" nextAc="seek">
+              <p:cTn id="2" dur="indefinite" nodeType="mainSeq">
+                <p:childTnLst>
+                  <p:par>
+                    <p:cTn id="3" fill="hold">
+                      <p:stCondLst>
+                        <p:cond delay="indefinite"/>
+                      </p:stCondLst>
+                      <p:childTnLst>
+                        <p:par>
+                          <p:cTn id="4" fill="hold">
+                            <p:stCondLst>
+                              <p:cond delay="0"/>
+                            </p:stCondLst>
+                            <p:childTnLst>
+                              <p:par>
+                                <p:cTn id="5" presetID="2" presetClass="entr" presetSubtype="4" fill="hold" nodeType="clickEffect">
+                                  <p:stCondLst>
+                                    <p:cond delay="0"/>
+                                  </p:stCondLst>
+                                  <p:childTnLst>
+                                    <p:set>
+                                      <p:cBhvr>
+                                        <p:cTn id="6" dur="1" fill="hold">
+                                          <p:stCondLst>
+                                            <p:cond delay="0"/>
+                                          </p:stCondLst>
+                                        </p:cTn>
+                                        <p:tgtEl>
+                                          <p:spTgt spid="2"/>
+                                        </p:tgtEl>
+                                        <p:attrNameLst>
+                                          <p:attrName>style.visibility</p:attrName>
+                                        </p:attrNameLst>
+                                      </p:cBhvr>
+                                      <p:to>
+                                        <p:strVal val="visible"/>
+                                      </p:to>
+                                    </p:set>
+                                    <p:anim calcmode="lin" valueType="num">
+                                      <p:cBhvr additive="base">
+                                        <p:cTn id="7" dur="500" fill="hold"/>
+                                        <p:tgtEl>
+                                          <p:spTgt spid="2"/>
+                                        </p:tgtEl>
+                                        <p:attrNameLst>
+                                          <p:attrName>ppt_x</p:attrName>
+                                        </p:attrNameLst>
+                                      </p:cBhvr>
+                                      <p:tavLst>
+                                        <p:tav tm="0">
+                                          <p:val>
+                                            <p:strVal val="#ppt_x"/>
+                                          </p:val>
+                                        </p:tav>
+                                        <p:tav tm="100000">
+                                          <p:val>
+                                            <p:strVal val="#ppt_x"/>
+                                          </p:val>
+                                        </p:tav>
+                                      </p:tavLst>
+                                    </p:anim>
+                                    <p:anim calcmode="lin" valueType="num">
+                                      <p:cBhvr additive="base">
+                                        <p:cTn id="8" dur="500" fill="hold"/>
+                                        <p:tgtEl>
+                                          <p:spTgt spid="2"/>
+                                        </p:tgtEl>
+                                        <p:attrNameLst>
+                                          <p:attrName>ppt_y</p:attrName>
+                                        </p:attrNameLst>
+                                      </p:cBhvr>
+                                      <p:tavLst>
+                                        <p:tav tm="0">
+                                          <p:val>
+                                            <p:strVal val="1+#ppt_h/2"/>
+                                          </p:val>
+                                        </p:tav>
+                                        <p:tav tm="100000">
+                                          <p:val>
+                                            <p:strVal val="#ppt_y"/>
+                                          </p:val>
+                                        </p:tav>
+                                      </p:tavLst>
+                                    </p:anim>
+                                  </p:childTnLst>
+                                </p:cTn>
+                              </p:par>
+                            </p:childTnLst>
+                          </p:cTn>
+                        </p:par>
+                      </p:childTnLst>
+                    </p:cTn>
+                  </p:par>
+                </p:childTnLst>
+              </p:cTn>
+              <p:prevCondLst>
+                <p:cond evt="onPrev" delay="0">
+                  <p:tgtEl>
+                    <p:sldTgt/>
+                  </p:tgtEl>
+                </p:cond>
+              </p:prevCondLst>
+              <p:nextCondLst>
+                <p:cond evt="onNext" delay="0">
+                  <p:tgtEl>
+                    <p:sldTgt/>
+                  </p:tgtEl>
+                </p:cond>
+              </p:nextCondLst>
+            </p:seq>
+          </p:childTnLst>
+        </p:cTn>
+      </p:par>
+    </p:tnLst>
+  </p:timing>
 </p:sld>
 </file>
 
@@ -9353,6 +11062,127 @@
   <p:clrMapOvr>
     <a:masterClrMapping/>
   </p:clrMapOvr>
+  <p:timing>
+    <p:tnLst>
+      <p:par>
+        <p:cTn id="1" dur="indefinite" restart="never" nodeType="tmRoot">
+          <p:childTnLst>
+            <p:seq concurrent="1" nextAc="seek">
+              <p:cTn id="2" dur="indefinite" nodeType="mainSeq">
+                <p:childTnLst>
+                  <p:par>
+                    <p:cTn id="3" fill="hold">
+                      <p:stCondLst>
+                        <p:cond delay="indefinite"/>
+                      </p:stCondLst>
+                      <p:childTnLst>
+                        <p:par>
+                          <p:cTn id="4" fill="hold">
+                            <p:stCondLst>
+                              <p:cond delay="0"/>
+                            </p:stCondLst>
+                            <p:childTnLst>
+                              <p:par>
+                                <p:cTn id="5" presetID="2" presetClass="entr" presetSubtype="4" fill="hold" nodeType="clickEffect">
+                                  <p:stCondLst>
+                                    <p:cond delay="0"/>
+                                  </p:stCondLst>
+                                  <p:childTnLst>
+                                    <p:set>
+                                      <p:cBhvr>
+                                        <p:cTn id="6" dur="1" fill="hold">
+                                          <p:stCondLst>
+                                            <p:cond delay="0"/>
+                                          </p:stCondLst>
+                                        </p:cTn>
+                                        <p:tgtEl>
+                                          <p:spTgt spid="3"/>
+                                        </p:tgtEl>
+                                        <p:attrNameLst>
+                                          <p:attrName>style.visibility</p:attrName>
+                                        </p:attrNameLst>
+                                      </p:cBhvr>
+                                      <p:to>
+                                        <p:strVal val="visible"/>
+                                      </p:to>
+                                    </p:set>
+                                    <p:anim calcmode="lin" valueType="num">
+                                      <p:cBhvr additive="base">
+                                        <p:cTn id="7" dur="500" fill="hold"/>
+                                        <p:tgtEl>
+                                          <p:spTgt spid="3"/>
+                                        </p:tgtEl>
+                                        <p:attrNameLst>
+                                          <p:attrName>ppt_x</p:attrName>
+                                        </p:attrNameLst>
+                                      </p:cBhvr>
+                                      <p:tavLst>
+                                        <p:tav tm="0">
+                                          <p:val>
+                                            <p:strVal val="#ppt_x"/>
+                                          </p:val>
+                                        </p:tav>
+                                        <p:tav tm="100000">
+                                          <p:val>
+                                            <p:strVal val="#ppt_x"/>
+                                          </p:val>
+                                        </p:tav>
+                                      </p:tavLst>
+                                    </p:anim>
+                                    <p:anim calcmode="lin" valueType="num">
+                                      <p:cBhvr additive="base">
+                                        <p:cTn id="8" dur="500" fill="hold"/>
+                                        <p:tgtEl>
+                                          <p:spTgt spid="3"/>
+                                        </p:tgtEl>
+                                        <p:attrNameLst>
+                                          <p:attrName>ppt_y</p:attrName>
+                                        </p:attrNameLst>
+                                      </p:cBhvr>
+                                      <p:tavLst>
+                                        <p:tav tm="0">
+                                          <p:val>
+                                            <p:strVal val="1+#ppt_h/2"/>
+                                          </p:val>
+                                        </p:tav>
+                                        <p:tav tm="100000">
+                                          <p:val>
+                                            <p:strVal val="#ppt_y"/>
+                                          </p:val>
+                                        </p:tav>
+                                      </p:tavLst>
+                                    </p:anim>
+                                  </p:childTnLst>
+                                </p:cTn>
+                              </p:par>
+                            </p:childTnLst>
+                          </p:cTn>
+                        </p:par>
+                      </p:childTnLst>
+                    </p:cTn>
+                  </p:par>
+                </p:childTnLst>
+              </p:cTn>
+              <p:prevCondLst>
+                <p:cond evt="onPrev" delay="0">
+                  <p:tgtEl>
+                    <p:sldTgt/>
+                  </p:tgtEl>
+                </p:cond>
+              </p:prevCondLst>
+              <p:nextCondLst>
+                <p:cond evt="onNext" delay="0">
+                  <p:tgtEl>
+                    <p:sldTgt/>
+                  </p:tgtEl>
+                </p:cond>
+              </p:nextCondLst>
+            </p:seq>
+          </p:childTnLst>
+        </p:cTn>
+      </p:par>
+    </p:tnLst>
+  </p:timing>
 </p:sld>
 </file>
 
@@ -9471,7 +11301,7 @@
               </a:spcAft>
             </a:pPr>
             <a:r>
-              <a:rPr lang="en-US" altLang="en-US" sz="1600" b="1">
+              <a:rPr lang="en-US" altLang="en-US" sz="1600" b="1" dirty="0">
                 <a:solidFill>
                   <a:srgbClr val="000080"/>
                 </a:solidFill>
@@ -9481,7 +11311,7 @@
               <a:t>public class </a:t>
             </a:r>
             <a:r>
-              <a:rPr lang="en-US" altLang="en-US" sz="1600">
+              <a:rPr lang="en-US" altLang="en-US" sz="1600" dirty="0">
                 <a:solidFill>
                   <a:srgbClr val="000000"/>
                 </a:solidFill>
@@ -9491,7 +11321,7 @@
               <a:t>Largest {</a:t>
             </a:r>
             <a:br>
-              <a:rPr lang="en-US" altLang="en-US" sz="1600">
+              <a:rPr lang="en-US" altLang="en-US" sz="1600" dirty="0">
                 <a:solidFill>
                   <a:srgbClr val="000000"/>
                 </a:solidFill>
@@ -9500,7 +11330,7 @@
               </a:rPr>
             </a:br>
             <a:br>
-              <a:rPr lang="en-US" altLang="en-US" sz="1600">
+              <a:rPr lang="en-US" altLang="en-US" sz="1600" dirty="0">
                 <a:solidFill>
                   <a:srgbClr val="000000"/>
                 </a:solidFill>
@@ -9509,7 +11339,7 @@
               </a:rPr>
             </a:br>
             <a:r>
-              <a:rPr lang="en-US" altLang="en-US" sz="1600">
+              <a:rPr lang="en-US" altLang="en-US" sz="1600" dirty="0">
                 <a:solidFill>
                   <a:srgbClr val="000000"/>
                 </a:solidFill>
@@ -9519,7 +11349,7 @@
               <a:t>    </a:t>
             </a:r>
             <a:r>
-              <a:rPr lang="en-US" altLang="en-US" sz="1600" b="1">
+              <a:rPr lang="en-US" altLang="en-US" sz="1600" b="1" dirty="0">
                 <a:solidFill>
                   <a:srgbClr val="000080"/>
                 </a:solidFill>
@@ -9529,7 +11359,7 @@
               <a:t>public static int </a:t>
             </a:r>
             <a:r>
-              <a:rPr lang="en-US" altLang="en-US" sz="1600">
+              <a:rPr lang="en-US" altLang="en-US" sz="1600" dirty="0">
                 <a:solidFill>
                   <a:srgbClr val="000000"/>
                 </a:solidFill>
@@ -9539,7 +11369,7 @@
               <a:t>largest (</a:t>
             </a:r>
             <a:r>
-              <a:rPr lang="en-US" altLang="en-US" sz="1600" b="1">
+              <a:rPr lang="en-US" altLang="en-US" sz="1600" b="1" dirty="0">
                 <a:solidFill>
                   <a:srgbClr val="000080"/>
                 </a:solidFill>
@@ -9549,7 +11379,7 @@
               <a:t>int</a:t>
             </a:r>
             <a:r>
-              <a:rPr lang="en-US" altLang="en-US" sz="1600">
+              <a:rPr lang="en-US" altLang="en-US" sz="1600" dirty="0">
                 <a:solidFill>
                   <a:srgbClr val="000000"/>
                 </a:solidFill>
@@ -9559,7 +11389,7 @@
               <a:t>[] list)</a:t>
             </a:r>
             <a:br>
-              <a:rPr lang="en-US" altLang="en-US" sz="1600">
+              <a:rPr lang="en-US" altLang="en-US" sz="1600" dirty="0">
                 <a:solidFill>
                   <a:srgbClr val="000000"/>
                 </a:solidFill>
@@ -9568,7 +11398,7 @@
               </a:rPr>
             </a:br>
             <a:r>
-              <a:rPr lang="en-US" altLang="en-US" sz="1600">
+              <a:rPr lang="en-US" altLang="en-US" sz="1600" dirty="0">
                 <a:solidFill>
                   <a:srgbClr val="000000"/>
                 </a:solidFill>
@@ -9578,7 +11408,7 @@
               <a:t>    {</a:t>
             </a:r>
             <a:br>
-              <a:rPr lang="en-US" altLang="en-US" sz="1600">
+              <a:rPr lang="en-US" altLang="en-US" sz="1600" dirty="0">
                 <a:solidFill>
                   <a:srgbClr val="000000"/>
                 </a:solidFill>
@@ -9587,7 +11417,7 @@
               </a:rPr>
             </a:br>
             <a:r>
-              <a:rPr lang="en-US" altLang="en-US" sz="1600">
+              <a:rPr lang="en-US" altLang="en-US" sz="1600" dirty="0">
                 <a:solidFill>
                   <a:srgbClr val="000000"/>
                 </a:solidFill>
@@ -9597,7 +11427,7 @@
               <a:t>        </a:t>
             </a:r>
             <a:r>
-              <a:rPr lang="en-US" altLang="en-US" sz="1600" b="1">
+              <a:rPr lang="en-US" altLang="en-US" sz="1600" b="1" dirty="0">
                 <a:solidFill>
                   <a:srgbClr val="000080"/>
                 </a:solidFill>
@@ -9607,7 +11437,7 @@
               <a:t>int </a:t>
             </a:r>
             <a:r>
-              <a:rPr lang="en-US" altLang="en-US" sz="1600">
+              <a:rPr lang="en-US" altLang="en-US" sz="1600" dirty="0">
                 <a:solidFill>
                   <a:srgbClr val="000000"/>
                 </a:solidFill>
@@ -9617,7 +11447,7 @@
               <a:t>index;</a:t>
             </a:r>
             <a:br>
-              <a:rPr lang="en-US" altLang="en-US" sz="1600">
+              <a:rPr lang="en-US" altLang="en-US" sz="1600" dirty="0">
                 <a:solidFill>
                   <a:srgbClr val="000000"/>
                 </a:solidFill>
@@ -9626,7 +11456,7 @@
               </a:rPr>
             </a:br>
             <a:r>
-              <a:rPr lang="en-US" altLang="en-US" sz="1600">
+              <a:rPr lang="en-US" altLang="en-US" sz="1600" dirty="0">
                 <a:solidFill>
                   <a:srgbClr val="000000"/>
                 </a:solidFill>
@@ -9636,17 +11466,37 @@
               <a:t>        </a:t>
             </a:r>
             <a:r>
-              <a:rPr lang="en-US" altLang="en-US" sz="1600" i="1">
+              <a:rPr lang="en-US" altLang="en-US" sz="1600" i="1" dirty="0">
                 <a:solidFill>
                   <a:srgbClr val="808080"/>
                 </a:solidFill>
                 <a:latin typeface="Courier New" panose="02070309020205020404" pitchFamily="49" charset="0"/>
                 <a:cs typeface="Courier New" panose="02070309020205020404" pitchFamily="49" charset="0"/>
               </a:rPr>
-              <a:t>//int max = Integer.MAX_VALUE;</a:t>
+              <a:t>//int max = </a:t>
+            </a:r>
+            <a:r>
+              <a:rPr lang="en-US" altLang="en-US" sz="1600" i="1" dirty="0" err="1">
+                <a:solidFill>
+                  <a:srgbClr val="808080"/>
+                </a:solidFill>
+                <a:latin typeface="Courier New" panose="02070309020205020404" pitchFamily="49" charset="0"/>
+                <a:cs typeface="Courier New" panose="02070309020205020404" pitchFamily="49" charset="0"/>
+              </a:rPr>
+              <a:t>Integer.MAX_VALUE</a:t>
+            </a:r>
+            <a:r>
+              <a:rPr lang="en-US" altLang="en-US" sz="1600" i="1" dirty="0">
+                <a:solidFill>
+                  <a:srgbClr val="808080"/>
+                </a:solidFill>
+                <a:latin typeface="Courier New" panose="02070309020205020404" pitchFamily="49" charset="0"/>
+                <a:cs typeface="Courier New" panose="02070309020205020404" pitchFamily="49" charset="0"/>
+              </a:rPr>
+              <a:t>;</a:t>
             </a:r>
             <a:br>
-              <a:rPr lang="en-US" altLang="en-US" sz="1600" i="1">
+              <a:rPr lang="en-US" altLang="en-US" sz="1600" i="1" dirty="0">
                 <a:solidFill>
                   <a:srgbClr val="808080"/>
                 </a:solidFill>
@@ -9655,7 +11505,7 @@
               </a:rPr>
             </a:br>
             <a:r>
-              <a:rPr lang="en-US" altLang="en-US" sz="1600" i="1">
+              <a:rPr lang="en-US" altLang="en-US" sz="1600" i="1" dirty="0">
                 <a:solidFill>
                   <a:srgbClr val="808080"/>
                 </a:solidFill>
@@ -9665,7 +11515,7 @@
               <a:t>        </a:t>
             </a:r>
             <a:r>
-              <a:rPr lang="en-US" altLang="en-US" sz="1600" b="1">
+              <a:rPr lang="en-US" altLang="en-US" sz="1600" b="1" dirty="0">
                 <a:solidFill>
                   <a:srgbClr val="000080"/>
                 </a:solidFill>
@@ -9675,17 +11525,27 @@
               <a:t>int </a:t>
             </a:r>
             <a:r>
-              <a:rPr lang="en-US" altLang="en-US" sz="1600">
-                <a:solidFill>
-                  <a:srgbClr val="000000"/>
-                </a:solidFill>
-                <a:latin typeface="Courier New" panose="02070309020205020404" pitchFamily="49" charset="0"/>
-                <a:cs typeface="Courier New" panose="02070309020205020404" pitchFamily="49" charset="0"/>
-              </a:rPr>
-              <a:t>max = Integer.</a:t>
-            </a:r>
-            <a:r>
-              <a:rPr lang="en-US" altLang="en-US" sz="1600" b="1" i="1">
+              <a:rPr lang="en-US" altLang="en-US" sz="1600" dirty="0">
+                <a:solidFill>
+                  <a:srgbClr val="000000"/>
+                </a:solidFill>
+                <a:latin typeface="Courier New" panose="02070309020205020404" pitchFamily="49" charset="0"/>
+                <a:cs typeface="Courier New" panose="02070309020205020404" pitchFamily="49" charset="0"/>
+              </a:rPr>
+              <a:t>max = </a:t>
+            </a:r>
+            <a:r>
+              <a:rPr lang="en-US" altLang="en-US" sz="1600" dirty="0" err="1">
+                <a:solidFill>
+                  <a:srgbClr val="000000"/>
+                </a:solidFill>
+                <a:latin typeface="Courier New" panose="02070309020205020404" pitchFamily="49" charset="0"/>
+                <a:cs typeface="Courier New" panose="02070309020205020404" pitchFamily="49" charset="0"/>
+              </a:rPr>
+              <a:t>Integer.</a:t>
+            </a:r>
+            <a:r>
+              <a:rPr lang="en-US" altLang="en-US" sz="1600" b="1" i="1" dirty="0" err="1">
                 <a:solidFill>
                   <a:srgbClr val="660E7A"/>
                 </a:solidFill>
@@ -9695,7 +11555,7 @@
               <a:t>MIN_VALUE</a:t>
             </a:r>
             <a:r>
-              <a:rPr lang="en-US" altLang="en-US" sz="1600">
+              <a:rPr lang="en-US" altLang="en-US" sz="1600" dirty="0">
                 <a:solidFill>
                   <a:srgbClr val="000000"/>
                 </a:solidFill>
@@ -9705,7 +11565,7 @@
               <a:t>;</a:t>
             </a:r>
             <a:br>
-              <a:rPr lang="en-US" altLang="en-US" sz="1600">
+              <a:rPr lang="en-US" altLang="en-US" sz="1600" dirty="0">
                 <a:solidFill>
                   <a:srgbClr val="000000"/>
                 </a:solidFill>
@@ -9714,7 +11574,7 @@
               </a:rPr>
             </a:br>
             <a:br>
-              <a:rPr lang="en-US" altLang="en-US" sz="1600">
+              <a:rPr lang="en-US" altLang="en-US" sz="1600" dirty="0">
                 <a:solidFill>
                   <a:srgbClr val="000000"/>
                 </a:solidFill>
@@ -9723,7 +11583,7 @@
               </a:rPr>
             </a:br>
             <a:r>
-              <a:rPr lang="en-US" altLang="en-US" sz="1600">
+              <a:rPr lang="en-US" altLang="en-US" sz="1600" dirty="0">
                 <a:solidFill>
                   <a:srgbClr val="000000"/>
                 </a:solidFill>
@@ -9733,17 +11593,37 @@
               <a:t>        </a:t>
             </a:r>
             <a:r>
-              <a:rPr lang="en-US" altLang="en-US" sz="1600" i="1">
+              <a:rPr lang="en-US" altLang="en-US" sz="1600" i="1" dirty="0">
                 <a:solidFill>
                   <a:srgbClr val="808080"/>
                 </a:solidFill>
                 <a:latin typeface="Courier New" panose="02070309020205020404" pitchFamily="49" charset="0"/>
                 <a:cs typeface="Courier New" panose="02070309020205020404" pitchFamily="49" charset="0"/>
               </a:rPr>
-              <a:t>//for (index = 0; index &lt; list.length - 1; index++)</a:t>
+              <a:t>//for (index = 0; index &lt; </a:t>
+            </a:r>
+            <a:r>
+              <a:rPr lang="en-US" altLang="en-US" sz="1600" i="1" dirty="0" err="1">
+                <a:solidFill>
+                  <a:srgbClr val="808080"/>
+                </a:solidFill>
+                <a:latin typeface="Courier New" panose="02070309020205020404" pitchFamily="49" charset="0"/>
+                <a:cs typeface="Courier New" panose="02070309020205020404" pitchFamily="49" charset="0"/>
+              </a:rPr>
+              <a:t>list.length</a:t>
+            </a:r>
+            <a:r>
+              <a:rPr lang="en-US" altLang="en-US" sz="1600" i="1" dirty="0">
+                <a:solidFill>
+                  <a:srgbClr val="808080"/>
+                </a:solidFill>
+                <a:latin typeface="Courier New" panose="02070309020205020404" pitchFamily="49" charset="0"/>
+                <a:cs typeface="Courier New" panose="02070309020205020404" pitchFamily="49" charset="0"/>
+              </a:rPr>
+              <a:t> - 1; index++)</a:t>
             </a:r>
             <a:br>
-              <a:rPr lang="en-US" altLang="en-US" sz="1600" i="1">
+              <a:rPr lang="en-US" altLang="en-US" sz="1600" i="1" dirty="0">
                 <a:solidFill>
                   <a:srgbClr val="808080"/>
                 </a:solidFill>
@@ -9752,7 +11632,7 @@
               </a:rPr>
             </a:br>
             <a:r>
-              <a:rPr lang="en-US" altLang="en-US" sz="1600" i="1">
+              <a:rPr lang="en-US" altLang="en-US" sz="1600" i="1" dirty="0">
                 <a:solidFill>
                   <a:srgbClr val="808080"/>
                 </a:solidFill>
@@ -9762,7 +11642,7 @@
               <a:t>        </a:t>
             </a:r>
             <a:r>
-              <a:rPr lang="en-US" altLang="en-US" sz="1600" b="1">
+              <a:rPr lang="en-US" altLang="en-US" sz="1600" b="1" dirty="0">
                 <a:solidFill>
                   <a:srgbClr val="000080"/>
                 </a:solidFill>
@@ -9772,7 +11652,7 @@
               <a:t>for </a:t>
             </a:r>
             <a:r>
-              <a:rPr lang="en-US" altLang="en-US" sz="1600">
+              <a:rPr lang="en-US" altLang="en-US" sz="1600" dirty="0">
                 <a:solidFill>
                   <a:srgbClr val="000000"/>
                 </a:solidFill>
@@ -9782,7 +11662,7 @@
               <a:t>(index = </a:t>
             </a:r>
             <a:r>
-              <a:rPr lang="en-US" altLang="en-US" sz="1600">
+              <a:rPr lang="en-US" altLang="en-US" sz="1600" dirty="0">
                 <a:solidFill>
                   <a:srgbClr val="0000FF"/>
                 </a:solidFill>
@@ -9792,17 +11672,27 @@
               <a:t>0</a:t>
             </a:r>
             <a:r>
-              <a:rPr lang="en-US" altLang="en-US" sz="1600">
-                <a:solidFill>
-                  <a:srgbClr val="000000"/>
-                </a:solidFill>
-                <a:latin typeface="Courier New" panose="02070309020205020404" pitchFamily="49" charset="0"/>
-                <a:cs typeface="Courier New" panose="02070309020205020404" pitchFamily="49" charset="0"/>
-              </a:rPr>
-              <a:t>; index &lt; list.</a:t>
-            </a:r>
-            <a:r>
-              <a:rPr lang="en-US" altLang="en-US" sz="1600" b="1">
+              <a:rPr lang="en-US" altLang="en-US" sz="1600" dirty="0">
+                <a:solidFill>
+                  <a:srgbClr val="000000"/>
+                </a:solidFill>
+                <a:latin typeface="Courier New" panose="02070309020205020404" pitchFamily="49" charset="0"/>
+                <a:cs typeface="Courier New" panose="02070309020205020404" pitchFamily="49" charset="0"/>
+              </a:rPr>
+              <a:t>; index &lt; </a:t>
+            </a:r>
+            <a:r>
+              <a:rPr lang="en-US" altLang="en-US" sz="1600" dirty="0" err="1">
+                <a:solidFill>
+                  <a:srgbClr val="000000"/>
+                </a:solidFill>
+                <a:latin typeface="Courier New" panose="02070309020205020404" pitchFamily="49" charset="0"/>
+                <a:cs typeface="Courier New" panose="02070309020205020404" pitchFamily="49" charset="0"/>
+              </a:rPr>
+              <a:t>list.</a:t>
+            </a:r>
+            <a:r>
+              <a:rPr lang="en-US" altLang="en-US" sz="1600" b="1" dirty="0" err="1">
                 <a:solidFill>
                   <a:srgbClr val="660E7A"/>
                 </a:solidFill>
@@ -9812,7 +11702,7 @@
               <a:t>length</a:t>
             </a:r>
             <a:r>
-              <a:rPr lang="en-US" altLang="en-US" sz="1600">
+              <a:rPr lang="en-US" altLang="en-US" sz="1600" dirty="0">
                 <a:solidFill>
                   <a:srgbClr val="000000"/>
                 </a:solidFill>
@@ -9822,7 +11712,7 @@
               <a:t>; index++)</a:t>
             </a:r>
             <a:br>
-              <a:rPr lang="en-US" altLang="en-US" sz="1600">
+              <a:rPr lang="en-US" altLang="en-US" sz="1600" dirty="0">
                 <a:solidFill>
                   <a:srgbClr val="000000"/>
                 </a:solidFill>
@@ -9831,7 +11721,7 @@
               </a:rPr>
             </a:br>
             <a:r>
-              <a:rPr lang="en-US" altLang="en-US" sz="1600">
+              <a:rPr lang="en-US" altLang="en-US" sz="1600" dirty="0">
                 <a:solidFill>
                   <a:srgbClr val="000000"/>
                 </a:solidFill>
@@ -9841,7 +11731,7 @@
               <a:t>        {</a:t>
             </a:r>
             <a:br>
-              <a:rPr lang="en-US" altLang="en-US" sz="1600">
+              <a:rPr lang="en-US" altLang="en-US" sz="1600" dirty="0">
                 <a:solidFill>
                   <a:srgbClr val="000000"/>
                 </a:solidFill>
@@ -9850,7 +11740,7 @@
               </a:rPr>
             </a:br>
             <a:r>
-              <a:rPr lang="en-US" altLang="en-US" sz="1600">
+              <a:rPr lang="en-US" altLang="en-US" sz="1600" dirty="0">
                 <a:solidFill>
                   <a:srgbClr val="000000"/>
                 </a:solidFill>
@@ -9860,7 +11750,7 @@
               <a:t>            </a:t>
             </a:r>
             <a:r>
-              <a:rPr lang="en-US" altLang="en-US" sz="1600" b="1">
+              <a:rPr lang="en-US" altLang="en-US" sz="1600" b="1" dirty="0">
                 <a:solidFill>
                   <a:srgbClr val="000080"/>
                 </a:solidFill>
@@ -9870,7 +11760,7 @@
               <a:t>if </a:t>
             </a:r>
             <a:r>
-              <a:rPr lang="en-US" altLang="en-US" sz="1600">
+              <a:rPr lang="en-US" altLang="en-US" sz="1600" dirty="0">
                 <a:solidFill>
                   <a:srgbClr val="000000"/>
                 </a:solidFill>
@@ -9880,7 +11770,7 @@
               <a:t>(list[index] &gt; max)</a:t>
             </a:r>
             <a:br>
-              <a:rPr lang="en-US" altLang="en-US" sz="1600">
+              <a:rPr lang="en-US" altLang="en-US" sz="1600" dirty="0">
                 <a:solidFill>
                   <a:srgbClr val="000000"/>
                 </a:solidFill>
@@ -9889,7 +11779,7 @@
               </a:rPr>
             </a:br>
             <a:r>
-              <a:rPr lang="en-US" altLang="en-US" sz="1600">
+              <a:rPr lang="en-US" altLang="en-US" sz="1600" dirty="0">
                 <a:solidFill>
                   <a:srgbClr val="000000"/>
                 </a:solidFill>
@@ -9899,7 +11789,7 @@
               <a:t>            {</a:t>
             </a:r>
             <a:br>
-              <a:rPr lang="en-US" altLang="en-US" sz="1600">
+              <a:rPr lang="en-US" altLang="en-US" sz="1600" dirty="0">
                 <a:solidFill>
                   <a:srgbClr val="000000"/>
                 </a:solidFill>
@@ -9908,7 +11798,7 @@
               </a:rPr>
             </a:br>
             <a:r>
-              <a:rPr lang="en-US" altLang="en-US" sz="1600">
+              <a:rPr lang="en-US" altLang="en-US" sz="1600" dirty="0">
                 <a:solidFill>
                   <a:srgbClr val="000000"/>
                 </a:solidFill>
@@ -9918,7 +11808,7 @@
               <a:t>                max = list[index];</a:t>
             </a:r>
             <a:br>
-              <a:rPr lang="en-US" altLang="en-US" sz="1600">
+              <a:rPr lang="en-US" altLang="en-US" sz="1600" dirty="0">
                 <a:solidFill>
                   <a:srgbClr val="000000"/>
                 </a:solidFill>
@@ -9927,7 +11817,7 @@
               </a:rPr>
             </a:br>
             <a:r>
-              <a:rPr lang="en-US" altLang="en-US" sz="1600">
+              <a:rPr lang="en-US" altLang="en-US" sz="1600" dirty="0">
                 <a:solidFill>
                   <a:srgbClr val="000000"/>
                 </a:solidFill>
@@ -9937,7 +11827,7 @@
               <a:t>            }</a:t>
             </a:r>
             <a:br>
-              <a:rPr lang="en-US" altLang="en-US" sz="1600">
+              <a:rPr lang="en-US" altLang="en-US" sz="1600" dirty="0">
                 <a:solidFill>
                   <a:srgbClr val="000000"/>
                 </a:solidFill>
@@ -9946,7 +11836,7 @@
               </a:rPr>
             </a:br>
             <a:r>
-              <a:rPr lang="en-US" altLang="en-US" sz="1600">
+              <a:rPr lang="en-US" altLang="en-US" sz="1600" dirty="0">
                 <a:solidFill>
                   <a:srgbClr val="000000"/>
                 </a:solidFill>
@@ -9956,7 +11846,7 @@
               <a:t>        }</a:t>
             </a:r>
             <a:br>
-              <a:rPr lang="en-US" altLang="en-US" sz="1600">
+              <a:rPr lang="en-US" altLang="en-US" sz="1600" dirty="0">
                 <a:solidFill>
                   <a:srgbClr val="000000"/>
                 </a:solidFill>
@@ -9965,7 +11855,7 @@
               </a:rPr>
             </a:br>
             <a:br>
-              <a:rPr lang="en-US" altLang="en-US" sz="1600">
+              <a:rPr lang="en-US" altLang="en-US" sz="1600" dirty="0">
                 <a:solidFill>
                   <a:srgbClr val="000000"/>
                 </a:solidFill>
@@ -9974,7 +11864,7 @@
               </a:rPr>
             </a:br>
             <a:r>
-              <a:rPr lang="en-US" altLang="en-US" sz="1600">
+              <a:rPr lang="en-US" altLang="en-US" sz="1600" dirty="0">
                 <a:solidFill>
                   <a:srgbClr val="000000"/>
                 </a:solidFill>
@@ -9984,7 +11874,7 @@
               <a:t>        </a:t>
             </a:r>
             <a:r>
-              <a:rPr lang="en-US" altLang="en-US" sz="1600" b="1">
+              <a:rPr lang="en-US" altLang="en-US" sz="1600" b="1" dirty="0">
                 <a:solidFill>
                   <a:srgbClr val="000080"/>
                 </a:solidFill>
@@ -9994,7 +11884,7 @@
               <a:t>return </a:t>
             </a:r>
             <a:r>
-              <a:rPr lang="en-US" altLang="en-US" sz="1600">
+              <a:rPr lang="en-US" altLang="en-US" sz="1600" dirty="0">
                 <a:solidFill>
                   <a:srgbClr val="000000"/>
                 </a:solidFill>
@@ -10004,7 +11894,7 @@
               <a:t>max;</a:t>
             </a:r>
             <a:br>
-              <a:rPr lang="en-US" altLang="en-US" sz="1600">
+              <a:rPr lang="en-US" altLang="en-US" sz="1600" dirty="0">
                 <a:solidFill>
                   <a:srgbClr val="000000"/>
                 </a:solidFill>
@@ -10013,7 +11903,7 @@
               </a:rPr>
             </a:br>
             <a:r>
-              <a:rPr lang="en-US" altLang="en-US" sz="1600">
+              <a:rPr lang="en-US" altLang="en-US" sz="1600" dirty="0">
                 <a:solidFill>
                   <a:srgbClr val="000000"/>
                 </a:solidFill>
@@ -10023,7 +11913,7 @@
               <a:t>    }</a:t>
             </a:r>
             <a:br>
-              <a:rPr lang="en-US" altLang="en-US" sz="1600">
+              <a:rPr lang="en-US" altLang="en-US" sz="1600" dirty="0">
                 <a:solidFill>
                   <a:srgbClr val="000000"/>
                 </a:solidFill>
@@ -10032,7 +11922,7 @@
               </a:rPr>
             </a:br>
             <a:r>
-              <a:rPr lang="en-US" altLang="en-US" sz="1600">
+              <a:rPr lang="en-US" altLang="en-US" sz="1600" dirty="0">
                 <a:solidFill>
                   <a:srgbClr val="000000"/>
                 </a:solidFill>
@@ -10041,7 +11931,7 @@
               </a:rPr>
               <a:t>}</a:t>
             </a:r>
-            <a:endParaRPr lang="en-US" altLang="en-US" sz="6600">
+            <a:endParaRPr lang="en-US" altLang="en-US" sz="6600" dirty="0">
               <a:latin typeface="Arial" panose="020B0604020202020204" pitchFamily="34" charset="0"/>
             </a:endParaRPr>
           </a:p>
@@ -10135,6 +12025,221 @@
   <p:clrMapOvr>
     <a:masterClrMapping/>
   </p:clrMapOvr>
+  <p:timing>
+    <p:tnLst>
+      <p:par>
+        <p:cTn id="1" dur="indefinite" restart="never" nodeType="tmRoot">
+          <p:childTnLst>
+            <p:seq concurrent="1" nextAc="seek">
+              <p:cTn id="2" dur="indefinite" nodeType="mainSeq">
+                <p:childTnLst>
+                  <p:par>
+                    <p:cTn id="3" fill="hold">
+                      <p:stCondLst>
+                        <p:cond delay="indefinite"/>
+                      </p:stCondLst>
+                      <p:childTnLst>
+                        <p:par>
+                          <p:cTn id="4" fill="hold">
+                            <p:stCondLst>
+                              <p:cond delay="0"/>
+                            </p:stCondLst>
+                            <p:childTnLst>
+                              <p:par>
+                                <p:cTn id="5" presetID="2" presetClass="entr" presetSubtype="4" fill="hold" grpId="0" nodeType="clickEffect">
+                                  <p:stCondLst>
+                                    <p:cond delay="0"/>
+                                  </p:stCondLst>
+                                  <p:childTnLst>
+                                    <p:set>
+                                      <p:cBhvr>
+                                        <p:cTn id="6" dur="1" fill="hold">
+                                          <p:stCondLst>
+                                            <p:cond delay="0"/>
+                                          </p:stCondLst>
+                                        </p:cTn>
+                                        <p:tgtEl>
+                                          <p:spTgt spid="163">
+                                            <p:bg/>
+                                          </p:spTgt>
+                                        </p:tgtEl>
+                                        <p:attrNameLst>
+                                          <p:attrName>style.visibility</p:attrName>
+                                        </p:attrNameLst>
+                                      </p:cBhvr>
+                                      <p:to>
+                                        <p:strVal val="visible"/>
+                                      </p:to>
+                                    </p:set>
+                                    <p:anim calcmode="lin" valueType="num">
+                                      <p:cBhvr additive="base">
+                                        <p:cTn id="7" dur="500" fill="hold"/>
+                                        <p:tgtEl>
+                                          <p:spTgt spid="163">
+                                            <p:bg/>
+                                          </p:spTgt>
+                                        </p:tgtEl>
+                                        <p:attrNameLst>
+                                          <p:attrName>ppt_x</p:attrName>
+                                        </p:attrNameLst>
+                                      </p:cBhvr>
+                                      <p:tavLst>
+                                        <p:tav tm="0">
+                                          <p:val>
+                                            <p:strVal val="#ppt_x"/>
+                                          </p:val>
+                                        </p:tav>
+                                        <p:tav tm="100000">
+                                          <p:val>
+                                            <p:strVal val="#ppt_x"/>
+                                          </p:val>
+                                        </p:tav>
+                                      </p:tavLst>
+                                    </p:anim>
+                                    <p:anim calcmode="lin" valueType="num">
+                                      <p:cBhvr additive="base">
+                                        <p:cTn id="8" dur="500" fill="hold"/>
+                                        <p:tgtEl>
+                                          <p:spTgt spid="163">
+                                            <p:bg/>
+                                          </p:spTgt>
+                                        </p:tgtEl>
+                                        <p:attrNameLst>
+                                          <p:attrName>ppt_y</p:attrName>
+                                        </p:attrNameLst>
+                                      </p:cBhvr>
+                                      <p:tavLst>
+                                        <p:tav tm="0">
+                                          <p:val>
+                                            <p:strVal val="1+#ppt_h/2"/>
+                                          </p:val>
+                                        </p:tav>
+                                        <p:tav tm="100000">
+                                          <p:val>
+                                            <p:strVal val="#ppt_y"/>
+                                          </p:val>
+                                        </p:tav>
+                                      </p:tavLst>
+                                    </p:anim>
+                                  </p:childTnLst>
+                                </p:cTn>
+                              </p:par>
+                              <p:par>
+                                <p:cTn id="9" presetID="2" presetClass="entr" presetSubtype="4" fill="hold" grpId="0" nodeType="withEffect">
+                                  <p:stCondLst>
+                                    <p:cond delay="0"/>
+                                  </p:stCondLst>
+                                  <p:childTnLst>
+                                    <p:set>
+                                      <p:cBhvr>
+                                        <p:cTn id="10" dur="1" fill="hold">
+                                          <p:stCondLst>
+                                            <p:cond delay="0"/>
+                                          </p:stCondLst>
+                                        </p:cTn>
+                                        <p:tgtEl>
+                                          <p:spTgt spid="163">
+                                            <p:txEl>
+                                              <p:pRg st="0" end="0"/>
+                                            </p:txEl>
+                                          </p:spTgt>
+                                        </p:tgtEl>
+                                        <p:attrNameLst>
+                                          <p:attrName>style.visibility</p:attrName>
+                                        </p:attrNameLst>
+                                      </p:cBhvr>
+                                      <p:to>
+                                        <p:strVal val="visible"/>
+                                      </p:to>
+                                    </p:set>
+                                    <p:anim calcmode="lin" valueType="num">
+                                      <p:cBhvr additive="base">
+                                        <p:cTn id="11" dur="500" fill="hold"/>
+                                        <p:tgtEl>
+                                          <p:spTgt spid="163">
+                                            <p:txEl>
+                                              <p:pRg st="0" end="0"/>
+                                            </p:txEl>
+                                          </p:spTgt>
+                                        </p:tgtEl>
+                                        <p:attrNameLst>
+                                          <p:attrName>ppt_x</p:attrName>
+                                        </p:attrNameLst>
+                                      </p:cBhvr>
+                                      <p:tavLst>
+                                        <p:tav tm="0">
+                                          <p:val>
+                                            <p:strVal val="#ppt_x"/>
+                                          </p:val>
+                                        </p:tav>
+                                        <p:tav tm="100000">
+                                          <p:val>
+                                            <p:strVal val="#ppt_x"/>
+                                          </p:val>
+                                        </p:tav>
+                                      </p:tavLst>
+                                    </p:anim>
+                                    <p:anim calcmode="lin" valueType="num">
+                                      <p:cBhvr additive="base">
+                                        <p:cTn id="12" dur="500" fill="hold"/>
+                                        <p:tgtEl>
+                                          <p:spTgt spid="163">
+                                            <p:txEl>
+                                              <p:pRg st="0" end="0"/>
+                                            </p:txEl>
+                                          </p:spTgt>
+                                        </p:tgtEl>
+                                        <p:attrNameLst>
+                                          <p:attrName>ppt_y</p:attrName>
+                                        </p:attrNameLst>
+                                      </p:cBhvr>
+                                      <p:tavLst>
+                                        <p:tav tm="0">
+                                          <p:val>
+                                            <p:strVal val="1+#ppt_h/2"/>
+                                          </p:val>
+                                        </p:tav>
+                                        <p:tav tm="100000">
+                                          <p:val>
+                                            <p:strVal val="#ppt_y"/>
+                                          </p:val>
+                                        </p:tav>
+                                      </p:tavLst>
+                                    </p:anim>
+                                  </p:childTnLst>
+                                </p:cTn>
+                              </p:par>
+                            </p:childTnLst>
+                          </p:cTn>
+                        </p:par>
+                      </p:childTnLst>
+                    </p:cTn>
+                  </p:par>
+                </p:childTnLst>
+              </p:cTn>
+              <p:prevCondLst>
+                <p:cond evt="onPrev" delay="0">
+                  <p:tgtEl>
+                    <p:sldTgt/>
+                  </p:tgtEl>
+                </p:cond>
+              </p:prevCondLst>
+              <p:nextCondLst>
+                <p:cond evt="onNext" delay="0">
+                  <p:tgtEl>
+                    <p:sldTgt/>
+                  </p:tgtEl>
+                </p:cond>
+              </p:nextCondLst>
+            </p:seq>
+          </p:childTnLst>
+        </p:cTn>
+      </p:par>
+    </p:tnLst>
+    <p:bldLst>
+      <p:bldP spid="163" grpId="0" uiExpand="1" build="p" animBg="1"/>
+    </p:bldLst>
+  </p:timing>
 </p:sld>
 </file>
 
@@ -10294,6 +12399,92 @@
   <p:clrMapOvr>
     <a:masterClrMapping/>
   </p:clrMapOvr>
+  <p:timing>
+    <p:tnLst>
+      <p:par>
+        <p:cTn id="1" dur="indefinite" restart="never" nodeType="tmRoot">
+          <p:childTnLst>
+            <p:seq concurrent="1" nextAc="seek">
+              <p:cTn id="2" dur="indefinite" nodeType="mainSeq">
+                <p:childTnLst>
+                  <p:par>
+                    <p:cTn id="3" fill="hold">
+                      <p:stCondLst>
+                        <p:cond delay="indefinite"/>
+                      </p:stCondLst>
+                      <p:childTnLst>
+                        <p:par>
+                          <p:cTn id="4" fill="hold">
+                            <p:stCondLst>
+                              <p:cond delay="0"/>
+                            </p:stCondLst>
+                            <p:childTnLst>
+                              <p:par>
+                                <p:cTn id="5" presetID="9" presetClass="entr" presetSubtype="0" fill="hold" grpId="0" nodeType="clickEffect">
+                                  <p:stCondLst>
+                                    <p:cond delay="0"/>
+                                  </p:stCondLst>
+                                  <p:childTnLst>
+                                    <p:set>
+                                      <p:cBhvr>
+                                        <p:cTn id="6" dur="1" fill="hold">
+                                          <p:stCondLst>
+                                            <p:cond delay="0"/>
+                                          </p:stCondLst>
+                                        </p:cTn>
+                                        <p:tgtEl>
+                                          <p:spTgt spid="4"/>
+                                        </p:tgtEl>
+                                        <p:attrNameLst>
+                                          <p:attrName>style.visibility</p:attrName>
+                                        </p:attrNameLst>
+                                      </p:cBhvr>
+                                      <p:to>
+                                        <p:strVal val="visible"/>
+                                      </p:to>
+                                    </p:set>
+                                    <p:animEffect transition="in" filter="dissolve">
+                                      <p:cBhvr>
+                                        <p:cTn id="7" dur="500"/>
+                                        <p:tgtEl>
+                                          <p:spTgt spid="4"/>
+                                        </p:tgtEl>
+                                      </p:cBhvr>
+                                    </p:animEffect>
+                                  </p:childTnLst>
+                                </p:cTn>
+                              </p:par>
+                            </p:childTnLst>
+                          </p:cTn>
+                        </p:par>
+                      </p:childTnLst>
+                    </p:cTn>
+                  </p:par>
+                </p:childTnLst>
+              </p:cTn>
+              <p:prevCondLst>
+                <p:cond evt="onPrev" delay="0">
+                  <p:tgtEl>
+                    <p:sldTgt/>
+                  </p:tgtEl>
+                </p:cond>
+              </p:prevCondLst>
+              <p:nextCondLst>
+                <p:cond evt="onNext" delay="0">
+                  <p:tgtEl>
+                    <p:sldTgt/>
+                  </p:tgtEl>
+                </p:cond>
+              </p:nextCondLst>
+            </p:seq>
+          </p:childTnLst>
+        </p:cTn>
+      </p:par>
+    </p:tnLst>
+    <p:bldLst>
+      <p:bldP spid="4" grpId="0" animBg="1"/>
+    </p:bldLst>
+  </p:timing>
 </p:sld>
 </file>
 
@@ -10421,7 +12612,7 @@
           </a:prstGeom>
           <a:extLst>
             <a:ext uri="{C572A759-6A51-4108-AA02-DFA0A04FC94B}">
-              <ma14:wrappingTextBoxFlag xmlns:ma14="http://schemas.microsoft.com/office/mac/drawingml/2011/main" xmlns="" val="1"/>
+              <ma14:wrappingTextBoxFlag xmlns="" xmlns:ma14="http://schemas.microsoft.com/office/mac/drawingml/2011/main" val="1"/>
             </a:ext>
           </a:extLst>
         </p:spPr>
@@ -10460,7 +12651,7 @@
           </a:ln>
           <a:extLst>
             <a:ext uri="{C572A759-6A51-4108-AA02-DFA0A04FC94B}">
-              <ma14:wrappingTextBoxFlag xmlns:ma14="http://schemas.microsoft.com/office/mac/drawingml/2011/main" xmlns="" val="1"/>
+              <ma14:wrappingTextBoxFlag xmlns="" xmlns:ma14="http://schemas.microsoft.com/office/mac/drawingml/2011/main" val="1"/>
             </a:ext>
           </a:extLst>
         </p:spPr>
@@ -11055,6 +13246,242 @@
   <p:clrMapOvr>
     <a:masterClrMapping/>
   </p:clrMapOvr>
+  <p:timing>
+    <p:tnLst>
+      <p:par>
+        <p:cTn id="1" dur="indefinite" restart="never" nodeType="tmRoot">
+          <p:childTnLst>
+            <p:seq concurrent="1" nextAc="seek">
+              <p:cTn id="2" dur="indefinite" nodeType="mainSeq">
+                <p:childTnLst>
+                  <p:par>
+                    <p:cTn id="3" fill="hold">
+                      <p:stCondLst>
+                        <p:cond delay="indefinite"/>
+                      </p:stCondLst>
+                      <p:childTnLst>
+                        <p:par>
+                          <p:cTn id="4" fill="hold">
+                            <p:stCondLst>
+                              <p:cond delay="0"/>
+                            </p:stCondLst>
+                            <p:childTnLst>
+                              <p:par>
+                                <p:cTn id="5" presetID="2" presetClass="entr" presetSubtype="4" fill="hold" nodeType="clickEffect">
+                                  <p:stCondLst>
+                                    <p:cond delay="0"/>
+                                  </p:stCondLst>
+                                  <p:childTnLst>
+                                    <p:set>
+                                      <p:cBhvr>
+                                        <p:cTn id="6" dur="1" fill="hold">
+                                          <p:stCondLst>
+                                            <p:cond delay="0"/>
+                                          </p:stCondLst>
+                                        </p:cTn>
+                                        <p:tgtEl>
+                                          <p:spTgt spid="163">
+                                            <p:txEl>
+                                              <p:pRg st="0" end="0"/>
+                                            </p:txEl>
+                                          </p:spTgt>
+                                        </p:tgtEl>
+                                        <p:attrNameLst>
+                                          <p:attrName>style.visibility</p:attrName>
+                                        </p:attrNameLst>
+                                      </p:cBhvr>
+                                      <p:to>
+                                        <p:strVal val="visible"/>
+                                      </p:to>
+                                    </p:set>
+                                    <p:anim calcmode="lin" valueType="num">
+                                      <p:cBhvr additive="base">
+                                        <p:cTn id="7" dur="500" fill="hold"/>
+                                        <p:tgtEl>
+                                          <p:spTgt spid="163">
+                                            <p:txEl>
+                                              <p:pRg st="0" end="0"/>
+                                            </p:txEl>
+                                          </p:spTgt>
+                                        </p:tgtEl>
+                                        <p:attrNameLst>
+                                          <p:attrName>ppt_x</p:attrName>
+                                        </p:attrNameLst>
+                                      </p:cBhvr>
+                                      <p:tavLst>
+                                        <p:tav tm="0">
+                                          <p:val>
+                                            <p:strVal val="#ppt_x"/>
+                                          </p:val>
+                                        </p:tav>
+                                        <p:tav tm="100000">
+                                          <p:val>
+                                            <p:strVal val="#ppt_x"/>
+                                          </p:val>
+                                        </p:tav>
+                                      </p:tavLst>
+                                    </p:anim>
+                                    <p:anim calcmode="lin" valueType="num">
+                                      <p:cBhvr additive="base">
+                                        <p:cTn id="8" dur="500" fill="hold"/>
+                                        <p:tgtEl>
+                                          <p:spTgt spid="163">
+                                            <p:txEl>
+                                              <p:pRg st="0" end="0"/>
+                                            </p:txEl>
+                                          </p:spTgt>
+                                        </p:tgtEl>
+                                        <p:attrNameLst>
+                                          <p:attrName>ppt_y</p:attrName>
+                                        </p:attrNameLst>
+                                      </p:cBhvr>
+                                      <p:tavLst>
+                                        <p:tav tm="0">
+                                          <p:val>
+                                            <p:strVal val="1+#ppt_h/2"/>
+                                          </p:val>
+                                        </p:tav>
+                                        <p:tav tm="100000">
+                                          <p:val>
+                                            <p:strVal val="#ppt_y"/>
+                                          </p:val>
+                                        </p:tav>
+                                      </p:tavLst>
+                                    </p:anim>
+                                  </p:childTnLst>
+                                </p:cTn>
+                              </p:par>
+                            </p:childTnLst>
+                          </p:cTn>
+                        </p:par>
+                      </p:childTnLst>
+                    </p:cTn>
+                  </p:par>
+                  <p:par>
+                    <p:cTn id="9" fill="hold">
+                      <p:stCondLst>
+                        <p:cond delay="indefinite"/>
+                      </p:stCondLst>
+                      <p:childTnLst>
+                        <p:par>
+                          <p:cTn id="10" fill="hold">
+                            <p:stCondLst>
+                              <p:cond delay="0"/>
+                            </p:stCondLst>
+                            <p:childTnLst>
+                              <p:par>
+                                <p:cTn id="11" presetID="2" presetClass="entr" presetSubtype="4" fill="hold" nodeType="clickEffect">
+                                  <p:stCondLst>
+                                    <p:cond delay="0"/>
+                                  </p:stCondLst>
+                                  <p:childTnLst>
+                                    <p:set>
+                                      <p:cBhvr>
+                                        <p:cTn id="12" dur="1" fill="hold">
+                                          <p:stCondLst>
+                                            <p:cond delay="0"/>
+                                          </p:stCondLst>
+                                        </p:cTn>
+                                        <p:tgtEl>
+                                          <p:spTgt spid="163">
+                                            <p:txEl>
+                                              <p:pRg st="2" end="2"/>
+                                            </p:txEl>
+                                          </p:spTgt>
+                                        </p:tgtEl>
+                                        <p:attrNameLst>
+                                          <p:attrName>style.visibility</p:attrName>
+                                        </p:attrNameLst>
+                                      </p:cBhvr>
+                                      <p:to>
+                                        <p:strVal val="visible"/>
+                                      </p:to>
+                                    </p:set>
+                                    <p:anim calcmode="lin" valueType="num">
+                                      <p:cBhvr additive="base">
+                                        <p:cTn id="13" dur="500" fill="hold"/>
+                                        <p:tgtEl>
+                                          <p:spTgt spid="163">
+                                            <p:txEl>
+                                              <p:pRg st="2" end="2"/>
+                                            </p:txEl>
+                                          </p:spTgt>
+                                        </p:tgtEl>
+                                        <p:attrNameLst>
+                                          <p:attrName>ppt_x</p:attrName>
+                                        </p:attrNameLst>
+                                      </p:cBhvr>
+                                      <p:tavLst>
+                                        <p:tav tm="0">
+                                          <p:val>
+                                            <p:strVal val="#ppt_x"/>
+                                          </p:val>
+                                        </p:tav>
+                                        <p:tav tm="100000">
+                                          <p:val>
+                                            <p:strVal val="#ppt_x"/>
+                                          </p:val>
+                                        </p:tav>
+                                      </p:tavLst>
+                                    </p:anim>
+                                    <p:anim calcmode="lin" valueType="num">
+                                      <p:cBhvr additive="base">
+                                        <p:cTn id="14" dur="500" fill="hold"/>
+                                        <p:tgtEl>
+                                          <p:spTgt spid="163">
+                                            <p:txEl>
+                                              <p:pRg st="2" end="2"/>
+                                            </p:txEl>
+                                          </p:spTgt>
+                                        </p:tgtEl>
+                                        <p:attrNameLst>
+                                          <p:attrName>ppt_y</p:attrName>
+                                        </p:attrNameLst>
+                                      </p:cBhvr>
+                                      <p:tavLst>
+                                        <p:tav tm="0">
+                                          <p:val>
+                                            <p:strVal val="1+#ppt_h/2"/>
+                                          </p:val>
+                                        </p:tav>
+                                        <p:tav tm="100000">
+                                          <p:val>
+                                            <p:strVal val="#ppt_y"/>
+                                          </p:val>
+                                        </p:tav>
+                                      </p:tavLst>
+                                    </p:anim>
+                                  </p:childTnLst>
+                                </p:cTn>
+                              </p:par>
+                            </p:childTnLst>
+                          </p:cTn>
+                        </p:par>
+                      </p:childTnLst>
+                    </p:cTn>
+                  </p:par>
+                </p:childTnLst>
+              </p:cTn>
+              <p:prevCondLst>
+                <p:cond evt="onPrev" delay="0">
+                  <p:tgtEl>
+                    <p:sldTgt/>
+                  </p:tgtEl>
+                </p:cond>
+              </p:prevCondLst>
+              <p:nextCondLst>
+                <p:cond evt="onNext" delay="0">
+                  <p:tgtEl>
+                    <p:sldTgt/>
+                  </p:tgtEl>
+                </p:cond>
+              </p:nextCondLst>
+            </p:seq>
+          </p:childTnLst>
+        </p:cTn>
+      </p:par>
+    </p:tnLst>
+  </p:timing>
 </p:sld>
 </file>
 
@@ -11783,6 +14210,127 @@
   <p:clrMapOvr>
     <a:masterClrMapping/>
   </p:clrMapOvr>
+  <p:timing>
+    <p:tnLst>
+      <p:par>
+        <p:cTn id="1" dur="indefinite" restart="never" nodeType="tmRoot">
+          <p:childTnLst>
+            <p:seq concurrent="1" nextAc="seek">
+              <p:cTn id="2" dur="indefinite" nodeType="mainSeq">
+                <p:childTnLst>
+                  <p:par>
+                    <p:cTn id="3" fill="hold">
+                      <p:stCondLst>
+                        <p:cond delay="indefinite"/>
+                      </p:stCondLst>
+                      <p:childTnLst>
+                        <p:par>
+                          <p:cTn id="4" fill="hold">
+                            <p:stCondLst>
+                              <p:cond delay="0"/>
+                            </p:stCondLst>
+                            <p:childTnLst>
+                              <p:par>
+                                <p:cTn id="5" presetID="2" presetClass="entr" presetSubtype="4" fill="hold" nodeType="clickEffect">
+                                  <p:stCondLst>
+                                    <p:cond delay="0"/>
+                                  </p:stCondLst>
+                                  <p:childTnLst>
+                                    <p:set>
+                                      <p:cBhvr>
+                                        <p:cTn id="6" dur="1" fill="hold">
+                                          <p:stCondLst>
+                                            <p:cond delay="0"/>
+                                          </p:stCondLst>
+                                        </p:cTn>
+                                        <p:tgtEl>
+                                          <p:spTgt spid="3"/>
+                                        </p:tgtEl>
+                                        <p:attrNameLst>
+                                          <p:attrName>style.visibility</p:attrName>
+                                        </p:attrNameLst>
+                                      </p:cBhvr>
+                                      <p:to>
+                                        <p:strVal val="visible"/>
+                                      </p:to>
+                                    </p:set>
+                                    <p:anim calcmode="lin" valueType="num">
+                                      <p:cBhvr additive="base">
+                                        <p:cTn id="7" dur="500" fill="hold"/>
+                                        <p:tgtEl>
+                                          <p:spTgt spid="3"/>
+                                        </p:tgtEl>
+                                        <p:attrNameLst>
+                                          <p:attrName>ppt_x</p:attrName>
+                                        </p:attrNameLst>
+                                      </p:cBhvr>
+                                      <p:tavLst>
+                                        <p:tav tm="0">
+                                          <p:val>
+                                            <p:strVal val="#ppt_x"/>
+                                          </p:val>
+                                        </p:tav>
+                                        <p:tav tm="100000">
+                                          <p:val>
+                                            <p:strVal val="#ppt_x"/>
+                                          </p:val>
+                                        </p:tav>
+                                      </p:tavLst>
+                                    </p:anim>
+                                    <p:anim calcmode="lin" valueType="num">
+                                      <p:cBhvr additive="base">
+                                        <p:cTn id="8" dur="500" fill="hold"/>
+                                        <p:tgtEl>
+                                          <p:spTgt spid="3"/>
+                                        </p:tgtEl>
+                                        <p:attrNameLst>
+                                          <p:attrName>ppt_y</p:attrName>
+                                        </p:attrNameLst>
+                                      </p:cBhvr>
+                                      <p:tavLst>
+                                        <p:tav tm="0">
+                                          <p:val>
+                                            <p:strVal val="1+#ppt_h/2"/>
+                                          </p:val>
+                                        </p:tav>
+                                        <p:tav tm="100000">
+                                          <p:val>
+                                            <p:strVal val="#ppt_y"/>
+                                          </p:val>
+                                        </p:tav>
+                                      </p:tavLst>
+                                    </p:anim>
+                                  </p:childTnLst>
+                                </p:cTn>
+                              </p:par>
+                            </p:childTnLst>
+                          </p:cTn>
+                        </p:par>
+                      </p:childTnLst>
+                    </p:cTn>
+                  </p:par>
+                </p:childTnLst>
+              </p:cTn>
+              <p:prevCondLst>
+                <p:cond evt="onPrev" delay="0">
+                  <p:tgtEl>
+                    <p:sldTgt/>
+                  </p:tgtEl>
+                </p:cond>
+              </p:prevCondLst>
+              <p:nextCondLst>
+                <p:cond evt="onNext" delay="0">
+                  <p:tgtEl>
+                    <p:sldTgt/>
+                  </p:tgtEl>
+                </p:cond>
+              </p:nextCondLst>
+            </p:seq>
+          </p:childTnLst>
+        </p:cTn>
+      </p:par>
+    </p:tnLst>
+  </p:timing>
 </p:sld>
 </file>
 
@@ -12263,6 +14811,333 @@
     <a:masterClrMapping/>
   </p:clrMapOvr>
   <p:transition spd="slow"/>
+  <p:timing>
+    <p:tnLst>
+      <p:par>
+        <p:cTn id="1" dur="indefinite" restart="never" nodeType="tmRoot">
+          <p:childTnLst>
+            <p:seq concurrent="1" nextAc="seek">
+              <p:cTn id="2" dur="indefinite" nodeType="mainSeq">
+                <p:childTnLst>
+                  <p:par>
+                    <p:cTn id="3" fill="hold">
+                      <p:stCondLst>
+                        <p:cond delay="indefinite"/>
+                      </p:stCondLst>
+                      <p:childTnLst>
+                        <p:par>
+                          <p:cTn id="4" fill="hold">
+                            <p:stCondLst>
+                              <p:cond delay="0"/>
+                            </p:stCondLst>
+                            <p:childTnLst>
+                              <p:par>
+                                <p:cTn id="5" presetID="2" presetClass="entr" presetSubtype="4" fill="hold" nodeType="clickEffect">
+                                  <p:stCondLst>
+                                    <p:cond delay="0"/>
+                                  </p:stCondLst>
+                                  <p:childTnLst>
+                                    <p:set>
+                                      <p:cBhvr>
+                                        <p:cTn id="6" dur="1" fill="hold">
+                                          <p:stCondLst>
+                                            <p:cond delay="0"/>
+                                          </p:stCondLst>
+                                        </p:cTn>
+                                        <p:tgtEl>
+                                          <p:spTgt spid="265">
+                                            <p:txEl>
+                                              <p:pRg st="0" end="0"/>
+                                            </p:txEl>
+                                          </p:spTgt>
+                                        </p:tgtEl>
+                                        <p:attrNameLst>
+                                          <p:attrName>style.visibility</p:attrName>
+                                        </p:attrNameLst>
+                                      </p:cBhvr>
+                                      <p:to>
+                                        <p:strVal val="visible"/>
+                                      </p:to>
+                                    </p:set>
+                                    <p:anim calcmode="lin" valueType="num">
+                                      <p:cBhvr additive="base">
+                                        <p:cTn id="7" dur="500" fill="hold"/>
+                                        <p:tgtEl>
+                                          <p:spTgt spid="265">
+                                            <p:txEl>
+                                              <p:pRg st="0" end="0"/>
+                                            </p:txEl>
+                                          </p:spTgt>
+                                        </p:tgtEl>
+                                        <p:attrNameLst>
+                                          <p:attrName>ppt_x</p:attrName>
+                                        </p:attrNameLst>
+                                      </p:cBhvr>
+                                      <p:tavLst>
+                                        <p:tav tm="0">
+                                          <p:val>
+                                            <p:strVal val="#ppt_x"/>
+                                          </p:val>
+                                        </p:tav>
+                                        <p:tav tm="100000">
+                                          <p:val>
+                                            <p:strVal val="#ppt_x"/>
+                                          </p:val>
+                                        </p:tav>
+                                      </p:tavLst>
+                                    </p:anim>
+                                    <p:anim calcmode="lin" valueType="num">
+                                      <p:cBhvr additive="base">
+                                        <p:cTn id="8" dur="500" fill="hold"/>
+                                        <p:tgtEl>
+                                          <p:spTgt spid="265">
+                                            <p:txEl>
+                                              <p:pRg st="0" end="0"/>
+                                            </p:txEl>
+                                          </p:spTgt>
+                                        </p:tgtEl>
+                                        <p:attrNameLst>
+                                          <p:attrName>ppt_y</p:attrName>
+                                        </p:attrNameLst>
+                                      </p:cBhvr>
+                                      <p:tavLst>
+                                        <p:tav tm="0">
+                                          <p:val>
+                                            <p:strVal val="1+#ppt_h/2"/>
+                                          </p:val>
+                                        </p:tav>
+                                        <p:tav tm="100000">
+                                          <p:val>
+                                            <p:strVal val="#ppt_y"/>
+                                          </p:val>
+                                        </p:tav>
+                                      </p:tavLst>
+                                    </p:anim>
+                                  </p:childTnLst>
+                                </p:cTn>
+                              </p:par>
+                            </p:childTnLst>
+                          </p:cTn>
+                        </p:par>
+                      </p:childTnLst>
+                    </p:cTn>
+                  </p:par>
+                  <p:par>
+                    <p:cTn id="9" fill="hold">
+                      <p:stCondLst>
+                        <p:cond delay="indefinite"/>
+                      </p:stCondLst>
+                      <p:childTnLst>
+                        <p:par>
+                          <p:cTn id="10" fill="hold">
+                            <p:stCondLst>
+                              <p:cond delay="0"/>
+                            </p:stCondLst>
+                            <p:childTnLst>
+                              <p:par>
+                                <p:cTn id="11" presetID="2" presetClass="entr" presetSubtype="4" fill="hold" nodeType="clickEffect">
+                                  <p:stCondLst>
+                                    <p:cond delay="0"/>
+                                  </p:stCondLst>
+                                  <p:childTnLst>
+                                    <p:set>
+                                      <p:cBhvr>
+                                        <p:cTn id="12" dur="1" fill="hold">
+                                          <p:stCondLst>
+                                            <p:cond delay="0"/>
+                                          </p:stCondLst>
+                                        </p:cTn>
+                                        <p:tgtEl>
+                                          <p:spTgt spid="265">
+                                            <p:txEl>
+                                              <p:pRg st="2" end="2"/>
+                                            </p:txEl>
+                                          </p:spTgt>
+                                        </p:tgtEl>
+                                        <p:attrNameLst>
+                                          <p:attrName>style.visibility</p:attrName>
+                                        </p:attrNameLst>
+                                      </p:cBhvr>
+                                      <p:to>
+                                        <p:strVal val="visible"/>
+                                      </p:to>
+                                    </p:set>
+                                    <p:anim calcmode="lin" valueType="num">
+                                      <p:cBhvr additive="base">
+                                        <p:cTn id="13" dur="500" fill="hold"/>
+                                        <p:tgtEl>
+                                          <p:spTgt spid="265">
+                                            <p:txEl>
+                                              <p:pRg st="2" end="2"/>
+                                            </p:txEl>
+                                          </p:spTgt>
+                                        </p:tgtEl>
+                                        <p:attrNameLst>
+                                          <p:attrName>ppt_x</p:attrName>
+                                        </p:attrNameLst>
+                                      </p:cBhvr>
+                                      <p:tavLst>
+                                        <p:tav tm="0">
+                                          <p:val>
+                                            <p:strVal val="#ppt_x"/>
+                                          </p:val>
+                                        </p:tav>
+                                        <p:tav tm="100000">
+                                          <p:val>
+                                            <p:strVal val="#ppt_x"/>
+                                          </p:val>
+                                        </p:tav>
+                                      </p:tavLst>
+                                    </p:anim>
+                                    <p:anim calcmode="lin" valueType="num">
+                                      <p:cBhvr additive="base">
+                                        <p:cTn id="14" dur="500" fill="hold"/>
+                                        <p:tgtEl>
+                                          <p:spTgt spid="265">
+                                            <p:txEl>
+                                              <p:pRg st="2" end="2"/>
+                                            </p:txEl>
+                                          </p:spTgt>
+                                        </p:tgtEl>
+                                        <p:attrNameLst>
+                                          <p:attrName>ppt_y</p:attrName>
+                                        </p:attrNameLst>
+                                      </p:cBhvr>
+                                      <p:tavLst>
+                                        <p:tav tm="0">
+                                          <p:val>
+                                            <p:strVal val="1+#ppt_h/2"/>
+                                          </p:val>
+                                        </p:tav>
+                                        <p:tav tm="100000">
+                                          <p:val>
+                                            <p:strVal val="#ppt_y"/>
+                                          </p:val>
+                                        </p:tav>
+                                      </p:tavLst>
+                                    </p:anim>
+                                  </p:childTnLst>
+                                </p:cTn>
+                              </p:par>
+                            </p:childTnLst>
+                          </p:cTn>
+                        </p:par>
+                      </p:childTnLst>
+                    </p:cTn>
+                  </p:par>
+                  <p:par>
+                    <p:cTn id="15" fill="hold">
+                      <p:stCondLst>
+                        <p:cond delay="indefinite"/>
+                      </p:stCondLst>
+                      <p:childTnLst>
+                        <p:par>
+                          <p:cTn id="16" fill="hold">
+                            <p:stCondLst>
+                              <p:cond delay="0"/>
+                            </p:stCondLst>
+                            <p:childTnLst>
+                              <p:par>
+                                <p:cTn id="17" presetID="2" presetClass="entr" presetSubtype="4" fill="hold" nodeType="clickEffect">
+                                  <p:stCondLst>
+                                    <p:cond delay="0"/>
+                                  </p:stCondLst>
+                                  <p:childTnLst>
+                                    <p:set>
+                                      <p:cBhvr>
+                                        <p:cTn id="18" dur="1" fill="hold">
+                                          <p:stCondLst>
+                                            <p:cond delay="0"/>
+                                          </p:stCondLst>
+                                        </p:cTn>
+                                        <p:tgtEl>
+                                          <p:spTgt spid="2"/>
+                                        </p:tgtEl>
+                                        <p:attrNameLst>
+                                          <p:attrName>style.visibility</p:attrName>
+                                        </p:attrNameLst>
+                                      </p:cBhvr>
+                                      <p:to>
+                                        <p:strVal val="visible"/>
+                                      </p:to>
+                                    </p:set>
+                                    <p:anim calcmode="lin" valueType="num">
+                                      <p:cBhvr additive="base">
+                                        <p:cTn id="19" dur="500" fill="hold"/>
+                                        <p:tgtEl>
+                                          <p:spTgt spid="2"/>
+                                        </p:tgtEl>
+                                        <p:attrNameLst>
+                                          <p:attrName>ppt_x</p:attrName>
+                                        </p:attrNameLst>
+                                      </p:cBhvr>
+                                      <p:tavLst>
+                                        <p:tav tm="0">
+                                          <p:val>
+                                            <p:strVal val="#ppt_x"/>
+                                          </p:val>
+                                        </p:tav>
+                                        <p:tav tm="100000">
+                                          <p:val>
+                                            <p:strVal val="#ppt_x"/>
+                                          </p:val>
+                                        </p:tav>
+                                      </p:tavLst>
+                                    </p:anim>
+                                    <p:anim calcmode="lin" valueType="num">
+                                      <p:cBhvr additive="base">
+                                        <p:cTn id="20" dur="500" fill="hold"/>
+                                        <p:tgtEl>
+                                          <p:spTgt spid="2"/>
+                                        </p:tgtEl>
+                                        <p:attrNameLst>
+                                          <p:attrName>ppt_y</p:attrName>
+                                        </p:attrNameLst>
+                                      </p:cBhvr>
+                                      <p:tavLst>
+                                        <p:tav tm="0">
+                                          <p:val>
+                                            <p:strVal val="1+#ppt_h/2"/>
+                                          </p:val>
+                                        </p:tav>
+                                        <p:tav tm="100000">
+                                          <p:val>
+                                            <p:strVal val="#ppt_y"/>
+                                          </p:val>
+                                        </p:tav>
+                                      </p:tavLst>
+                                    </p:anim>
+                                  </p:childTnLst>
+                                </p:cTn>
+                              </p:par>
+                            </p:childTnLst>
+                          </p:cTn>
+                        </p:par>
+                      </p:childTnLst>
+                    </p:cTn>
+                  </p:par>
+                </p:childTnLst>
+              </p:cTn>
+              <p:prevCondLst>
+                <p:cond evt="onPrev" delay="0">
+                  <p:tgtEl>
+                    <p:sldTgt/>
+                  </p:tgtEl>
+                </p:cond>
+              </p:prevCondLst>
+              <p:nextCondLst>
+                <p:cond evt="onNext" delay="0">
+                  <p:tgtEl>
+                    <p:sldTgt/>
+                  </p:tgtEl>
+                </p:cond>
+              </p:nextCondLst>
+            </p:seq>
+          </p:childTnLst>
+        </p:cTn>
+      </p:par>
+    </p:tnLst>
+  </p:timing>
 </p:sld>
 </file>
 
@@ -14409,6 +17284,683 @@
   <p:clrMapOvr>
     <a:masterClrMapping/>
   </p:clrMapOvr>
+  <p:timing>
+    <p:tnLst>
+      <p:par>
+        <p:cTn id="1" dur="indefinite" restart="never" nodeType="tmRoot">
+          <p:childTnLst>
+            <p:seq concurrent="1" nextAc="seek">
+              <p:cTn id="2" dur="indefinite" nodeType="mainSeq">
+                <p:childTnLst>
+                  <p:par>
+                    <p:cTn id="3" fill="hold">
+                      <p:stCondLst>
+                        <p:cond delay="indefinite"/>
+                      </p:stCondLst>
+                      <p:childTnLst>
+                        <p:par>
+                          <p:cTn id="4" fill="hold">
+                            <p:stCondLst>
+                              <p:cond delay="0"/>
+                            </p:stCondLst>
+                            <p:childTnLst>
+                              <p:par>
+                                <p:cTn id="5" presetID="2" presetClass="entr" presetSubtype="4" fill="hold" grpId="0" nodeType="clickEffect">
+                                  <p:stCondLst>
+                                    <p:cond delay="0"/>
+                                  </p:stCondLst>
+                                  <p:childTnLst>
+                                    <p:set>
+                                      <p:cBhvr>
+                                        <p:cTn id="6" dur="1" fill="hold">
+                                          <p:stCondLst>
+                                            <p:cond delay="0"/>
+                                          </p:stCondLst>
+                                        </p:cTn>
+                                        <p:tgtEl>
+                                          <p:spTgt spid="11"/>
+                                        </p:tgtEl>
+                                        <p:attrNameLst>
+                                          <p:attrName>style.visibility</p:attrName>
+                                        </p:attrNameLst>
+                                      </p:cBhvr>
+                                      <p:to>
+                                        <p:strVal val="visible"/>
+                                      </p:to>
+                                    </p:set>
+                                    <p:anim calcmode="lin" valueType="num">
+                                      <p:cBhvr additive="base">
+                                        <p:cTn id="7" dur="500" fill="hold"/>
+                                        <p:tgtEl>
+                                          <p:spTgt spid="11"/>
+                                        </p:tgtEl>
+                                        <p:attrNameLst>
+                                          <p:attrName>ppt_x</p:attrName>
+                                        </p:attrNameLst>
+                                      </p:cBhvr>
+                                      <p:tavLst>
+                                        <p:tav tm="0">
+                                          <p:val>
+                                            <p:strVal val="#ppt_x"/>
+                                          </p:val>
+                                        </p:tav>
+                                        <p:tav tm="100000">
+                                          <p:val>
+                                            <p:strVal val="#ppt_x"/>
+                                          </p:val>
+                                        </p:tav>
+                                      </p:tavLst>
+                                    </p:anim>
+                                    <p:anim calcmode="lin" valueType="num">
+                                      <p:cBhvr additive="base">
+                                        <p:cTn id="8" dur="500" fill="hold"/>
+                                        <p:tgtEl>
+                                          <p:spTgt spid="11"/>
+                                        </p:tgtEl>
+                                        <p:attrNameLst>
+                                          <p:attrName>ppt_y</p:attrName>
+                                        </p:attrNameLst>
+                                      </p:cBhvr>
+                                      <p:tavLst>
+                                        <p:tav tm="0">
+                                          <p:val>
+                                            <p:strVal val="1+#ppt_h/2"/>
+                                          </p:val>
+                                        </p:tav>
+                                        <p:tav tm="100000">
+                                          <p:val>
+                                            <p:strVal val="#ppt_y"/>
+                                          </p:val>
+                                        </p:tav>
+                                      </p:tavLst>
+                                    </p:anim>
+                                  </p:childTnLst>
+                                </p:cTn>
+                              </p:par>
+                              <p:par>
+                                <p:cTn id="9" presetID="2" presetClass="entr" presetSubtype="4" fill="hold" grpId="0" nodeType="withEffect">
+                                  <p:stCondLst>
+                                    <p:cond delay="0"/>
+                                  </p:stCondLst>
+                                  <p:childTnLst>
+                                    <p:set>
+                                      <p:cBhvr>
+                                        <p:cTn id="10" dur="1" fill="hold">
+                                          <p:stCondLst>
+                                            <p:cond delay="0"/>
+                                          </p:stCondLst>
+                                        </p:cTn>
+                                        <p:tgtEl>
+                                          <p:spTgt spid="19"/>
+                                        </p:tgtEl>
+                                        <p:attrNameLst>
+                                          <p:attrName>style.visibility</p:attrName>
+                                        </p:attrNameLst>
+                                      </p:cBhvr>
+                                      <p:to>
+                                        <p:strVal val="visible"/>
+                                      </p:to>
+                                    </p:set>
+                                    <p:anim calcmode="lin" valueType="num">
+                                      <p:cBhvr additive="base">
+                                        <p:cTn id="11" dur="500" fill="hold"/>
+                                        <p:tgtEl>
+                                          <p:spTgt spid="19"/>
+                                        </p:tgtEl>
+                                        <p:attrNameLst>
+                                          <p:attrName>ppt_x</p:attrName>
+                                        </p:attrNameLst>
+                                      </p:cBhvr>
+                                      <p:tavLst>
+                                        <p:tav tm="0">
+                                          <p:val>
+                                            <p:strVal val="#ppt_x"/>
+                                          </p:val>
+                                        </p:tav>
+                                        <p:tav tm="100000">
+                                          <p:val>
+                                            <p:strVal val="#ppt_x"/>
+                                          </p:val>
+                                        </p:tav>
+                                      </p:tavLst>
+                                    </p:anim>
+                                    <p:anim calcmode="lin" valueType="num">
+                                      <p:cBhvr additive="base">
+                                        <p:cTn id="12" dur="500" fill="hold"/>
+                                        <p:tgtEl>
+                                          <p:spTgt spid="19"/>
+                                        </p:tgtEl>
+                                        <p:attrNameLst>
+                                          <p:attrName>ppt_y</p:attrName>
+                                        </p:attrNameLst>
+                                      </p:cBhvr>
+                                      <p:tavLst>
+                                        <p:tav tm="0">
+                                          <p:val>
+                                            <p:strVal val="1+#ppt_h/2"/>
+                                          </p:val>
+                                        </p:tav>
+                                        <p:tav tm="100000">
+                                          <p:val>
+                                            <p:strVal val="#ppt_y"/>
+                                          </p:val>
+                                        </p:tav>
+                                      </p:tavLst>
+                                    </p:anim>
+                                  </p:childTnLst>
+                                </p:cTn>
+                              </p:par>
+                            </p:childTnLst>
+                          </p:cTn>
+                        </p:par>
+                      </p:childTnLst>
+                    </p:cTn>
+                  </p:par>
+                  <p:par>
+                    <p:cTn id="13" fill="hold">
+                      <p:stCondLst>
+                        <p:cond delay="indefinite"/>
+                      </p:stCondLst>
+                      <p:childTnLst>
+                        <p:par>
+                          <p:cTn id="14" fill="hold">
+                            <p:stCondLst>
+                              <p:cond delay="0"/>
+                            </p:stCondLst>
+                            <p:childTnLst>
+                              <p:par>
+                                <p:cTn id="15" presetID="2" presetClass="entr" presetSubtype="4" fill="hold" grpId="0" nodeType="clickEffect">
+                                  <p:stCondLst>
+                                    <p:cond delay="0"/>
+                                  </p:stCondLst>
+                                  <p:childTnLst>
+                                    <p:set>
+                                      <p:cBhvr>
+                                        <p:cTn id="16" dur="1" fill="hold">
+                                          <p:stCondLst>
+                                            <p:cond delay="0"/>
+                                          </p:stCondLst>
+                                        </p:cTn>
+                                        <p:tgtEl>
+                                          <p:spTgt spid="17"/>
+                                        </p:tgtEl>
+                                        <p:attrNameLst>
+                                          <p:attrName>style.visibility</p:attrName>
+                                        </p:attrNameLst>
+                                      </p:cBhvr>
+                                      <p:to>
+                                        <p:strVal val="visible"/>
+                                      </p:to>
+                                    </p:set>
+                                    <p:anim calcmode="lin" valueType="num">
+                                      <p:cBhvr additive="base">
+                                        <p:cTn id="17" dur="500" fill="hold"/>
+                                        <p:tgtEl>
+                                          <p:spTgt spid="17"/>
+                                        </p:tgtEl>
+                                        <p:attrNameLst>
+                                          <p:attrName>ppt_x</p:attrName>
+                                        </p:attrNameLst>
+                                      </p:cBhvr>
+                                      <p:tavLst>
+                                        <p:tav tm="0">
+                                          <p:val>
+                                            <p:strVal val="#ppt_x"/>
+                                          </p:val>
+                                        </p:tav>
+                                        <p:tav tm="100000">
+                                          <p:val>
+                                            <p:strVal val="#ppt_x"/>
+                                          </p:val>
+                                        </p:tav>
+                                      </p:tavLst>
+                                    </p:anim>
+                                    <p:anim calcmode="lin" valueType="num">
+                                      <p:cBhvr additive="base">
+                                        <p:cTn id="18" dur="500" fill="hold"/>
+                                        <p:tgtEl>
+                                          <p:spTgt spid="17"/>
+                                        </p:tgtEl>
+                                        <p:attrNameLst>
+                                          <p:attrName>ppt_y</p:attrName>
+                                        </p:attrNameLst>
+                                      </p:cBhvr>
+                                      <p:tavLst>
+                                        <p:tav tm="0">
+                                          <p:val>
+                                            <p:strVal val="1+#ppt_h/2"/>
+                                          </p:val>
+                                        </p:tav>
+                                        <p:tav tm="100000">
+                                          <p:val>
+                                            <p:strVal val="#ppt_y"/>
+                                          </p:val>
+                                        </p:tav>
+                                      </p:tavLst>
+                                    </p:anim>
+                                  </p:childTnLst>
+                                </p:cTn>
+                              </p:par>
+                              <p:par>
+                                <p:cTn id="19" presetID="2" presetClass="entr" presetSubtype="4" fill="hold" grpId="0" nodeType="withEffect">
+                                  <p:stCondLst>
+                                    <p:cond delay="0"/>
+                                  </p:stCondLst>
+                                  <p:childTnLst>
+                                    <p:set>
+                                      <p:cBhvr>
+                                        <p:cTn id="20" dur="1" fill="hold">
+                                          <p:stCondLst>
+                                            <p:cond delay="0"/>
+                                          </p:stCondLst>
+                                        </p:cTn>
+                                        <p:tgtEl>
+                                          <p:spTgt spid="22"/>
+                                        </p:tgtEl>
+                                        <p:attrNameLst>
+                                          <p:attrName>style.visibility</p:attrName>
+                                        </p:attrNameLst>
+                                      </p:cBhvr>
+                                      <p:to>
+                                        <p:strVal val="visible"/>
+                                      </p:to>
+                                    </p:set>
+                                    <p:anim calcmode="lin" valueType="num">
+                                      <p:cBhvr additive="base">
+                                        <p:cTn id="21" dur="500" fill="hold"/>
+                                        <p:tgtEl>
+                                          <p:spTgt spid="22"/>
+                                        </p:tgtEl>
+                                        <p:attrNameLst>
+                                          <p:attrName>ppt_x</p:attrName>
+                                        </p:attrNameLst>
+                                      </p:cBhvr>
+                                      <p:tavLst>
+                                        <p:tav tm="0">
+                                          <p:val>
+                                            <p:strVal val="#ppt_x"/>
+                                          </p:val>
+                                        </p:tav>
+                                        <p:tav tm="100000">
+                                          <p:val>
+                                            <p:strVal val="#ppt_x"/>
+                                          </p:val>
+                                        </p:tav>
+                                      </p:tavLst>
+                                    </p:anim>
+                                    <p:anim calcmode="lin" valueType="num">
+                                      <p:cBhvr additive="base">
+                                        <p:cTn id="22" dur="500" fill="hold"/>
+                                        <p:tgtEl>
+                                          <p:spTgt spid="22"/>
+                                        </p:tgtEl>
+                                        <p:attrNameLst>
+                                          <p:attrName>ppt_y</p:attrName>
+                                        </p:attrNameLst>
+                                      </p:cBhvr>
+                                      <p:tavLst>
+                                        <p:tav tm="0">
+                                          <p:val>
+                                            <p:strVal val="1+#ppt_h/2"/>
+                                          </p:val>
+                                        </p:tav>
+                                        <p:tav tm="100000">
+                                          <p:val>
+                                            <p:strVal val="#ppt_y"/>
+                                          </p:val>
+                                        </p:tav>
+                                      </p:tavLst>
+                                    </p:anim>
+                                  </p:childTnLst>
+                                </p:cTn>
+                              </p:par>
+                            </p:childTnLst>
+                          </p:cTn>
+                        </p:par>
+                      </p:childTnLst>
+                    </p:cTn>
+                  </p:par>
+                  <p:par>
+                    <p:cTn id="23" fill="hold">
+                      <p:stCondLst>
+                        <p:cond delay="indefinite"/>
+                      </p:stCondLst>
+                      <p:childTnLst>
+                        <p:par>
+                          <p:cTn id="24" fill="hold">
+                            <p:stCondLst>
+                              <p:cond delay="0"/>
+                            </p:stCondLst>
+                            <p:childTnLst>
+                              <p:par>
+                                <p:cTn id="25" presetID="2" presetClass="entr" presetSubtype="4" fill="hold" grpId="0" nodeType="clickEffect">
+                                  <p:stCondLst>
+                                    <p:cond delay="0"/>
+                                  </p:stCondLst>
+                                  <p:childTnLst>
+                                    <p:set>
+                                      <p:cBhvr>
+                                        <p:cTn id="26" dur="1" fill="hold">
+                                          <p:stCondLst>
+                                            <p:cond delay="0"/>
+                                          </p:stCondLst>
+                                        </p:cTn>
+                                        <p:tgtEl>
+                                          <p:spTgt spid="8"/>
+                                        </p:tgtEl>
+                                        <p:attrNameLst>
+                                          <p:attrName>style.visibility</p:attrName>
+                                        </p:attrNameLst>
+                                      </p:cBhvr>
+                                      <p:to>
+                                        <p:strVal val="visible"/>
+                                      </p:to>
+                                    </p:set>
+                                    <p:anim calcmode="lin" valueType="num">
+                                      <p:cBhvr additive="base">
+                                        <p:cTn id="27" dur="500" fill="hold"/>
+                                        <p:tgtEl>
+                                          <p:spTgt spid="8"/>
+                                        </p:tgtEl>
+                                        <p:attrNameLst>
+                                          <p:attrName>ppt_x</p:attrName>
+                                        </p:attrNameLst>
+                                      </p:cBhvr>
+                                      <p:tavLst>
+                                        <p:tav tm="0">
+                                          <p:val>
+                                            <p:strVal val="#ppt_x"/>
+                                          </p:val>
+                                        </p:tav>
+                                        <p:tav tm="100000">
+                                          <p:val>
+                                            <p:strVal val="#ppt_x"/>
+                                          </p:val>
+                                        </p:tav>
+                                      </p:tavLst>
+                                    </p:anim>
+                                    <p:anim calcmode="lin" valueType="num">
+                                      <p:cBhvr additive="base">
+                                        <p:cTn id="28" dur="500" fill="hold"/>
+                                        <p:tgtEl>
+                                          <p:spTgt spid="8"/>
+                                        </p:tgtEl>
+                                        <p:attrNameLst>
+                                          <p:attrName>ppt_y</p:attrName>
+                                        </p:attrNameLst>
+                                      </p:cBhvr>
+                                      <p:tavLst>
+                                        <p:tav tm="0">
+                                          <p:val>
+                                            <p:strVal val="1+#ppt_h/2"/>
+                                          </p:val>
+                                        </p:tav>
+                                        <p:tav tm="100000">
+                                          <p:val>
+                                            <p:strVal val="#ppt_y"/>
+                                          </p:val>
+                                        </p:tav>
+                                      </p:tavLst>
+                                    </p:anim>
+                                  </p:childTnLst>
+                                </p:cTn>
+                              </p:par>
+                              <p:par>
+                                <p:cTn id="29" presetID="2" presetClass="entr" presetSubtype="4" fill="hold" grpId="0" nodeType="withEffect">
+                                  <p:stCondLst>
+                                    <p:cond delay="0"/>
+                                  </p:stCondLst>
+                                  <p:childTnLst>
+                                    <p:set>
+                                      <p:cBhvr>
+                                        <p:cTn id="30" dur="1" fill="hold">
+                                          <p:stCondLst>
+                                            <p:cond delay="0"/>
+                                          </p:stCondLst>
+                                        </p:cTn>
+                                        <p:tgtEl>
+                                          <p:spTgt spid="3"/>
+                                        </p:tgtEl>
+                                        <p:attrNameLst>
+                                          <p:attrName>style.visibility</p:attrName>
+                                        </p:attrNameLst>
+                                      </p:cBhvr>
+                                      <p:to>
+                                        <p:strVal val="visible"/>
+                                      </p:to>
+                                    </p:set>
+                                    <p:anim calcmode="lin" valueType="num">
+                                      <p:cBhvr additive="base">
+                                        <p:cTn id="31" dur="500" fill="hold"/>
+                                        <p:tgtEl>
+                                          <p:spTgt spid="3"/>
+                                        </p:tgtEl>
+                                        <p:attrNameLst>
+                                          <p:attrName>ppt_x</p:attrName>
+                                        </p:attrNameLst>
+                                      </p:cBhvr>
+                                      <p:tavLst>
+                                        <p:tav tm="0">
+                                          <p:val>
+                                            <p:strVal val="#ppt_x"/>
+                                          </p:val>
+                                        </p:tav>
+                                        <p:tav tm="100000">
+                                          <p:val>
+                                            <p:strVal val="#ppt_x"/>
+                                          </p:val>
+                                        </p:tav>
+                                      </p:tavLst>
+                                    </p:anim>
+                                    <p:anim calcmode="lin" valueType="num">
+                                      <p:cBhvr additive="base">
+                                        <p:cTn id="32" dur="500" fill="hold"/>
+                                        <p:tgtEl>
+                                          <p:spTgt spid="3"/>
+                                        </p:tgtEl>
+                                        <p:attrNameLst>
+                                          <p:attrName>ppt_y</p:attrName>
+                                        </p:attrNameLst>
+                                      </p:cBhvr>
+                                      <p:tavLst>
+                                        <p:tav tm="0">
+                                          <p:val>
+                                            <p:strVal val="1+#ppt_h/2"/>
+                                          </p:val>
+                                        </p:tav>
+                                        <p:tav tm="100000">
+                                          <p:val>
+                                            <p:strVal val="#ppt_y"/>
+                                          </p:val>
+                                        </p:tav>
+                                      </p:tavLst>
+                                    </p:anim>
+                                  </p:childTnLst>
+                                </p:cTn>
+                              </p:par>
+                              <p:par>
+                                <p:cTn id="33" presetID="2" presetClass="entr" presetSubtype="4" fill="hold" grpId="0" nodeType="withEffect">
+                                  <p:stCondLst>
+                                    <p:cond delay="0"/>
+                                  </p:stCondLst>
+                                  <p:childTnLst>
+                                    <p:set>
+                                      <p:cBhvr>
+                                        <p:cTn id="34" dur="1" fill="hold">
+                                          <p:stCondLst>
+                                            <p:cond delay="0"/>
+                                          </p:stCondLst>
+                                        </p:cTn>
+                                        <p:tgtEl>
+                                          <p:spTgt spid="14"/>
+                                        </p:tgtEl>
+                                        <p:attrNameLst>
+                                          <p:attrName>style.visibility</p:attrName>
+                                        </p:attrNameLst>
+                                      </p:cBhvr>
+                                      <p:to>
+                                        <p:strVal val="visible"/>
+                                      </p:to>
+                                    </p:set>
+                                    <p:anim calcmode="lin" valueType="num">
+                                      <p:cBhvr additive="base">
+                                        <p:cTn id="35" dur="500" fill="hold"/>
+                                        <p:tgtEl>
+                                          <p:spTgt spid="14"/>
+                                        </p:tgtEl>
+                                        <p:attrNameLst>
+                                          <p:attrName>ppt_x</p:attrName>
+                                        </p:attrNameLst>
+                                      </p:cBhvr>
+                                      <p:tavLst>
+                                        <p:tav tm="0">
+                                          <p:val>
+                                            <p:strVal val="#ppt_x"/>
+                                          </p:val>
+                                        </p:tav>
+                                        <p:tav tm="100000">
+                                          <p:val>
+                                            <p:strVal val="#ppt_x"/>
+                                          </p:val>
+                                        </p:tav>
+                                      </p:tavLst>
+                                    </p:anim>
+                                    <p:anim calcmode="lin" valueType="num">
+                                      <p:cBhvr additive="base">
+                                        <p:cTn id="36" dur="500" fill="hold"/>
+                                        <p:tgtEl>
+                                          <p:spTgt spid="14"/>
+                                        </p:tgtEl>
+                                        <p:attrNameLst>
+                                          <p:attrName>ppt_y</p:attrName>
+                                        </p:attrNameLst>
+                                      </p:cBhvr>
+                                      <p:tavLst>
+                                        <p:tav tm="0">
+                                          <p:val>
+                                            <p:strVal val="1+#ppt_h/2"/>
+                                          </p:val>
+                                        </p:tav>
+                                        <p:tav tm="100000">
+                                          <p:val>
+                                            <p:strVal val="#ppt_y"/>
+                                          </p:val>
+                                        </p:tav>
+                                      </p:tavLst>
+                                    </p:anim>
+                                  </p:childTnLst>
+                                </p:cTn>
+                              </p:par>
+                              <p:par>
+                                <p:cTn id="37" presetID="2" presetClass="entr" presetSubtype="4" fill="hold" nodeType="withEffect">
+                                  <p:stCondLst>
+                                    <p:cond delay="0"/>
+                                  </p:stCondLst>
+                                  <p:childTnLst>
+                                    <p:set>
+                                      <p:cBhvr>
+                                        <p:cTn id="38" dur="1" fill="hold">
+                                          <p:stCondLst>
+                                            <p:cond delay="0"/>
+                                          </p:stCondLst>
+                                        </p:cTn>
+                                        <p:tgtEl>
+                                          <p:spTgt spid="16"/>
+                                        </p:tgtEl>
+                                        <p:attrNameLst>
+                                          <p:attrName>style.visibility</p:attrName>
+                                        </p:attrNameLst>
+                                      </p:cBhvr>
+                                      <p:to>
+                                        <p:strVal val="visible"/>
+                                      </p:to>
+                                    </p:set>
+                                    <p:anim calcmode="lin" valueType="num">
+                                      <p:cBhvr additive="base">
+                                        <p:cTn id="39" dur="500" fill="hold"/>
+                                        <p:tgtEl>
+                                          <p:spTgt spid="16"/>
+                                        </p:tgtEl>
+                                        <p:attrNameLst>
+                                          <p:attrName>ppt_x</p:attrName>
+                                        </p:attrNameLst>
+                                      </p:cBhvr>
+                                      <p:tavLst>
+                                        <p:tav tm="0">
+                                          <p:val>
+                                            <p:strVal val="#ppt_x"/>
+                                          </p:val>
+                                        </p:tav>
+                                        <p:tav tm="100000">
+                                          <p:val>
+                                            <p:strVal val="#ppt_x"/>
+                                          </p:val>
+                                        </p:tav>
+                                      </p:tavLst>
+                                    </p:anim>
+                                    <p:anim calcmode="lin" valueType="num">
+                                      <p:cBhvr additive="base">
+                                        <p:cTn id="40" dur="500" fill="hold"/>
+                                        <p:tgtEl>
+                                          <p:spTgt spid="16"/>
+                                        </p:tgtEl>
+                                        <p:attrNameLst>
+                                          <p:attrName>ppt_y</p:attrName>
+                                        </p:attrNameLst>
+                                      </p:cBhvr>
+                                      <p:tavLst>
+                                        <p:tav tm="0">
+                                          <p:val>
+                                            <p:strVal val="1+#ppt_h/2"/>
+                                          </p:val>
+                                        </p:tav>
+                                        <p:tav tm="100000">
+                                          <p:val>
+                                            <p:strVal val="#ppt_y"/>
+                                          </p:val>
+                                        </p:tav>
+                                      </p:tavLst>
+                                    </p:anim>
+                                  </p:childTnLst>
+                                </p:cTn>
+                              </p:par>
+                            </p:childTnLst>
+                          </p:cTn>
+                        </p:par>
+                      </p:childTnLst>
+                    </p:cTn>
+                  </p:par>
+                </p:childTnLst>
+              </p:cTn>
+              <p:prevCondLst>
+                <p:cond evt="onPrev" delay="0">
+                  <p:tgtEl>
+                    <p:sldTgt/>
+                  </p:tgtEl>
+                </p:cond>
+              </p:prevCondLst>
+              <p:nextCondLst>
+                <p:cond evt="onNext" delay="0">
+                  <p:tgtEl>
+                    <p:sldTgt/>
+                  </p:tgtEl>
+                </p:cond>
+              </p:nextCondLst>
+            </p:seq>
+          </p:childTnLst>
+        </p:cTn>
+      </p:par>
+    </p:tnLst>
+    <p:bldLst>
+      <p:bldP spid="11" grpId="0" animBg="1"/>
+      <p:bldP spid="8" grpId="0" animBg="1"/>
+      <p:bldP spid="14" grpId="0" animBg="1"/>
+      <p:bldP spid="17" grpId="0" animBg="1"/>
+      <p:bldP spid="3" grpId="0" animBg="1"/>
+      <p:bldP spid="19" grpId="0" animBg="1"/>
+      <p:bldP spid="22" grpId="0" animBg="1"/>
+    </p:bldLst>
+  </p:timing>
 </p:sld>
 </file>
 
@@ -14564,6 +18116,92 @@
   <p:clrMapOvr>
     <a:masterClrMapping/>
   </p:clrMapOvr>
+  <p:timing>
+    <p:tnLst>
+      <p:par>
+        <p:cTn id="1" dur="indefinite" restart="never" nodeType="tmRoot">
+          <p:childTnLst>
+            <p:seq concurrent="1" nextAc="seek">
+              <p:cTn id="2" dur="indefinite" nodeType="mainSeq">
+                <p:childTnLst>
+                  <p:par>
+                    <p:cTn id="3" fill="hold">
+                      <p:stCondLst>
+                        <p:cond delay="indefinite"/>
+                      </p:stCondLst>
+                      <p:childTnLst>
+                        <p:par>
+                          <p:cTn id="4" fill="hold">
+                            <p:stCondLst>
+                              <p:cond delay="0"/>
+                            </p:stCondLst>
+                            <p:childTnLst>
+                              <p:par>
+                                <p:cTn id="5" presetID="9" presetClass="entr" presetSubtype="0" fill="hold" grpId="0" nodeType="clickEffect">
+                                  <p:stCondLst>
+                                    <p:cond delay="0"/>
+                                  </p:stCondLst>
+                                  <p:childTnLst>
+                                    <p:set>
+                                      <p:cBhvr>
+                                        <p:cTn id="6" dur="1" fill="hold">
+                                          <p:stCondLst>
+                                            <p:cond delay="0"/>
+                                          </p:stCondLst>
+                                        </p:cTn>
+                                        <p:tgtEl>
+                                          <p:spTgt spid="4"/>
+                                        </p:tgtEl>
+                                        <p:attrNameLst>
+                                          <p:attrName>style.visibility</p:attrName>
+                                        </p:attrNameLst>
+                                      </p:cBhvr>
+                                      <p:to>
+                                        <p:strVal val="visible"/>
+                                      </p:to>
+                                    </p:set>
+                                    <p:animEffect transition="in" filter="dissolve">
+                                      <p:cBhvr>
+                                        <p:cTn id="7" dur="500"/>
+                                        <p:tgtEl>
+                                          <p:spTgt spid="4"/>
+                                        </p:tgtEl>
+                                      </p:cBhvr>
+                                    </p:animEffect>
+                                  </p:childTnLst>
+                                </p:cTn>
+                              </p:par>
+                            </p:childTnLst>
+                          </p:cTn>
+                        </p:par>
+                      </p:childTnLst>
+                    </p:cTn>
+                  </p:par>
+                </p:childTnLst>
+              </p:cTn>
+              <p:prevCondLst>
+                <p:cond evt="onPrev" delay="0">
+                  <p:tgtEl>
+                    <p:sldTgt/>
+                  </p:tgtEl>
+                </p:cond>
+              </p:prevCondLst>
+              <p:nextCondLst>
+                <p:cond evt="onNext" delay="0">
+                  <p:tgtEl>
+                    <p:sldTgt/>
+                  </p:tgtEl>
+                </p:cond>
+              </p:nextCondLst>
+            </p:seq>
+          </p:childTnLst>
+        </p:cTn>
+      </p:par>
+    </p:tnLst>
+    <p:bldLst>
+      <p:bldP spid="4" grpId="0" animBg="1"/>
+    </p:bldLst>
+  </p:timing>
 </p:sld>
 </file>
 
@@ -14984,8 +18622,8 @@
         </p:nvSpPr>
         <p:spPr>
           <a:xfrm>
-            <a:off x="5723144" y="3721894"/>
-            <a:ext cx="4030456" cy="1231106"/>
+            <a:off x="5715000" y="3429000"/>
+            <a:ext cx="4038600" cy="1524000"/>
           </a:xfrm>
           <a:prstGeom prst="rect">
             <a:avLst/>
@@ -14996,7 +18634,7 @@
           </a:ln>
           <a:extLst>
             <a:ext uri="{C572A759-6A51-4108-AA02-DFA0A04FC94B}">
-              <ma14:wrappingTextBoxFlag xmlns:ma14="http://schemas.microsoft.com/office/mac/drawingml/2011/main" xmlns="" val="1"/>
+              <ma14:wrappingTextBoxFlag xmlns="" xmlns:ma14="http://schemas.microsoft.com/office/mac/drawingml/2011/main" val="1"/>
             </a:ext>
           </a:extLst>
         </p:spPr>
@@ -15178,6 +18816,1295 @@
   <p:clrMapOvr>
     <a:masterClrMapping/>
   </p:clrMapOvr>
+  <p:timing>
+    <p:tnLst>
+      <p:par>
+        <p:cTn id="1" dur="indefinite" restart="never" nodeType="tmRoot">
+          <p:childTnLst>
+            <p:seq concurrent="1" nextAc="seek">
+              <p:cTn id="2" dur="indefinite" nodeType="mainSeq">
+                <p:childTnLst>
+                  <p:par>
+                    <p:cTn id="3" fill="hold">
+                      <p:stCondLst>
+                        <p:cond delay="indefinite"/>
+                      </p:stCondLst>
+                      <p:childTnLst>
+                        <p:par>
+                          <p:cTn id="4" fill="hold">
+                            <p:stCondLst>
+                              <p:cond delay="0"/>
+                            </p:stCondLst>
+                            <p:childTnLst>
+                              <p:par>
+                                <p:cTn id="5" presetID="2" presetClass="entr" presetSubtype="4" fill="hold" nodeType="clickEffect">
+                                  <p:stCondLst>
+                                    <p:cond delay="0"/>
+                                  </p:stCondLst>
+                                  <p:childTnLst>
+                                    <p:set>
+                                      <p:cBhvr>
+                                        <p:cTn id="6" dur="1" fill="hold">
+                                          <p:stCondLst>
+                                            <p:cond delay="0"/>
+                                          </p:stCondLst>
+                                        </p:cTn>
+                                        <p:tgtEl>
+                                          <p:spTgt spid="116">
+                                            <p:txEl>
+                                              <p:pRg st="2" end="2"/>
+                                            </p:txEl>
+                                          </p:spTgt>
+                                        </p:tgtEl>
+                                        <p:attrNameLst>
+                                          <p:attrName>style.visibility</p:attrName>
+                                        </p:attrNameLst>
+                                      </p:cBhvr>
+                                      <p:to>
+                                        <p:strVal val="visible"/>
+                                      </p:to>
+                                    </p:set>
+                                    <p:anim calcmode="lin" valueType="num">
+                                      <p:cBhvr additive="base">
+                                        <p:cTn id="7" dur="500" fill="hold"/>
+                                        <p:tgtEl>
+                                          <p:spTgt spid="116">
+                                            <p:txEl>
+                                              <p:pRg st="2" end="2"/>
+                                            </p:txEl>
+                                          </p:spTgt>
+                                        </p:tgtEl>
+                                        <p:attrNameLst>
+                                          <p:attrName>ppt_x</p:attrName>
+                                        </p:attrNameLst>
+                                      </p:cBhvr>
+                                      <p:tavLst>
+                                        <p:tav tm="0">
+                                          <p:val>
+                                            <p:strVal val="#ppt_x"/>
+                                          </p:val>
+                                        </p:tav>
+                                        <p:tav tm="100000">
+                                          <p:val>
+                                            <p:strVal val="#ppt_x"/>
+                                          </p:val>
+                                        </p:tav>
+                                      </p:tavLst>
+                                    </p:anim>
+                                    <p:anim calcmode="lin" valueType="num">
+                                      <p:cBhvr additive="base">
+                                        <p:cTn id="8" dur="500" fill="hold"/>
+                                        <p:tgtEl>
+                                          <p:spTgt spid="116">
+                                            <p:txEl>
+                                              <p:pRg st="2" end="2"/>
+                                            </p:txEl>
+                                          </p:spTgt>
+                                        </p:tgtEl>
+                                        <p:attrNameLst>
+                                          <p:attrName>ppt_y</p:attrName>
+                                        </p:attrNameLst>
+                                      </p:cBhvr>
+                                      <p:tavLst>
+                                        <p:tav tm="0">
+                                          <p:val>
+                                            <p:strVal val="1+#ppt_h/2"/>
+                                          </p:val>
+                                        </p:tav>
+                                        <p:tav tm="100000">
+                                          <p:val>
+                                            <p:strVal val="#ppt_y"/>
+                                          </p:val>
+                                        </p:tav>
+                                      </p:tavLst>
+                                    </p:anim>
+                                  </p:childTnLst>
+                                </p:cTn>
+                              </p:par>
+                            </p:childTnLst>
+                          </p:cTn>
+                        </p:par>
+                      </p:childTnLst>
+                    </p:cTn>
+                  </p:par>
+                  <p:par>
+                    <p:cTn id="9" fill="hold">
+                      <p:stCondLst>
+                        <p:cond delay="indefinite"/>
+                      </p:stCondLst>
+                      <p:childTnLst>
+                        <p:par>
+                          <p:cTn id="10" fill="hold">
+                            <p:stCondLst>
+                              <p:cond delay="0"/>
+                            </p:stCondLst>
+                            <p:childTnLst>
+                              <p:par>
+                                <p:cTn id="11" presetID="2" presetClass="entr" presetSubtype="4" fill="hold" nodeType="clickEffect">
+                                  <p:stCondLst>
+                                    <p:cond delay="0"/>
+                                  </p:stCondLst>
+                                  <p:childTnLst>
+                                    <p:set>
+                                      <p:cBhvr>
+                                        <p:cTn id="12" dur="1" fill="hold">
+                                          <p:stCondLst>
+                                            <p:cond delay="0"/>
+                                          </p:stCondLst>
+                                        </p:cTn>
+                                        <p:tgtEl>
+                                          <p:spTgt spid="116">
+                                            <p:txEl>
+                                              <p:pRg st="4" end="4"/>
+                                            </p:txEl>
+                                          </p:spTgt>
+                                        </p:tgtEl>
+                                        <p:attrNameLst>
+                                          <p:attrName>style.visibility</p:attrName>
+                                        </p:attrNameLst>
+                                      </p:cBhvr>
+                                      <p:to>
+                                        <p:strVal val="visible"/>
+                                      </p:to>
+                                    </p:set>
+                                    <p:anim calcmode="lin" valueType="num">
+                                      <p:cBhvr additive="base">
+                                        <p:cTn id="13" dur="500" fill="hold"/>
+                                        <p:tgtEl>
+                                          <p:spTgt spid="116">
+                                            <p:txEl>
+                                              <p:pRg st="4" end="4"/>
+                                            </p:txEl>
+                                          </p:spTgt>
+                                        </p:tgtEl>
+                                        <p:attrNameLst>
+                                          <p:attrName>ppt_x</p:attrName>
+                                        </p:attrNameLst>
+                                      </p:cBhvr>
+                                      <p:tavLst>
+                                        <p:tav tm="0">
+                                          <p:val>
+                                            <p:strVal val="#ppt_x"/>
+                                          </p:val>
+                                        </p:tav>
+                                        <p:tav tm="100000">
+                                          <p:val>
+                                            <p:strVal val="#ppt_x"/>
+                                          </p:val>
+                                        </p:tav>
+                                      </p:tavLst>
+                                    </p:anim>
+                                    <p:anim calcmode="lin" valueType="num">
+                                      <p:cBhvr additive="base">
+                                        <p:cTn id="14" dur="500" fill="hold"/>
+                                        <p:tgtEl>
+                                          <p:spTgt spid="116">
+                                            <p:txEl>
+                                              <p:pRg st="4" end="4"/>
+                                            </p:txEl>
+                                          </p:spTgt>
+                                        </p:tgtEl>
+                                        <p:attrNameLst>
+                                          <p:attrName>ppt_y</p:attrName>
+                                        </p:attrNameLst>
+                                      </p:cBhvr>
+                                      <p:tavLst>
+                                        <p:tav tm="0">
+                                          <p:val>
+                                            <p:strVal val="1+#ppt_h/2"/>
+                                          </p:val>
+                                        </p:tav>
+                                        <p:tav tm="100000">
+                                          <p:val>
+                                            <p:strVal val="#ppt_y"/>
+                                          </p:val>
+                                        </p:tav>
+                                      </p:tavLst>
+                                    </p:anim>
+                                  </p:childTnLst>
+                                </p:cTn>
+                              </p:par>
+                              <p:par>
+                                <p:cTn id="15" presetID="2" presetClass="entr" presetSubtype="4" fill="hold" nodeType="withEffect">
+                                  <p:stCondLst>
+                                    <p:cond delay="0"/>
+                                  </p:stCondLst>
+                                  <p:childTnLst>
+                                    <p:set>
+                                      <p:cBhvr>
+                                        <p:cTn id="16" dur="1" fill="hold">
+                                          <p:stCondLst>
+                                            <p:cond delay="0"/>
+                                          </p:stCondLst>
+                                        </p:cTn>
+                                        <p:tgtEl>
+                                          <p:spTgt spid="116">
+                                            <p:txEl>
+                                              <p:pRg st="6" end="6"/>
+                                            </p:txEl>
+                                          </p:spTgt>
+                                        </p:tgtEl>
+                                        <p:attrNameLst>
+                                          <p:attrName>style.visibility</p:attrName>
+                                        </p:attrNameLst>
+                                      </p:cBhvr>
+                                      <p:to>
+                                        <p:strVal val="visible"/>
+                                      </p:to>
+                                    </p:set>
+                                    <p:anim calcmode="lin" valueType="num">
+                                      <p:cBhvr additive="base">
+                                        <p:cTn id="17" dur="500" fill="hold"/>
+                                        <p:tgtEl>
+                                          <p:spTgt spid="116">
+                                            <p:txEl>
+                                              <p:pRg st="6" end="6"/>
+                                            </p:txEl>
+                                          </p:spTgt>
+                                        </p:tgtEl>
+                                        <p:attrNameLst>
+                                          <p:attrName>ppt_x</p:attrName>
+                                        </p:attrNameLst>
+                                      </p:cBhvr>
+                                      <p:tavLst>
+                                        <p:tav tm="0">
+                                          <p:val>
+                                            <p:strVal val="#ppt_x"/>
+                                          </p:val>
+                                        </p:tav>
+                                        <p:tav tm="100000">
+                                          <p:val>
+                                            <p:strVal val="#ppt_x"/>
+                                          </p:val>
+                                        </p:tav>
+                                      </p:tavLst>
+                                    </p:anim>
+                                    <p:anim calcmode="lin" valueType="num">
+                                      <p:cBhvr additive="base">
+                                        <p:cTn id="18" dur="500" fill="hold"/>
+                                        <p:tgtEl>
+                                          <p:spTgt spid="116">
+                                            <p:txEl>
+                                              <p:pRg st="6" end="6"/>
+                                            </p:txEl>
+                                          </p:spTgt>
+                                        </p:tgtEl>
+                                        <p:attrNameLst>
+                                          <p:attrName>ppt_y</p:attrName>
+                                        </p:attrNameLst>
+                                      </p:cBhvr>
+                                      <p:tavLst>
+                                        <p:tav tm="0">
+                                          <p:val>
+                                            <p:strVal val="1+#ppt_h/2"/>
+                                          </p:val>
+                                        </p:tav>
+                                        <p:tav tm="100000">
+                                          <p:val>
+                                            <p:strVal val="#ppt_y"/>
+                                          </p:val>
+                                        </p:tav>
+                                      </p:tavLst>
+                                    </p:anim>
+                                  </p:childTnLst>
+                                </p:cTn>
+                              </p:par>
+                              <p:par>
+                                <p:cTn id="19" presetID="2" presetClass="entr" presetSubtype="4" fill="hold" nodeType="withEffect">
+                                  <p:stCondLst>
+                                    <p:cond delay="0"/>
+                                  </p:stCondLst>
+                                  <p:childTnLst>
+                                    <p:set>
+                                      <p:cBhvr>
+                                        <p:cTn id="20" dur="1" fill="hold">
+                                          <p:stCondLst>
+                                            <p:cond delay="0"/>
+                                          </p:stCondLst>
+                                        </p:cTn>
+                                        <p:tgtEl>
+                                          <p:spTgt spid="116">
+                                            <p:txEl>
+                                              <p:pRg st="8" end="8"/>
+                                            </p:txEl>
+                                          </p:spTgt>
+                                        </p:tgtEl>
+                                        <p:attrNameLst>
+                                          <p:attrName>style.visibility</p:attrName>
+                                        </p:attrNameLst>
+                                      </p:cBhvr>
+                                      <p:to>
+                                        <p:strVal val="visible"/>
+                                      </p:to>
+                                    </p:set>
+                                    <p:anim calcmode="lin" valueType="num">
+                                      <p:cBhvr additive="base">
+                                        <p:cTn id="21" dur="500" fill="hold"/>
+                                        <p:tgtEl>
+                                          <p:spTgt spid="116">
+                                            <p:txEl>
+                                              <p:pRg st="8" end="8"/>
+                                            </p:txEl>
+                                          </p:spTgt>
+                                        </p:tgtEl>
+                                        <p:attrNameLst>
+                                          <p:attrName>ppt_x</p:attrName>
+                                        </p:attrNameLst>
+                                      </p:cBhvr>
+                                      <p:tavLst>
+                                        <p:tav tm="0">
+                                          <p:val>
+                                            <p:strVal val="#ppt_x"/>
+                                          </p:val>
+                                        </p:tav>
+                                        <p:tav tm="100000">
+                                          <p:val>
+                                            <p:strVal val="#ppt_x"/>
+                                          </p:val>
+                                        </p:tav>
+                                      </p:tavLst>
+                                    </p:anim>
+                                    <p:anim calcmode="lin" valueType="num">
+                                      <p:cBhvr additive="base">
+                                        <p:cTn id="22" dur="500" fill="hold"/>
+                                        <p:tgtEl>
+                                          <p:spTgt spid="116">
+                                            <p:txEl>
+                                              <p:pRg st="8" end="8"/>
+                                            </p:txEl>
+                                          </p:spTgt>
+                                        </p:tgtEl>
+                                        <p:attrNameLst>
+                                          <p:attrName>ppt_y</p:attrName>
+                                        </p:attrNameLst>
+                                      </p:cBhvr>
+                                      <p:tavLst>
+                                        <p:tav tm="0">
+                                          <p:val>
+                                            <p:strVal val="1+#ppt_h/2"/>
+                                          </p:val>
+                                        </p:tav>
+                                        <p:tav tm="100000">
+                                          <p:val>
+                                            <p:strVal val="#ppt_y"/>
+                                          </p:val>
+                                        </p:tav>
+                                      </p:tavLst>
+                                    </p:anim>
+                                  </p:childTnLst>
+                                </p:cTn>
+                              </p:par>
+                            </p:childTnLst>
+                          </p:cTn>
+                        </p:par>
+                      </p:childTnLst>
+                    </p:cTn>
+                  </p:par>
+                  <p:par>
+                    <p:cTn id="23" fill="hold">
+                      <p:stCondLst>
+                        <p:cond delay="indefinite"/>
+                      </p:stCondLst>
+                      <p:childTnLst>
+                        <p:par>
+                          <p:cTn id="24" fill="hold">
+                            <p:stCondLst>
+                              <p:cond delay="0"/>
+                            </p:stCondLst>
+                            <p:childTnLst>
+                              <p:par>
+                                <p:cTn id="25" presetID="2" presetClass="entr" presetSubtype="4" fill="hold" nodeType="clickEffect">
+                                  <p:stCondLst>
+                                    <p:cond delay="0"/>
+                                  </p:stCondLst>
+                                  <p:childTnLst>
+                                    <p:set>
+                                      <p:cBhvr>
+                                        <p:cTn id="26" dur="1" fill="hold">
+                                          <p:stCondLst>
+                                            <p:cond delay="0"/>
+                                          </p:stCondLst>
+                                        </p:cTn>
+                                        <p:tgtEl>
+                                          <p:spTgt spid="116">
+                                            <p:txEl>
+                                              <p:pRg st="10" end="10"/>
+                                            </p:txEl>
+                                          </p:spTgt>
+                                        </p:tgtEl>
+                                        <p:attrNameLst>
+                                          <p:attrName>style.visibility</p:attrName>
+                                        </p:attrNameLst>
+                                      </p:cBhvr>
+                                      <p:to>
+                                        <p:strVal val="visible"/>
+                                      </p:to>
+                                    </p:set>
+                                    <p:anim calcmode="lin" valueType="num">
+                                      <p:cBhvr additive="base">
+                                        <p:cTn id="27" dur="500" fill="hold"/>
+                                        <p:tgtEl>
+                                          <p:spTgt spid="116">
+                                            <p:txEl>
+                                              <p:pRg st="10" end="10"/>
+                                            </p:txEl>
+                                          </p:spTgt>
+                                        </p:tgtEl>
+                                        <p:attrNameLst>
+                                          <p:attrName>ppt_x</p:attrName>
+                                        </p:attrNameLst>
+                                      </p:cBhvr>
+                                      <p:tavLst>
+                                        <p:tav tm="0">
+                                          <p:val>
+                                            <p:strVal val="#ppt_x"/>
+                                          </p:val>
+                                        </p:tav>
+                                        <p:tav tm="100000">
+                                          <p:val>
+                                            <p:strVal val="#ppt_x"/>
+                                          </p:val>
+                                        </p:tav>
+                                      </p:tavLst>
+                                    </p:anim>
+                                    <p:anim calcmode="lin" valueType="num">
+                                      <p:cBhvr additive="base">
+                                        <p:cTn id="28" dur="500" fill="hold"/>
+                                        <p:tgtEl>
+                                          <p:spTgt spid="116">
+                                            <p:txEl>
+                                              <p:pRg st="10" end="10"/>
+                                            </p:txEl>
+                                          </p:spTgt>
+                                        </p:tgtEl>
+                                        <p:attrNameLst>
+                                          <p:attrName>ppt_y</p:attrName>
+                                        </p:attrNameLst>
+                                      </p:cBhvr>
+                                      <p:tavLst>
+                                        <p:tav tm="0">
+                                          <p:val>
+                                            <p:strVal val="1+#ppt_h/2"/>
+                                          </p:val>
+                                        </p:tav>
+                                        <p:tav tm="100000">
+                                          <p:val>
+                                            <p:strVal val="#ppt_y"/>
+                                          </p:val>
+                                        </p:tav>
+                                      </p:tavLst>
+                                    </p:anim>
+                                  </p:childTnLst>
+                                </p:cTn>
+                              </p:par>
+                            </p:childTnLst>
+                          </p:cTn>
+                        </p:par>
+                      </p:childTnLst>
+                    </p:cTn>
+                  </p:par>
+                  <p:par>
+                    <p:cTn id="29" fill="hold">
+                      <p:stCondLst>
+                        <p:cond delay="indefinite"/>
+                      </p:stCondLst>
+                      <p:childTnLst>
+                        <p:par>
+                          <p:cTn id="30" fill="hold">
+                            <p:stCondLst>
+                              <p:cond delay="0"/>
+                            </p:stCondLst>
+                            <p:childTnLst>
+                              <p:par>
+                                <p:cTn id="31" presetID="2" presetClass="entr" presetSubtype="4" fill="hold" nodeType="clickEffect">
+                                  <p:stCondLst>
+                                    <p:cond delay="0"/>
+                                  </p:stCondLst>
+                                  <p:childTnLst>
+                                    <p:set>
+                                      <p:cBhvr>
+                                        <p:cTn id="32" dur="1" fill="hold">
+                                          <p:stCondLst>
+                                            <p:cond delay="0"/>
+                                          </p:stCondLst>
+                                        </p:cTn>
+                                        <p:tgtEl>
+                                          <p:spTgt spid="118">
+                                            <p:txEl>
+                                              <p:pRg st="0" end="0"/>
+                                            </p:txEl>
+                                          </p:spTgt>
+                                        </p:tgtEl>
+                                        <p:attrNameLst>
+                                          <p:attrName>style.visibility</p:attrName>
+                                        </p:attrNameLst>
+                                      </p:cBhvr>
+                                      <p:to>
+                                        <p:strVal val="visible"/>
+                                      </p:to>
+                                    </p:set>
+                                    <p:anim calcmode="lin" valueType="num">
+                                      <p:cBhvr additive="base">
+                                        <p:cTn id="33" dur="500" fill="hold"/>
+                                        <p:tgtEl>
+                                          <p:spTgt spid="118">
+                                            <p:txEl>
+                                              <p:pRg st="0" end="0"/>
+                                            </p:txEl>
+                                          </p:spTgt>
+                                        </p:tgtEl>
+                                        <p:attrNameLst>
+                                          <p:attrName>ppt_x</p:attrName>
+                                        </p:attrNameLst>
+                                      </p:cBhvr>
+                                      <p:tavLst>
+                                        <p:tav tm="0">
+                                          <p:val>
+                                            <p:strVal val="#ppt_x"/>
+                                          </p:val>
+                                        </p:tav>
+                                        <p:tav tm="100000">
+                                          <p:val>
+                                            <p:strVal val="#ppt_x"/>
+                                          </p:val>
+                                        </p:tav>
+                                      </p:tavLst>
+                                    </p:anim>
+                                    <p:anim calcmode="lin" valueType="num">
+                                      <p:cBhvr additive="base">
+                                        <p:cTn id="34" dur="500" fill="hold"/>
+                                        <p:tgtEl>
+                                          <p:spTgt spid="118">
+                                            <p:txEl>
+                                              <p:pRg st="0" end="0"/>
+                                            </p:txEl>
+                                          </p:spTgt>
+                                        </p:tgtEl>
+                                        <p:attrNameLst>
+                                          <p:attrName>ppt_y</p:attrName>
+                                        </p:attrNameLst>
+                                      </p:cBhvr>
+                                      <p:tavLst>
+                                        <p:tav tm="0">
+                                          <p:val>
+                                            <p:strVal val="1+#ppt_h/2"/>
+                                          </p:val>
+                                        </p:tav>
+                                        <p:tav tm="100000">
+                                          <p:val>
+                                            <p:strVal val="#ppt_y"/>
+                                          </p:val>
+                                        </p:tav>
+                                      </p:tavLst>
+                                    </p:anim>
+                                  </p:childTnLst>
+                                </p:cTn>
+                              </p:par>
+                              <p:par>
+                                <p:cTn id="35" presetID="2" presetClass="entr" presetSubtype="4" fill="hold" nodeType="withEffect">
+                                  <p:stCondLst>
+                                    <p:cond delay="0"/>
+                                  </p:stCondLst>
+                                  <p:childTnLst>
+                                    <p:set>
+                                      <p:cBhvr>
+                                        <p:cTn id="36" dur="1" fill="hold">
+                                          <p:stCondLst>
+                                            <p:cond delay="0"/>
+                                          </p:stCondLst>
+                                        </p:cTn>
+                                        <p:tgtEl>
+                                          <p:spTgt spid="118">
+                                            <p:txEl>
+                                              <p:pRg st="1" end="1"/>
+                                            </p:txEl>
+                                          </p:spTgt>
+                                        </p:tgtEl>
+                                        <p:attrNameLst>
+                                          <p:attrName>style.visibility</p:attrName>
+                                        </p:attrNameLst>
+                                      </p:cBhvr>
+                                      <p:to>
+                                        <p:strVal val="visible"/>
+                                      </p:to>
+                                    </p:set>
+                                    <p:anim calcmode="lin" valueType="num">
+                                      <p:cBhvr additive="base">
+                                        <p:cTn id="37" dur="500" fill="hold"/>
+                                        <p:tgtEl>
+                                          <p:spTgt spid="118">
+                                            <p:txEl>
+                                              <p:pRg st="1" end="1"/>
+                                            </p:txEl>
+                                          </p:spTgt>
+                                        </p:tgtEl>
+                                        <p:attrNameLst>
+                                          <p:attrName>ppt_x</p:attrName>
+                                        </p:attrNameLst>
+                                      </p:cBhvr>
+                                      <p:tavLst>
+                                        <p:tav tm="0">
+                                          <p:val>
+                                            <p:strVal val="#ppt_x"/>
+                                          </p:val>
+                                        </p:tav>
+                                        <p:tav tm="100000">
+                                          <p:val>
+                                            <p:strVal val="#ppt_x"/>
+                                          </p:val>
+                                        </p:tav>
+                                      </p:tavLst>
+                                    </p:anim>
+                                    <p:anim calcmode="lin" valueType="num">
+                                      <p:cBhvr additive="base">
+                                        <p:cTn id="38" dur="500" fill="hold"/>
+                                        <p:tgtEl>
+                                          <p:spTgt spid="118">
+                                            <p:txEl>
+                                              <p:pRg st="1" end="1"/>
+                                            </p:txEl>
+                                          </p:spTgt>
+                                        </p:tgtEl>
+                                        <p:attrNameLst>
+                                          <p:attrName>ppt_y</p:attrName>
+                                        </p:attrNameLst>
+                                      </p:cBhvr>
+                                      <p:tavLst>
+                                        <p:tav tm="0">
+                                          <p:val>
+                                            <p:strVal val="1+#ppt_h/2"/>
+                                          </p:val>
+                                        </p:tav>
+                                        <p:tav tm="100000">
+                                          <p:val>
+                                            <p:strVal val="#ppt_y"/>
+                                          </p:val>
+                                        </p:tav>
+                                      </p:tavLst>
+                                    </p:anim>
+                                  </p:childTnLst>
+                                </p:cTn>
+                              </p:par>
+                              <p:par>
+                                <p:cTn id="39" presetID="2" presetClass="entr" presetSubtype="4" fill="hold" nodeType="withEffect">
+                                  <p:stCondLst>
+                                    <p:cond delay="0"/>
+                                  </p:stCondLst>
+                                  <p:childTnLst>
+                                    <p:set>
+                                      <p:cBhvr>
+                                        <p:cTn id="40" dur="1" fill="hold">
+                                          <p:stCondLst>
+                                            <p:cond delay="0"/>
+                                          </p:stCondLst>
+                                        </p:cTn>
+                                        <p:tgtEl>
+                                          <p:spTgt spid="118">
+                                            <p:txEl>
+                                              <p:pRg st="2" end="2"/>
+                                            </p:txEl>
+                                          </p:spTgt>
+                                        </p:tgtEl>
+                                        <p:attrNameLst>
+                                          <p:attrName>style.visibility</p:attrName>
+                                        </p:attrNameLst>
+                                      </p:cBhvr>
+                                      <p:to>
+                                        <p:strVal val="visible"/>
+                                      </p:to>
+                                    </p:set>
+                                    <p:anim calcmode="lin" valueType="num">
+                                      <p:cBhvr additive="base">
+                                        <p:cTn id="41" dur="500" fill="hold"/>
+                                        <p:tgtEl>
+                                          <p:spTgt spid="118">
+                                            <p:txEl>
+                                              <p:pRg st="2" end="2"/>
+                                            </p:txEl>
+                                          </p:spTgt>
+                                        </p:tgtEl>
+                                        <p:attrNameLst>
+                                          <p:attrName>ppt_x</p:attrName>
+                                        </p:attrNameLst>
+                                      </p:cBhvr>
+                                      <p:tavLst>
+                                        <p:tav tm="0">
+                                          <p:val>
+                                            <p:strVal val="#ppt_x"/>
+                                          </p:val>
+                                        </p:tav>
+                                        <p:tav tm="100000">
+                                          <p:val>
+                                            <p:strVal val="#ppt_x"/>
+                                          </p:val>
+                                        </p:tav>
+                                      </p:tavLst>
+                                    </p:anim>
+                                    <p:anim calcmode="lin" valueType="num">
+                                      <p:cBhvr additive="base">
+                                        <p:cTn id="42" dur="500" fill="hold"/>
+                                        <p:tgtEl>
+                                          <p:spTgt spid="118">
+                                            <p:txEl>
+                                              <p:pRg st="2" end="2"/>
+                                            </p:txEl>
+                                          </p:spTgt>
+                                        </p:tgtEl>
+                                        <p:attrNameLst>
+                                          <p:attrName>ppt_y</p:attrName>
+                                        </p:attrNameLst>
+                                      </p:cBhvr>
+                                      <p:tavLst>
+                                        <p:tav tm="0">
+                                          <p:val>
+                                            <p:strVal val="1+#ppt_h/2"/>
+                                          </p:val>
+                                        </p:tav>
+                                        <p:tav tm="100000">
+                                          <p:val>
+                                            <p:strVal val="#ppt_y"/>
+                                          </p:val>
+                                        </p:tav>
+                                      </p:tavLst>
+                                    </p:anim>
+                                  </p:childTnLst>
+                                </p:cTn>
+                              </p:par>
+                              <p:par>
+                                <p:cTn id="43" presetID="2" presetClass="entr" presetSubtype="4" fill="hold" nodeType="withEffect">
+                                  <p:stCondLst>
+                                    <p:cond delay="0"/>
+                                  </p:stCondLst>
+                                  <p:childTnLst>
+                                    <p:set>
+                                      <p:cBhvr>
+                                        <p:cTn id="44" dur="1" fill="hold">
+                                          <p:stCondLst>
+                                            <p:cond delay="0"/>
+                                          </p:stCondLst>
+                                        </p:cTn>
+                                        <p:tgtEl>
+                                          <p:spTgt spid="118">
+                                            <p:txEl>
+                                              <p:pRg st="3" end="3"/>
+                                            </p:txEl>
+                                          </p:spTgt>
+                                        </p:tgtEl>
+                                        <p:attrNameLst>
+                                          <p:attrName>style.visibility</p:attrName>
+                                        </p:attrNameLst>
+                                      </p:cBhvr>
+                                      <p:to>
+                                        <p:strVal val="visible"/>
+                                      </p:to>
+                                    </p:set>
+                                    <p:anim calcmode="lin" valueType="num">
+                                      <p:cBhvr additive="base">
+                                        <p:cTn id="45" dur="500" fill="hold"/>
+                                        <p:tgtEl>
+                                          <p:spTgt spid="118">
+                                            <p:txEl>
+                                              <p:pRg st="3" end="3"/>
+                                            </p:txEl>
+                                          </p:spTgt>
+                                        </p:tgtEl>
+                                        <p:attrNameLst>
+                                          <p:attrName>ppt_x</p:attrName>
+                                        </p:attrNameLst>
+                                      </p:cBhvr>
+                                      <p:tavLst>
+                                        <p:tav tm="0">
+                                          <p:val>
+                                            <p:strVal val="#ppt_x"/>
+                                          </p:val>
+                                        </p:tav>
+                                        <p:tav tm="100000">
+                                          <p:val>
+                                            <p:strVal val="#ppt_x"/>
+                                          </p:val>
+                                        </p:tav>
+                                      </p:tavLst>
+                                    </p:anim>
+                                    <p:anim calcmode="lin" valueType="num">
+                                      <p:cBhvr additive="base">
+                                        <p:cTn id="46" dur="500" fill="hold"/>
+                                        <p:tgtEl>
+                                          <p:spTgt spid="118">
+                                            <p:txEl>
+                                              <p:pRg st="3" end="3"/>
+                                            </p:txEl>
+                                          </p:spTgt>
+                                        </p:tgtEl>
+                                        <p:attrNameLst>
+                                          <p:attrName>ppt_y</p:attrName>
+                                        </p:attrNameLst>
+                                      </p:cBhvr>
+                                      <p:tavLst>
+                                        <p:tav tm="0">
+                                          <p:val>
+                                            <p:strVal val="1+#ppt_h/2"/>
+                                          </p:val>
+                                        </p:tav>
+                                        <p:tav tm="100000">
+                                          <p:val>
+                                            <p:strVal val="#ppt_y"/>
+                                          </p:val>
+                                        </p:tav>
+                                      </p:tavLst>
+                                    </p:anim>
+                                  </p:childTnLst>
+                                </p:cTn>
+                              </p:par>
+                              <p:par>
+                                <p:cTn id="47" presetID="2" presetClass="entr" presetSubtype="4" fill="hold" grpId="0" nodeType="withEffect">
+                                  <p:stCondLst>
+                                    <p:cond delay="0"/>
+                                  </p:stCondLst>
+                                  <p:childTnLst>
+                                    <p:set>
+                                      <p:cBhvr>
+                                        <p:cTn id="48" dur="1" fill="hold">
+                                          <p:stCondLst>
+                                            <p:cond delay="0"/>
+                                          </p:stCondLst>
+                                        </p:cTn>
+                                        <p:tgtEl>
+                                          <p:spTgt spid="118">
+                                            <p:bg/>
+                                          </p:spTgt>
+                                        </p:tgtEl>
+                                        <p:attrNameLst>
+                                          <p:attrName>style.visibility</p:attrName>
+                                        </p:attrNameLst>
+                                      </p:cBhvr>
+                                      <p:to>
+                                        <p:strVal val="visible"/>
+                                      </p:to>
+                                    </p:set>
+                                    <p:anim calcmode="lin" valueType="num">
+                                      <p:cBhvr additive="base">
+                                        <p:cTn id="49" dur="500" fill="hold"/>
+                                        <p:tgtEl>
+                                          <p:spTgt spid="118">
+                                            <p:bg/>
+                                          </p:spTgt>
+                                        </p:tgtEl>
+                                        <p:attrNameLst>
+                                          <p:attrName>ppt_x</p:attrName>
+                                        </p:attrNameLst>
+                                      </p:cBhvr>
+                                      <p:tavLst>
+                                        <p:tav tm="0">
+                                          <p:val>
+                                            <p:strVal val="#ppt_x"/>
+                                          </p:val>
+                                        </p:tav>
+                                        <p:tav tm="100000">
+                                          <p:val>
+                                            <p:strVal val="#ppt_x"/>
+                                          </p:val>
+                                        </p:tav>
+                                      </p:tavLst>
+                                    </p:anim>
+                                    <p:anim calcmode="lin" valueType="num">
+                                      <p:cBhvr additive="base">
+                                        <p:cTn id="50" dur="500" fill="hold"/>
+                                        <p:tgtEl>
+                                          <p:spTgt spid="118">
+                                            <p:bg/>
+                                          </p:spTgt>
+                                        </p:tgtEl>
+                                        <p:attrNameLst>
+                                          <p:attrName>ppt_y</p:attrName>
+                                        </p:attrNameLst>
+                                      </p:cBhvr>
+                                      <p:tavLst>
+                                        <p:tav tm="0">
+                                          <p:val>
+                                            <p:strVal val="1+#ppt_h/2"/>
+                                          </p:val>
+                                        </p:tav>
+                                        <p:tav tm="100000">
+                                          <p:val>
+                                            <p:strVal val="#ppt_y"/>
+                                          </p:val>
+                                        </p:tav>
+                                      </p:tavLst>
+                                    </p:anim>
+                                  </p:childTnLst>
+                                </p:cTn>
+                              </p:par>
+                              <p:par>
+                                <p:cTn id="51" presetID="2" presetClass="entr" presetSubtype="4" fill="hold" grpId="0" nodeType="withEffect">
+                                  <p:stCondLst>
+                                    <p:cond delay="0"/>
+                                  </p:stCondLst>
+                                  <p:childTnLst>
+                                    <p:set>
+                                      <p:cBhvr>
+                                        <p:cTn id="52" dur="1" fill="hold">
+                                          <p:stCondLst>
+                                            <p:cond delay="0"/>
+                                          </p:stCondLst>
+                                        </p:cTn>
+                                        <p:tgtEl>
+                                          <p:spTgt spid="118">
+                                            <p:txEl>
+                                              <p:pRg st="0" end="0"/>
+                                            </p:txEl>
+                                          </p:spTgt>
+                                        </p:tgtEl>
+                                        <p:attrNameLst>
+                                          <p:attrName>style.visibility</p:attrName>
+                                        </p:attrNameLst>
+                                      </p:cBhvr>
+                                      <p:to>
+                                        <p:strVal val="visible"/>
+                                      </p:to>
+                                    </p:set>
+                                    <p:anim calcmode="lin" valueType="num">
+                                      <p:cBhvr additive="base">
+                                        <p:cTn id="53" dur="500" fill="hold"/>
+                                        <p:tgtEl>
+                                          <p:spTgt spid="118">
+                                            <p:txEl>
+                                              <p:pRg st="0" end="0"/>
+                                            </p:txEl>
+                                          </p:spTgt>
+                                        </p:tgtEl>
+                                        <p:attrNameLst>
+                                          <p:attrName>ppt_x</p:attrName>
+                                        </p:attrNameLst>
+                                      </p:cBhvr>
+                                      <p:tavLst>
+                                        <p:tav tm="0">
+                                          <p:val>
+                                            <p:strVal val="#ppt_x"/>
+                                          </p:val>
+                                        </p:tav>
+                                        <p:tav tm="100000">
+                                          <p:val>
+                                            <p:strVal val="#ppt_x"/>
+                                          </p:val>
+                                        </p:tav>
+                                      </p:tavLst>
+                                    </p:anim>
+                                    <p:anim calcmode="lin" valueType="num">
+                                      <p:cBhvr additive="base">
+                                        <p:cTn id="54" dur="500" fill="hold"/>
+                                        <p:tgtEl>
+                                          <p:spTgt spid="118">
+                                            <p:txEl>
+                                              <p:pRg st="0" end="0"/>
+                                            </p:txEl>
+                                          </p:spTgt>
+                                        </p:tgtEl>
+                                        <p:attrNameLst>
+                                          <p:attrName>ppt_y</p:attrName>
+                                        </p:attrNameLst>
+                                      </p:cBhvr>
+                                      <p:tavLst>
+                                        <p:tav tm="0">
+                                          <p:val>
+                                            <p:strVal val="1+#ppt_h/2"/>
+                                          </p:val>
+                                        </p:tav>
+                                        <p:tav tm="100000">
+                                          <p:val>
+                                            <p:strVal val="#ppt_y"/>
+                                          </p:val>
+                                        </p:tav>
+                                      </p:tavLst>
+                                    </p:anim>
+                                  </p:childTnLst>
+                                </p:cTn>
+                              </p:par>
+                              <p:par>
+                                <p:cTn id="55" presetID="2" presetClass="entr" presetSubtype="4" fill="hold" grpId="0" nodeType="withEffect">
+                                  <p:stCondLst>
+                                    <p:cond delay="0"/>
+                                  </p:stCondLst>
+                                  <p:childTnLst>
+                                    <p:set>
+                                      <p:cBhvr>
+                                        <p:cTn id="56" dur="1" fill="hold">
+                                          <p:stCondLst>
+                                            <p:cond delay="0"/>
+                                          </p:stCondLst>
+                                        </p:cTn>
+                                        <p:tgtEl>
+                                          <p:spTgt spid="118">
+                                            <p:txEl>
+                                              <p:pRg st="1" end="1"/>
+                                            </p:txEl>
+                                          </p:spTgt>
+                                        </p:tgtEl>
+                                        <p:attrNameLst>
+                                          <p:attrName>style.visibility</p:attrName>
+                                        </p:attrNameLst>
+                                      </p:cBhvr>
+                                      <p:to>
+                                        <p:strVal val="visible"/>
+                                      </p:to>
+                                    </p:set>
+                                    <p:anim calcmode="lin" valueType="num">
+                                      <p:cBhvr additive="base">
+                                        <p:cTn id="57" dur="500" fill="hold"/>
+                                        <p:tgtEl>
+                                          <p:spTgt spid="118">
+                                            <p:txEl>
+                                              <p:pRg st="1" end="1"/>
+                                            </p:txEl>
+                                          </p:spTgt>
+                                        </p:tgtEl>
+                                        <p:attrNameLst>
+                                          <p:attrName>ppt_x</p:attrName>
+                                        </p:attrNameLst>
+                                      </p:cBhvr>
+                                      <p:tavLst>
+                                        <p:tav tm="0">
+                                          <p:val>
+                                            <p:strVal val="#ppt_x"/>
+                                          </p:val>
+                                        </p:tav>
+                                        <p:tav tm="100000">
+                                          <p:val>
+                                            <p:strVal val="#ppt_x"/>
+                                          </p:val>
+                                        </p:tav>
+                                      </p:tavLst>
+                                    </p:anim>
+                                    <p:anim calcmode="lin" valueType="num">
+                                      <p:cBhvr additive="base">
+                                        <p:cTn id="58" dur="500" fill="hold"/>
+                                        <p:tgtEl>
+                                          <p:spTgt spid="118">
+                                            <p:txEl>
+                                              <p:pRg st="1" end="1"/>
+                                            </p:txEl>
+                                          </p:spTgt>
+                                        </p:tgtEl>
+                                        <p:attrNameLst>
+                                          <p:attrName>ppt_y</p:attrName>
+                                        </p:attrNameLst>
+                                      </p:cBhvr>
+                                      <p:tavLst>
+                                        <p:tav tm="0">
+                                          <p:val>
+                                            <p:strVal val="1+#ppt_h/2"/>
+                                          </p:val>
+                                        </p:tav>
+                                        <p:tav tm="100000">
+                                          <p:val>
+                                            <p:strVal val="#ppt_y"/>
+                                          </p:val>
+                                        </p:tav>
+                                      </p:tavLst>
+                                    </p:anim>
+                                  </p:childTnLst>
+                                </p:cTn>
+                              </p:par>
+                              <p:par>
+                                <p:cTn id="59" presetID="2" presetClass="entr" presetSubtype="4" fill="hold" grpId="0" nodeType="withEffect">
+                                  <p:stCondLst>
+                                    <p:cond delay="0"/>
+                                  </p:stCondLst>
+                                  <p:childTnLst>
+                                    <p:set>
+                                      <p:cBhvr>
+                                        <p:cTn id="60" dur="1" fill="hold">
+                                          <p:stCondLst>
+                                            <p:cond delay="0"/>
+                                          </p:stCondLst>
+                                        </p:cTn>
+                                        <p:tgtEl>
+                                          <p:spTgt spid="118">
+                                            <p:txEl>
+                                              <p:pRg st="2" end="2"/>
+                                            </p:txEl>
+                                          </p:spTgt>
+                                        </p:tgtEl>
+                                        <p:attrNameLst>
+                                          <p:attrName>style.visibility</p:attrName>
+                                        </p:attrNameLst>
+                                      </p:cBhvr>
+                                      <p:to>
+                                        <p:strVal val="visible"/>
+                                      </p:to>
+                                    </p:set>
+                                    <p:anim calcmode="lin" valueType="num">
+                                      <p:cBhvr additive="base">
+                                        <p:cTn id="61" dur="500" fill="hold"/>
+                                        <p:tgtEl>
+                                          <p:spTgt spid="118">
+                                            <p:txEl>
+                                              <p:pRg st="2" end="2"/>
+                                            </p:txEl>
+                                          </p:spTgt>
+                                        </p:tgtEl>
+                                        <p:attrNameLst>
+                                          <p:attrName>ppt_x</p:attrName>
+                                        </p:attrNameLst>
+                                      </p:cBhvr>
+                                      <p:tavLst>
+                                        <p:tav tm="0">
+                                          <p:val>
+                                            <p:strVal val="#ppt_x"/>
+                                          </p:val>
+                                        </p:tav>
+                                        <p:tav tm="100000">
+                                          <p:val>
+                                            <p:strVal val="#ppt_x"/>
+                                          </p:val>
+                                        </p:tav>
+                                      </p:tavLst>
+                                    </p:anim>
+                                    <p:anim calcmode="lin" valueType="num">
+                                      <p:cBhvr additive="base">
+                                        <p:cTn id="62" dur="500" fill="hold"/>
+                                        <p:tgtEl>
+                                          <p:spTgt spid="118">
+                                            <p:txEl>
+                                              <p:pRg st="2" end="2"/>
+                                            </p:txEl>
+                                          </p:spTgt>
+                                        </p:tgtEl>
+                                        <p:attrNameLst>
+                                          <p:attrName>ppt_y</p:attrName>
+                                        </p:attrNameLst>
+                                      </p:cBhvr>
+                                      <p:tavLst>
+                                        <p:tav tm="0">
+                                          <p:val>
+                                            <p:strVal val="1+#ppt_h/2"/>
+                                          </p:val>
+                                        </p:tav>
+                                        <p:tav tm="100000">
+                                          <p:val>
+                                            <p:strVal val="#ppt_y"/>
+                                          </p:val>
+                                        </p:tav>
+                                      </p:tavLst>
+                                    </p:anim>
+                                  </p:childTnLst>
+                                </p:cTn>
+                              </p:par>
+                              <p:par>
+                                <p:cTn id="63" presetID="2" presetClass="entr" presetSubtype="4" fill="hold" grpId="0" nodeType="withEffect">
+                                  <p:stCondLst>
+                                    <p:cond delay="0"/>
+                                  </p:stCondLst>
+                                  <p:childTnLst>
+                                    <p:set>
+                                      <p:cBhvr>
+                                        <p:cTn id="64" dur="1" fill="hold">
+                                          <p:stCondLst>
+                                            <p:cond delay="0"/>
+                                          </p:stCondLst>
+                                        </p:cTn>
+                                        <p:tgtEl>
+                                          <p:spTgt spid="118">
+                                            <p:txEl>
+                                              <p:pRg st="3" end="3"/>
+                                            </p:txEl>
+                                          </p:spTgt>
+                                        </p:tgtEl>
+                                        <p:attrNameLst>
+                                          <p:attrName>style.visibility</p:attrName>
+                                        </p:attrNameLst>
+                                      </p:cBhvr>
+                                      <p:to>
+                                        <p:strVal val="visible"/>
+                                      </p:to>
+                                    </p:set>
+                                    <p:anim calcmode="lin" valueType="num">
+                                      <p:cBhvr additive="base">
+                                        <p:cTn id="65" dur="500" fill="hold"/>
+                                        <p:tgtEl>
+                                          <p:spTgt spid="118">
+                                            <p:txEl>
+                                              <p:pRg st="3" end="3"/>
+                                            </p:txEl>
+                                          </p:spTgt>
+                                        </p:tgtEl>
+                                        <p:attrNameLst>
+                                          <p:attrName>ppt_x</p:attrName>
+                                        </p:attrNameLst>
+                                      </p:cBhvr>
+                                      <p:tavLst>
+                                        <p:tav tm="0">
+                                          <p:val>
+                                            <p:strVal val="#ppt_x"/>
+                                          </p:val>
+                                        </p:tav>
+                                        <p:tav tm="100000">
+                                          <p:val>
+                                            <p:strVal val="#ppt_x"/>
+                                          </p:val>
+                                        </p:tav>
+                                      </p:tavLst>
+                                    </p:anim>
+                                    <p:anim calcmode="lin" valueType="num">
+                                      <p:cBhvr additive="base">
+                                        <p:cTn id="66" dur="500" fill="hold"/>
+                                        <p:tgtEl>
+                                          <p:spTgt spid="118">
+                                            <p:txEl>
+                                              <p:pRg st="3" end="3"/>
+                                            </p:txEl>
+                                          </p:spTgt>
+                                        </p:tgtEl>
+                                        <p:attrNameLst>
+                                          <p:attrName>ppt_y</p:attrName>
+                                        </p:attrNameLst>
+                                      </p:cBhvr>
+                                      <p:tavLst>
+                                        <p:tav tm="0">
+                                          <p:val>
+                                            <p:strVal val="1+#ppt_h/2"/>
+                                          </p:val>
+                                        </p:tav>
+                                        <p:tav tm="100000">
+                                          <p:val>
+                                            <p:strVal val="#ppt_y"/>
+                                          </p:val>
+                                        </p:tav>
+                                      </p:tavLst>
+                                    </p:anim>
+                                  </p:childTnLst>
+                                </p:cTn>
+                              </p:par>
+                            </p:childTnLst>
+                          </p:cTn>
+                        </p:par>
+                      </p:childTnLst>
+                    </p:cTn>
+                  </p:par>
+                </p:childTnLst>
+              </p:cTn>
+              <p:prevCondLst>
+                <p:cond evt="onPrev" delay="0">
+                  <p:tgtEl>
+                    <p:sldTgt/>
+                  </p:tgtEl>
+                </p:cond>
+              </p:prevCondLst>
+              <p:nextCondLst>
+                <p:cond evt="onNext" delay="0">
+                  <p:tgtEl>
+                    <p:sldTgt/>
+                  </p:tgtEl>
+                </p:cond>
+              </p:nextCondLst>
+            </p:seq>
+          </p:childTnLst>
+        </p:cTn>
+      </p:par>
+    </p:tnLst>
+    <p:bldLst>
+      <p:bldP spid="118" grpId="0" build="allAtOnce" animBg="1"/>
+    </p:bldLst>
+  </p:timing>
 </p:sld>
 </file>
 
@@ -15671,6 +20598,855 @@
   <p:clrMapOvr>
     <a:masterClrMapping/>
   </p:clrMapOvr>
+  <p:timing>
+    <p:tnLst>
+      <p:par>
+        <p:cTn id="1" dur="indefinite" restart="never" nodeType="tmRoot">
+          <p:childTnLst>
+            <p:seq concurrent="1" nextAc="seek">
+              <p:cTn id="2" dur="indefinite" nodeType="mainSeq">
+                <p:childTnLst>
+                  <p:par>
+                    <p:cTn id="3" fill="hold">
+                      <p:stCondLst>
+                        <p:cond delay="indefinite"/>
+                      </p:stCondLst>
+                      <p:childTnLst>
+                        <p:par>
+                          <p:cTn id="4" fill="hold">
+                            <p:stCondLst>
+                              <p:cond delay="0"/>
+                            </p:stCondLst>
+                            <p:childTnLst>
+                              <p:par>
+                                <p:cTn id="5" presetID="2" presetClass="entr" presetSubtype="4" fill="hold" nodeType="clickEffect">
+                                  <p:stCondLst>
+                                    <p:cond delay="0"/>
+                                  </p:stCondLst>
+                                  <p:childTnLst>
+                                    <p:set>
+                                      <p:cBhvr>
+                                        <p:cTn id="6" dur="1" fill="hold">
+                                          <p:stCondLst>
+                                            <p:cond delay="0"/>
+                                          </p:stCondLst>
+                                        </p:cTn>
+                                        <p:tgtEl>
+                                          <p:spTgt spid="6">
+                                            <p:txEl>
+                                              <p:pRg st="0" end="0"/>
+                                            </p:txEl>
+                                          </p:spTgt>
+                                        </p:tgtEl>
+                                        <p:attrNameLst>
+                                          <p:attrName>style.visibility</p:attrName>
+                                        </p:attrNameLst>
+                                      </p:cBhvr>
+                                      <p:to>
+                                        <p:strVal val="visible"/>
+                                      </p:to>
+                                    </p:set>
+                                    <p:anim calcmode="lin" valueType="num">
+                                      <p:cBhvr additive="base">
+                                        <p:cTn id="7" dur="500" fill="hold"/>
+                                        <p:tgtEl>
+                                          <p:spTgt spid="6">
+                                            <p:txEl>
+                                              <p:pRg st="0" end="0"/>
+                                            </p:txEl>
+                                          </p:spTgt>
+                                        </p:tgtEl>
+                                        <p:attrNameLst>
+                                          <p:attrName>ppt_x</p:attrName>
+                                        </p:attrNameLst>
+                                      </p:cBhvr>
+                                      <p:tavLst>
+                                        <p:tav tm="0">
+                                          <p:val>
+                                            <p:strVal val="#ppt_x"/>
+                                          </p:val>
+                                        </p:tav>
+                                        <p:tav tm="100000">
+                                          <p:val>
+                                            <p:strVal val="#ppt_x"/>
+                                          </p:val>
+                                        </p:tav>
+                                      </p:tavLst>
+                                    </p:anim>
+                                    <p:anim calcmode="lin" valueType="num">
+                                      <p:cBhvr additive="base">
+                                        <p:cTn id="8" dur="500" fill="hold"/>
+                                        <p:tgtEl>
+                                          <p:spTgt spid="6">
+                                            <p:txEl>
+                                              <p:pRg st="0" end="0"/>
+                                            </p:txEl>
+                                          </p:spTgt>
+                                        </p:tgtEl>
+                                        <p:attrNameLst>
+                                          <p:attrName>ppt_y</p:attrName>
+                                        </p:attrNameLst>
+                                      </p:cBhvr>
+                                      <p:tavLst>
+                                        <p:tav tm="0">
+                                          <p:val>
+                                            <p:strVal val="1+#ppt_h/2"/>
+                                          </p:val>
+                                        </p:tav>
+                                        <p:tav tm="100000">
+                                          <p:val>
+                                            <p:strVal val="#ppt_y"/>
+                                          </p:val>
+                                        </p:tav>
+                                      </p:tavLst>
+                                    </p:anim>
+                                  </p:childTnLst>
+                                </p:cTn>
+                              </p:par>
+                              <p:par>
+                                <p:cTn id="9" presetID="2" presetClass="entr" presetSubtype="4" fill="hold" nodeType="withEffect">
+                                  <p:stCondLst>
+                                    <p:cond delay="0"/>
+                                  </p:stCondLst>
+                                  <p:childTnLst>
+                                    <p:set>
+                                      <p:cBhvr>
+                                        <p:cTn id="10" dur="1" fill="hold">
+                                          <p:stCondLst>
+                                            <p:cond delay="0"/>
+                                          </p:stCondLst>
+                                        </p:cTn>
+                                        <p:tgtEl>
+                                          <p:spTgt spid="6">
+                                            <p:txEl>
+                                              <p:pRg st="1" end="1"/>
+                                            </p:txEl>
+                                          </p:spTgt>
+                                        </p:tgtEl>
+                                        <p:attrNameLst>
+                                          <p:attrName>style.visibility</p:attrName>
+                                        </p:attrNameLst>
+                                      </p:cBhvr>
+                                      <p:to>
+                                        <p:strVal val="visible"/>
+                                      </p:to>
+                                    </p:set>
+                                    <p:anim calcmode="lin" valueType="num">
+                                      <p:cBhvr additive="base">
+                                        <p:cTn id="11" dur="500" fill="hold"/>
+                                        <p:tgtEl>
+                                          <p:spTgt spid="6">
+                                            <p:txEl>
+                                              <p:pRg st="1" end="1"/>
+                                            </p:txEl>
+                                          </p:spTgt>
+                                        </p:tgtEl>
+                                        <p:attrNameLst>
+                                          <p:attrName>ppt_x</p:attrName>
+                                        </p:attrNameLst>
+                                      </p:cBhvr>
+                                      <p:tavLst>
+                                        <p:tav tm="0">
+                                          <p:val>
+                                            <p:strVal val="#ppt_x"/>
+                                          </p:val>
+                                        </p:tav>
+                                        <p:tav tm="100000">
+                                          <p:val>
+                                            <p:strVal val="#ppt_x"/>
+                                          </p:val>
+                                        </p:tav>
+                                      </p:tavLst>
+                                    </p:anim>
+                                    <p:anim calcmode="lin" valueType="num">
+                                      <p:cBhvr additive="base">
+                                        <p:cTn id="12" dur="500" fill="hold"/>
+                                        <p:tgtEl>
+                                          <p:spTgt spid="6">
+                                            <p:txEl>
+                                              <p:pRg st="1" end="1"/>
+                                            </p:txEl>
+                                          </p:spTgt>
+                                        </p:tgtEl>
+                                        <p:attrNameLst>
+                                          <p:attrName>ppt_y</p:attrName>
+                                        </p:attrNameLst>
+                                      </p:cBhvr>
+                                      <p:tavLst>
+                                        <p:tav tm="0">
+                                          <p:val>
+                                            <p:strVal val="1+#ppt_h/2"/>
+                                          </p:val>
+                                        </p:tav>
+                                        <p:tav tm="100000">
+                                          <p:val>
+                                            <p:strVal val="#ppt_y"/>
+                                          </p:val>
+                                        </p:tav>
+                                      </p:tavLst>
+                                    </p:anim>
+                                  </p:childTnLst>
+                                </p:cTn>
+                              </p:par>
+                              <p:par>
+                                <p:cTn id="13" presetID="2" presetClass="entr" presetSubtype="4" fill="hold" nodeType="withEffect">
+                                  <p:stCondLst>
+                                    <p:cond delay="0"/>
+                                  </p:stCondLst>
+                                  <p:childTnLst>
+                                    <p:set>
+                                      <p:cBhvr>
+                                        <p:cTn id="14" dur="1" fill="hold">
+                                          <p:stCondLst>
+                                            <p:cond delay="0"/>
+                                          </p:stCondLst>
+                                        </p:cTn>
+                                        <p:tgtEl>
+                                          <p:spTgt spid="6">
+                                            <p:txEl>
+                                              <p:pRg st="2" end="2"/>
+                                            </p:txEl>
+                                          </p:spTgt>
+                                        </p:tgtEl>
+                                        <p:attrNameLst>
+                                          <p:attrName>style.visibility</p:attrName>
+                                        </p:attrNameLst>
+                                      </p:cBhvr>
+                                      <p:to>
+                                        <p:strVal val="visible"/>
+                                      </p:to>
+                                    </p:set>
+                                    <p:anim calcmode="lin" valueType="num">
+                                      <p:cBhvr additive="base">
+                                        <p:cTn id="15" dur="500" fill="hold"/>
+                                        <p:tgtEl>
+                                          <p:spTgt spid="6">
+                                            <p:txEl>
+                                              <p:pRg st="2" end="2"/>
+                                            </p:txEl>
+                                          </p:spTgt>
+                                        </p:tgtEl>
+                                        <p:attrNameLst>
+                                          <p:attrName>ppt_x</p:attrName>
+                                        </p:attrNameLst>
+                                      </p:cBhvr>
+                                      <p:tavLst>
+                                        <p:tav tm="0">
+                                          <p:val>
+                                            <p:strVal val="#ppt_x"/>
+                                          </p:val>
+                                        </p:tav>
+                                        <p:tav tm="100000">
+                                          <p:val>
+                                            <p:strVal val="#ppt_x"/>
+                                          </p:val>
+                                        </p:tav>
+                                      </p:tavLst>
+                                    </p:anim>
+                                    <p:anim calcmode="lin" valueType="num">
+                                      <p:cBhvr additive="base">
+                                        <p:cTn id="16" dur="500" fill="hold"/>
+                                        <p:tgtEl>
+                                          <p:spTgt spid="6">
+                                            <p:txEl>
+                                              <p:pRg st="2" end="2"/>
+                                            </p:txEl>
+                                          </p:spTgt>
+                                        </p:tgtEl>
+                                        <p:attrNameLst>
+                                          <p:attrName>ppt_y</p:attrName>
+                                        </p:attrNameLst>
+                                      </p:cBhvr>
+                                      <p:tavLst>
+                                        <p:tav tm="0">
+                                          <p:val>
+                                            <p:strVal val="1+#ppt_h/2"/>
+                                          </p:val>
+                                        </p:tav>
+                                        <p:tav tm="100000">
+                                          <p:val>
+                                            <p:strVal val="#ppt_y"/>
+                                          </p:val>
+                                        </p:tav>
+                                      </p:tavLst>
+                                    </p:anim>
+                                  </p:childTnLst>
+                                </p:cTn>
+                              </p:par>
+                              <p:par>
+                                <p:cTn id="17" presetID="2" presetClass="entr" presetSubtype="4" fill="hold" nodeType="withEffect">
+                                  <p:stCondLst>
+                                    <p:cond delay="0"/>
+                                  </p:stCondLst>
+                                  <p:childTnLst>
+                                    <p:set>
+                                      <p:cBhvr>
+                                        <p:cTn id="18" dur="1" fill="hold">
+                                          <p:stCondLst>
+                                            <p:cond delay="0"/>
+                                          </p:stCondLst>
+                                        </p:cTn>
+                                        <p:tgtEl>
+                                          <p:spTgt spid="6">
+                                            <p:txEl>
+                                              <p:pRg st="3" end="3"/>
+                                            </p:txEl>
+                                          </p:spTgt>
+                                        </p:tgtEl>
+                                        <p:attrNameLst>
+                                          <p:attrName>style.visibility</p:attrName>
+                                        </p:attrNameLst>
+                                      </p:cBhvr>
+                                      <p:to>
+                                        <p:strVal val="visible"/>
+                                      </p:to>
+                                    </p:set>
+                                    <p:anim calcmode="lin" valueType="num">
+                                      <p:cBhvr additive="base">
+                                        <p:cTn id="19" dur="500" fill="hold"/>
+                                        <p:tgtEl>
+                                          <p:spTgt spid="6">
+                                            <p:txEl>
+                                              <p:pRg st="3" end="3"/>
+                                            </p:txEl>
+                                          </p:spTgt>
+                                        </p:tgtEl>
+                                        <p:attrNameLst>
+                                          <p:attrName>ppt_x</p:attrName>
+                                        </p:attrNameLst>
+                                      </p:cBhvr>
+                                      <p:tavLst>
+                                        <p:tav tm="0">
+                                          <p:val>
+                                            <p:strVal val="#ppt_x"/>
+                                          </p:val>
+                                        </p:tav>
+                                        <p:tav tm="100000">
+                                          <p:val>
+                                            <p:strVal val="#ppt_x"/>
+                                          </p:val>
+                                        </p:tav>
+                                      </p:tavLst>
+                                    </p:anim>
+                                    <p:anim calcmode="lin" valueType="num">
+                                      <p:cBhvr additive="base">
+                                        <p:cTn id="20" dur="500" fill="hold"/>
+                                        <p:tgtEl>
+                                          <p:spTgt spid="6">
+                                            <p:txEl>
+                                              <p:pRg st="3" end="3"/>
+                                            </p:txEl>
+                                          </p:spTgt>
+                                        </p:tgtEl>
+                                        <p:attrNameLst>
+                                          <p:attrName>ppt_y</p:attrName>
+                                        </p:attrNameLst>
+                                      </p:cBhvr>
+                                      <p:tavLst>
+                                        <p:tav tm="0">
+                                          <p:val>
+                                            <p:strVal val="1+#ppt_h/2"/>
+                                          </p:val>
+                                        </p:tav>
+                                        <p:tav tm="100000">
+                                          <p:val>
+                                            <p:strVal val="#ppt_y"/>
+                                          </p:val>
+                                        </p:tav>
+                                      </p:tavLst>
+                                    </p:anim>
+                                  </p:childTnLst>
+                                </p:cTn>
+                              </p:par>
+                            </p:childTnLst>
+                          </p:cTn>
+                        </p:par>
+                      </p:childTnLst>
+                    </p:cTn>
+                  </p:par>
+                  <p:par>
+                    <p:cTn id="21" fill="hold">
+                      <p:stCondLst>
+                        <p:cond delay="indefinite"/>
+                      </p:stCondLst>
+                      <p:childTnLst>
+                        <p:par>
+                          <p:cTn id="22" fill="hold">
+                            <p:stCondLst>
+                              <p:cond delay="0"/>
+                            </p:stCondLst>
+                            <p:childTnLst>
+                              <p:par>
+                                <p:cTn id="23" presetID="2" presetClass="entr" presetSubtype="4" fill="hold" nodeType="clickEffect">
+                                  <p:stCondLst>
+                                    <p:cond delay="0"/>
+                                  </p:stCondLst>
+                                  <p:childTnLst>
+                                    <p:set>
+                                      <p:cBhvr>
+                                        <p:cTn id="24" dur="1" fill="hold">
+                                          <p:stCondLst>
+                                            <p:cond delay="0"/>
+                                          </p:stCondLst>
+                                        </p:cTn>
+                                        <p:tgtEl>
+                                          <p:spTgt spid="6">
+                                            <p:txEl>
+                                              <p:pRg st="5" end="5"/>
+                                            </p:txEl>
+                                          </p:spTgt>
+                                        </p:tgtEl>
+                                        <p:attrNameLst>
+                                          <p:attrName>style.visibility</p:attrName>
+                                        </p:attrNameLst>
+                                      </p:cBhvr>
+                                      <p:to>
+                                        <p:strVal val="visible"/>
+                                      </p:to>
+                                    </p:set>
+                                    <p:anim calcmode="lin" valueType="num">
+                                      <p:cBhvr additive="base">
+                                        <p:cTn id="25" dur="500" fill="hold"/>
+                                        <p:tgtEl>
+                                          <p:spTgt spid="6">
+                                            <p:txEl>
+                                              <p:pRg st="5" end="5"/>
+                                            </p:txEl>
+                                          </p:spTgt>
+                                        </p:tgtEl>
+                                        <p:attrNameLst>
+                                          <p:attrName>ppt_x</p:attrName>
+                                        </p:attrNameLst>
+                                      </p:cBhvr>
+                                      <p:tavLst>
+                                        <p:tav tm="0">
+                                          <p:val>
+                                            <p:strVal val="#ppt_x"/>
+                                          </p:val>
+                                        </p:tav>
+                                        <p:tav tm="100000">
+                                          <p:val>
+                                            <p:strVal val="#ppt_x"/>
+                                          </p:val>
+                                        </p:tav>
+                                      </p:tavLst>
+                                    </p:anim>
+                                    <p:anim calcmode="lin" valueType="num">
+                                      <p:cBhvr additive="base">
+                                        <p:cTn id="26" dur="500" fill="hold"/>
+                                        <p:tgtEl>
+                                          <p:spTgt spid="6">
+                                            <p:txEl>
+                                              <p:pRg st="5" end="5"/>
+                                            </p:txEl>
+                                          </p:spTgt>
+                                        </p:tgtEl>
+                                        <p:attrNameLst>
+                                          <p:attrName>ppt_y</p:attrName>
+                                        </p:attrNameLst>
+                                      </p:cBhvr>
+                                      <p:tavLst>
+                                        <p:tav tm="0">
+                                          <p:val>
+                                            <p:strVal val="1+#ppt_h/2"/>
+                                          </p:val>
+                                        </p:tav>
+                                        <p:tav tm="100000">
+                                          <p:val>
+                                            <p:strVal val="#ppt_y"/>
+                                          </p:val>
+                                        </p:tav>
+                                      </p:tavLst>
+                                    </p:anim>
+                                  </p:childTnLst>
+                                </p:cTn>
+                              </p:par>
+                              <p:par>
+                                <p:cTn id="27" presetID="2" presetClass="entr" presetSubtype="4" fill="hold" nodeType="withEffect">
+                                  <p:stCondLst>
+                                    <p:cond delay="0"/>
+                                  </p:stCondLst>
+                                  <p:childTnLst>
+                                    <p:set>
+                                      <p:cBhvr>
+                                        <p:cTn id="28" dur="1" fill="hold">
+                                          <p:stCondLst>
+                                            <p:cond delay="0"/>
+                                          </p:stCondLst>
+                                        </p:cTn>
+                                        <p:tgtEl>
+                                          <p:spTgt spid="6">
+                                            <p:txEl>
+                                              <p:pRg st="6" end="6"/>
+                                            </p:txEl>
+                                          </p:spTgt>
+                                        </p:tgtEl>
+                                        <p:attrNameLst>
+                                          <p:attrName>style.visibility</p:attrName>
+                                        </p:attrNameLst>
+                                      </p:cBhvr>
+                                      <p:to>
+                                        <p:strVal val="visible"/>
+                                      </p:to>
+                                    </p:set>
+                                    <p:anim calcmode="lin" valueType="num">
+                                      <p:cBhvr additive="base">
+                                        <p:cTn id="29" dur="500" fill="hold"/>
+                                        <p:tgtEl>
+                                          <p:spTgt spid="6">
+                                            <p:txEl>
+                                              <p:pRg st="6" end="6"/>
+                                            </p:txEl>
+                                          </p:spTgt>
+                                        </p:tgtEl>
+                                        <p:attrNameLst>
+                                          <p:attrName>ppt_x</p:attrName>
+                                        </p:attrNameLst>
+                                      </p:cBhvr>
+                                      <p:tavLst>
+                                        <p:tav tm="0">
+                                          <p:val>
+                                            <p:strVal val="#ppt_x"/>
+                                          </p:val>
+                                        </p:tav>
+                                        <p:tav tm="100000">
+                                          <p:val>
+                                            <p:strVal val="#ppt_x"/>
+                                          </p:val>
+                                        </p:tav>
+                                      </p:tavLst>
+                                    </p:anim>
+                                    <p:anim calcmode="lin" valueType="num">
+                                      <p:cBhvr additive="base">
+                                        <p:cTn id="30" dur="500" fill="hold"/>
+                                        <p:tgtEl>
+                                          <p:spTgt spid="6">
+                                            <p:txEl>
+                                              <p:pRg st="6" end="6"/>
+                                            </p:txEl>
+                                          </p:spTgt>
+                                        </p:tgtEl>
+                                        <p:attrNameLst>
+                                          <p:attrName>ppt_y</p:attrName>
+                                        </p:attrNameLst>
+                                      </p:cBhvr>
+                                      <p:tavLst>
+                                        <p:tav tm="0">
+                                          <p:val>
+                                            <p:strVal val="1+#ppt_h/2"/>
+                                          </p:val>
+                                        </p:tav>
+                                        <p:tav tm="100000">
+                                          <p:val>
+                                            <p:strVal val="#ppt_y"/>
+                                          </p:val>
+                                        </p:tav>
+                                      </p:tavLst>
+                                    </p:anim>
+                                  </p:childTnLst>
+                                </p:cTn>
+                              </p:par>
+                              <p:par>
+                                <p:cTn id="31" presetID="2" presetClass="entr" presetSubtype="4" fill="hold" nodeType="withEffect">
+                                  <p:stCondLst>
+                                    <p:cond delay="0"/>
+                                  </p:stCondLst>
+                                  <p:childTnLst>
+                                    <p:set>
+                                      <p:cBhvr>
+                                        <p:cTn id="32" dur="1" fill="hold">
+                                          <p:stCondLst>
+                                            <p:cond delay="0"/>
+                                          </p:stCondLst>
+                                        </p:cTn>
+                                        <p:tgtEl>
+                                          <p:spTgt spid="6">
+                                            <p:txEl>
+                                              <p:pRg st="7" end="7"/>
+                                            </p:txEl>
+                                          </p:spTgt>
+                                        </p:tgtEl>
+                                        <p:attrNameLst>
+                                          <p:attrName>style.visibility</p:attrName>
+                                        </p:attrNameLst>
+                                      </p:cBhvr>
+                                      <p:to>
+                                        <p:strVal val="visible"/>
+                                      </p:to>
+                                    </p:set>
+                                    <p:anim calcmode="lin" valueType="num">
+                                      <p:cBhvr additive="base">
+                                        <p:cTn id="33" dur="500" fill="hold"/>
+                                        <p:tgtEl>
+                                          <p:spTgt spid="6">
+                                            <p:txEl>
+                                              <p:pRg st="7" end="7"/>
+                                            </p:txEl>
+                                          </p:spTgt>
+                                        </p:tgtEl>
+                                        <p:attrNameLst>
+                                          <p:attrName>ppt_x</p:attrName>
+                                        </p:attrNameLst>
+                                      </p:cBhvr>
+                                      <p:tavLst>
+                                        <p:tav tm="0">
+                                          <p:val>
+                                            <p:strVal val="#ppt_x"/>
+                                          </p:val>
+                                        </p:tav>
+                                        <p:tav tm="100000">
+                                          <p:val>
+                                            <p:strVal val="#ppt_x"/>
+                                          </p:val>
+                                        </p:tav>
+                                      </p:tavLst>
+                                    </p:anim>
+                                    <p:anim calcmode="lin" valueType="num">
+                                      <p:cBhvr additive="base">
+                                        <p:cTn id="34" dur="500" fill="hold"/>
+                                        <p:tgtEl>
+                                          <p:spTgt spid="6">
+                                            <p:txEl>
+                                              <p:pRg st="7" end="7"/>
+                                            </p:txEl>
+                                          </p:spTgt>
+                                        </p:tgtEl>
+                                        <p:attrNameLst>
+                                          <p:attrName>ppt_y</p:attrName>
+                                        </p:attrNameLst>
+                                      </p:cBhvr>
+                                      <p:tavLst>
+                                        <p:tav tm="0">
+                                          <p:val>
+                                            <p:strVal val="1+#ppt_h/2"/>
+                                          </p:val>
+                                        </p:tav>
+                                        <p:tav tm="100000">
+                                          <p:val>
+                                            <p:strVal val="#ppt_y"/>
+                                          </p:val>
+                                        </p:tav>
+                                      </p:tavLst>
+                                    </p:anim>
+                                  </p:childTnLst>
+                                </p:cTn>
+                              </p:par>
+                              <p:par>
+                                <p:cTn id="35" presetID="2" presetClass="entr" presetSubtype="4" fill="hold" nodeType="withEffect">
+                                  <p:stCondLst>
+                                    <p:cond delay="0"/>
+                                  </p:stCondLst>
+                                  <p:childTnLst>
+                                    <p:set>
+                                      <p:cBhvr>
+                                        <p:cTn id="36" dur="1" fill="hold">
+                                          <p:stCondLst>
+                                            <p:cond delay="0"/>
+                                          </p:stCondLst>
+                                        </p:cTn>
+                                        <p:tgtEl>
+                                          <p:spTgt spid="6">
+                                            <p:txEl>
+                                              <p:pRg st="8" end="8"/>
+                                            </p:txEl>
+                                          </p:spTgt>
+                                        </p:tgtEl>
+                                        <p:attrNameLst>
+                                          <p:attrName>style.visibility</p:attrName>
+                                        </p:attrNameLst>
+                                      </p:cBhvr>
+                                      <p:to>
+                                        <p:strVal val="visible"/>
+                                      </p:to>
+                                    </p:set>
+                                    <p:anim calcmode="lin" valueType="num">
+                                      <p:cBhvr additive="base">
+                                        <p:cTn id="37" dur="500" fill="hold"/>
+                                        <p:tgtEl>
+                                          <p:spTgt spid="6">
+                                            <p:txEl>
+                                              <p:pRg st="8" end="8"/>
+                                            </p:txEl>
+                                          </p:spTgt>
+                                        </p:tgtEl>
+                                        <p:attrNameLst>
+                                          <p:attrName>ppt_x</p:attrName>
+                                        </p:attrNameLst>
+                                      </p:cBhvr>
+                                      <p:tavLst>
+                                        <p:tav tm="0">
+                                          <p:val>
+                                            <p:strVal val="#ppt_x"/>
+                                          </p:val>
+                                        </p:tav>
+                                        <p:tav tm="100000">
+                                          <p:val>
+                                            <p:strVal val="#ppt_x"/>
+                                          </p:val>
+                                        </p:tav>
+                                      </p:tavLst>
+                                    </p:anim>
+                                    <p:anim calcmode="lin" valueType="num">
+                                      <p:cBhvr additive="base">
+                                        <p:cTn id="38" dur="500" fill="hold"/>
+                                        <p:tgtEl>
+                                          <p:spTgt spid="6">
+                                            <p:txEl>
+                                              <p:pRg st="8" end="8"/>
+                                            </p:txEl>
+                                          </p:spTgt>
+                                        </p:tgtEl>
+                                        <p:attrNameLst>
+                                          <p:attrName>ppt_y</p:attrName>
+                                        </p:attrNameLst>
+                                      </p:cBhvr>
+                                      <p:tavLst>
+                                        <p:tav tm="0">
+                                          <p:val>
+                                            <p:strVal val="1+#ppt_h/2"/>
+                                          </p:val>
+                                        </p:tav>
+                                        <p:tav tm="100000">
+                                          <p:val>
+                                            <p:strVal val="#ppt_y"/>
+                                          </p:val>
+                                        </p:tav>
+                                      </p:tavLst>
+                                    </p:anim>
+                                  </p:childTnLst>
+                                </p:cTn>
+                              </p:par>
+                            </p:childTnLst>
+                          </p:cTn>
+                        </p:par>
+                      </p:childTnLst>
+                    </p:cTn>
+                  </p:par>
+                  <p:par>
+                    <p:cTn id="39" fill="hold">
+                      <p:stCondLst>
+                        <p:cond delay="indefinite"/>
+                      </p:stCondLst>
+                      <p:childTnLst>
+                        <p:par>
+                          <p:cTn id="40" fill="hold">
+                            <p:stCondLst>
+                              <p:cond delay="0"/>
+                            </p:stCondLst>
+                            <p:childTnLst>
+                              <p:par>
+                                <p:cTn id="41" presetID="2" presetClass="entr" presetSubtype="4" fill="hold" nodeType="clickEffect">
+                                  <p:stCondLst>
+                                    <p:cond delay="0"/>
+                                  </p:stCondLst>
+                                  <p:childTnLst>
+                                    <p:set>
+                                      <p:cBhvr>
+                                        <p:cTn id="42" dur="1" fill="hold">
+                                          <p:stCondLst>
+                                            <p:cond delay="0"/>
+                                          </p:stCondLst>
+                                        </p:cTn>
+                                        <p:tgtEl>
+                                          <p:spTgt spid="6">
+                                            <p:txEl>
+                                              <p:pRg st="10" end="10"/>
+                                            </p:txEl>
+                                          </p:spTgt>
+                                        </p:tgtEl>
+                                        <p:attrNameLst>
+                                          <p:attrName>style.visibility</p:attrName>
+                                        </p:attrNameLst>
+                                      </p:cBhvr>
+                                      <p:to>
+                                        <p:strVal val="visible"/>
+                                      </p:to>
+                                    </p:set>
+                                    <p:anim calcmode="lin" valueType="num">
+                                      <p:cBhvr additive="base">
+                                        <p:cTn id="43" dur="500" fill="hold"/>
+                                        <p:tgtEl>
+                                          <p:spTgt spid="6">
+                                            <p:txEl>
+                                              <p:pRg st="10" end="10"/>
+                                            </p:txEl>
+                                          </p:spTgt>
+                                        </p:tgtEl>
+                                        <p:attrNameLst>
+                                          <p:attrName>ppt_x</p:attrName>
+                                        </p:attrNameLst>
+                                      </p:cBhvr>
+                                      <p:tavLst>
+                                        <p:tav tm="0">
+                                          <p:val>
+                                            <p:strVal val="#ppt_x"/>
+                                          </p:val>
+                                        </p:tav>
+                                        <p:tav tm="100000">
+                                          <p:val>
+                                            <p:strVal val="#ppt_x"/>
+                                          </p:val>
+                                        </p:tav>
+                                      </p:tavLst>
+                                    </p:anim>
+                                    <p:anim calcmode="lin" valueType="num">
+                                      <p:cBhvr additive="base">
+                                        <p:cTn id="44" dur="500" fill="hold"/>
+                                        <p:tgtEl>
+                                          <p:spTgt spid="6">
+                                            <p:txEl>
+                                              <p:pRg st="10" end="10"/>
+                                            </p:txEl>
+                                          </p:spTgt>
+                                        </p:tgtEl>
+                                        <p:attrNameLst>
+                                          <p:attrName>ppt_y</p:attrName>
+                                        </p:attrNameLst>
+                                      </p:cBhvr>
+                                      <p:tavLst>
+                                        <p:tav tm="0">
+                                          <p:val>
+                                            <p:strVal val="1+#ppt_h/2"/>
+                                          </p:val>
+                                        </p:tav>
+                                        <p:tav tm="100000">
+                                          <p:val>
+                                            <p:strVal val="#ppt_y"/>
+                                          </p:val>
+                                        </p:tav>
+                                      </p:tavLst>
+                                    </p:anim>
+                                  </p:childTnLst>
+                                </p:cTn>
+                              </p:par>
+                            </p:childTnLst>
+                          </p:cTn>
+                        </p:par>
+                      </p:childTnLst>
+                    </p:cTn>
+                  </p:par>
+                </p:childTnLst>
+              </p:cTn>
+              <p:prevCondLst>
+                <p:cond evt="onPrev" delay="0">
+                  <p:tgtEl>
+                    <p:sldTgt/>
+                  </p:tgtEl>
+                </p:cond>
+              </p:prevCondLst>
+              <p:nextCondLst>
+                <p:cond evt="onNext" delay="0">
+                  <p:tgtEl>
+                    <p:sldTgt/>
+                  </p:tgtEl>
+                </p:cond>
+              </p:nextCondLst>
+            </p:seq>
+          </p:childTnLst>
+        </p:cTn>
+      </p:par>
+    </p:tnLst>
+  </p:timing>
 </p:sld>
 </file>
 
@@ -16174,7 +21950,7 @@
           </a:ln>
           <a:extLst>
             <a:ext uri="{C572A759-6A51-4108-AA02-DFA0A04FC94B}">
-              <ma14:wrappingTextBoxFlag xmlns:ma14="http://schemas.microsoft.com/office/mac/drawingml/2011/main" xmlns="" val="1"/>
+              <ma14:wrappingTextBoxFlag xmlns="" xmlns:ma14="http://schemas.microsoft.com/office/mac/drawingml/2011/main" val="1"/>
             </a:ext>
           </a:extLst>
         </p:spPr>
